--- a/docs/slides/NightHunter_pitch.pptx
+++ b/docs/slides/NightHunter_pitch.pptx
@@ -6,13 +6,9 @@
   </p:sldMasterIdLst>
   <p:sldIdLst>
     <p:sldId id="256" r:id="rId7"/>
-    <p:sldId id="257" r:id="rId8"/>
-    <p:sldId id="258" r:id="rId9"/>
-    <p:sldId id="259" r:id="rId10"/>
-    <p:sldId id="260" r:id="rId11"/>
-    <p:sldId id="261" r:id="rId12"/>
-    <p:sldId id="262" r:id="rId13"/>
-    <p:sldId id="263" r:id="rId14"/>
+    <p:sldId id="257" r:id="rId9"/>
+    <p:sldId id="258" r:id="rId10"/>
+    <p:sldId id="259" r:id="rId11"/>
   </p:sldIdLst>
   <p:sldSz cx="12191695" cy="6858000" type="screen4x3"/>
   <p:notesSz cx="6858000" cy="9144000"/>
@@ -112,6 +108,636 @@
     </a:lvl9pPr>
   </p:defaultTextStyle>
 </p:presentation>
+</file>
+
+<file path=ppt/notesMasters/notesMaster1.xml><?xml version="1.0" encoding="utf-8"?>
+<p:notesMaster xmlns:a="http://schemas.openxmlformats.org/drawingml/2006/main" xmlns:p="http://schemas.openxmlformats.org/presentationml/2006/main" xmlns:r="http://schemas.openxmlformats.org/officeDocument/2006/relationships">
+  <p:cSld>
+    <p:bg>
+      <p:bgRef idx="1001">
+        <a:schemeClr val="bg1"/>
+      </p:bgRef>
+    </p:bg>
+    <p:spTree>
+      <p:nvGrpSpPr>
+        <p:cNvPr id="1" name=""/>
+        <p:cNvGrpSpPr/>
+        <p:nvPr/>
+      </p:nvGrpSpPr>
+      <p:grpSpPr>
+        <a:xfrm>
+          <a:off x="0" y="0"/>
+          <a:ext cx="0" cy="0"/>
+          <a:chOff x="0" y="0"/>
+          <a:chExt cx="0" cy="0"/>
+        </a:xfrm>
+      </p:grpSpPr>
+      <p:sp>
+        <p:nvSpPr>
+          <p:cNvPr id="2" name="Header Placeholder 1"/>
+          <p:cNvSpPr>
+            <a:spLocks noGrp="1"/>
+          </p:cNvSpPr>
+          <p:nvPr>
+            <p:ph type="hdr" sz="quarter"/>
+          </p:nvPr>
+        </p:nvSpPr>
+        <p:spPr>
+          <a:xfrm>
+            <a:off x="0" y="0"/>
+            <a:ext cx="2971800" cy="457200"/>
+          </a:xfrm>
+          <a:prstGeom prst="rect">
+            <a:avLst/>
+          </a:prstGeom>
+        </p:spPr>
+        <p:txBody>
+          <a:bodyPr vert="horz" lIns="91440" tIns="45720" rIns="91440" bIns="45720" rtlCol="0"/>
+          <a:lstStyle>
+            <a:lvl1pPr algn="l">
+              <a:defRPr sz="1200"/>
+            </a:lvl1pPr>
+          </a:lstStyle>
+          <a:p>
+            <a:endParaRPr lang="en-US"/>
+          </a:p>
+        </p:txBody>
+      </p:sp>
+      <p:sp>
+        <p:nvSpPr>
+          <p:cNvPr id="3" name="Date Placeholder 2"/>
+          <p:cNvSpPr>
+            <a:spLocks noGrp="1"/>
+          </p:cNvSpPr>
+          <p:nvPr>
+            <p:ph type="dt" idx="1"/>
+          </p:nvPr>
+        </p:nvSpPr>
+        <p:spPr>
+          <a:xfrm>
+            <a:off x="3884613" y="0"/>
+            <a:ext cx="2971800" cy="457200"/>
+          </a:xfrm>
+          <a:prstGeom prst="rect">
+            <a:avLst/>
+          </a:prstGeom>
+        </p:spPr>
+        <p:txBody>
+          <a:bodyPr vert="horz" lIns="91440" tIns="45720" rIns="91440" bIns="45720" rtlCol="0"/>
+          <a:lstStyle>
+            <a:lvl1pPr algn="r">
+              <a:defRPr sz="1200"/>
+            </a:lvl1pPr>
+          </a:lstStyle>
+          <a:p>
+            <a:fld id="{0F89C1C7-3DCD-1040-A9CF-14679D8B5DDD}" type="datetimeFigureOut">
+              <a:rPr lang="en-US" smtClean="0"/>
+              <a:t>10/17/16</a:t>
+            </a:fld>
+            <a:endParaRPr lang="en-US"/>
+          </a:p>
+        </p:txBody>
+      </p:sp>
+      <p:sp>
+        <p:nvSpPr>
+          <p:cNvPr id="4" name="Slide Image Placeholder 3"/>
+          <p:cNvSpPr>
+            <a:spLocks noGrp="1" noRot="1" noChangeAspect="1"/>
+          </p:cNvSpPr>
+          <p:nvPr>
+            <p:ph type="sldImg" idx="2"/>
+          </p:nvPr>
+        </p:nvSpPr>
+        <p:spPr>
+          <a:xfrm>
+            <a:off x="1143000" y="685800"/>
+            <a:ext cx="4572000" cy="3429000"/>
+          </a:xfrm>
+          <a:prstGeom prst="rect">
+            <a:avLst/>
+          </a:prstGeom>
+          <a:noFill/>
+          <a:ln w="12700">
+            <a:solidFill>
+              <a:prstClr val="black"/>
+            </a:solidFill>
+          </a:ln>
+        </p:spPr>
+        <p:txBody>
+          <a:bodyPr vert="horz" lIns="91440" tIns="45720" rIns="91440" bIns="45720" rtlCol="0" anchor="ctr"/>
+          <a:lstStyle/>
+          <a:p>
+            <a:endParaRPr lang="en-US"/>
+          </a:p>
+        </p:txBody>
+      </p:sp>
+      <p:sp>
+        <p:nvSpPr>
+          <p:cNvPr id="5" name="Notes Placeholder 4"/>
+          <p:cNvSpPr>
+            <a:spLocks noGrp="1"/>
+          </p:cNvSpPr>
+          <p:nvPr>
+            <p:ph type="body" sz="quarter" idx="3"/>
+          </p:nvPr>
+        </p:nvSpPr>
+        <p:spPr>
+          <a:xfrm>
+            <a:off x="685800" y="4343400"/>
+            <a:ext cx="5486400" cy="4114800"/>
+          </a:xfrm>
+          <a:prstGeom prst="rect">
+            <a:avLst/>
+          </a:prstGeom>
+        </p:spPr>
+        <p:txBody>
+          <a:bodyPr vert="horz" lIns="91440" tIns="45720" rIns="91440" bIns="45720" rtlCol="0"/>
+          <a:lstStyle/>
+          <a:p>
+            <a:pPr lvl="0"/>
+            <a:r>
+              <a:rPr lang="en-US" smtClean="0"/>
+              <a:t>Click to edit Master text styles</a:t>
+            </a:r>
+          </a:p>
+          <a:p>
+            <a:pPr lvl="1"/>
+            <a:r>
+              <a:rPr lang="en-US" smtClean="0"/>
+              <a:t>Second level</a:t>
+            </a:r>
+          </a:p>
+          <a:p>
+            <a:pPr lvl="2"/>
+            <a:r>
+              <a:rPr lang="en-US" smtClean="0"/>
+              <a:t>Third level</a:t>
+            </a:r>
+          </a:p>
+          <a:p>
+            <a:pPr lvl="3"/>
+            <a:r>
+              <a:rPr lang="en-US" smtClean="0"/>
+              <a:t>Fourth level</a:t>
+            </a:r>
+          </a:p>
+          <a:p>
+            <a:pPr lvl="4"/>
+            <a:r>
+              <a:rPr lang="en-US" smtClean="0"/>
+              <a:t>Fifth level</a:t>
+            </a:r>
+            <a:endParaRPr lang="en-US"/>
+          </a:p>
+        </p:txBody>
+      </p:sp>
+      <p:sp>
+        <p:nvSpPr>
+          <p:cNvPr id="6" name="Footer Placeholder 5"/>
+          <p:cNvSpPr>
+            <a:spLocks noGrp="1"/>
+          </p:cNvSpPr>
+          <p:nvPr>
+            <p:ph type="ftr" sz="quarter" idx="4"/>
+          </p:nvPr>
+        </p:nvSpPr>
+        <p:spPr>
+          <a:xfrm>
+            <a:off x="0" y="8685213"/>
+            <a:ext cx="2971800" cy="457200"/>
+          </a:xfrm>
+          <a:prstGeom prst="rect">
+            <a:avLst/>
+          </a:prstGeom>
+        </p:spPr>
+        <p:txBody>
+          <a:bodyPr vert="horz" lIns="91440" tIns="45720" rIns="91440" bIns="45720" rtlCol="0" anchor="b"/>
+          <a:lstStyle>
+            <a:lvl1pPr algn="l">
+              <a:defRPr sz="1200"/>
+            </a:lvl1pPr>
+          </a:lstStyle>
+          <a:p>
+            <a:endParaRPr lang="en-US"/>
+          </a:p>
+        </p:txBody>
+      </p:sp>
+      <p:sp>
+        <p:nvSpPr>
+          <p:cNvPr id="7" name="Slide Number Placeholder 6"/>
+          <p:cNvSpPr>
+            <a:spLocks noGrp="1"/>
+          </p:cNvSpPr>
+          <p:nvPr>
+            <p:ph type="sldNum" sz="quarter" idx="5"/>
+          </p:nvPr>
+        </p:nvSpPr>
+        <p:spPr>
+          <a:xfrm>
+            <a:off x="3884613" y="8685213"/>
+            <a:ext cx="2971800" cy="457200"/>
+          </a:xfrm>
+          <a:prstGeom prst="rect">
+            <a:avLst/>
+          </a:prstGeom>
+        </p:spPr>
+        <p:txBody>
+          <a:bodyPr vert="horz" lIns="91440" tIns="45720" rIns="91440" bIns="45720" rtlCol="0" anchor="b"/>
+          <a:lstStyle>
+            <a:lvl1pPr algn="r">
+              <a:defRPr sz="1200"/>
+            </a:lvl1pPr>
+          </a:lstStyle>
+          <a:p>
+            <a:fld id="{BB5E49A5-4136-284D-997B-48E1D791AD67}" type="slidenum">
+              <a:rPr lang="en-US" smtClean="0"/>
+              <a:t>‹#›</a:t>
+            </a:fld>
+            <a:endParaRPr lang="en-US"/>
+          </a:p>
+        </p:txBody>
+      </p:sp>
+    </p:spTree>
+    <p:extLst>
+      <p:ext uri="{BB962C8B-B14F-4D97-AF65-F5344CB8AC3E}">
+        <p14:creationId xmlns:p14="http://schemas.microsoft.com/office/powerpoint/2010/main" val="2623252185"/>
+      </p:ext>
+    </p:extLst>
+  </p:cSld>
+  <p:clrMap bg1="lt1" tx1="dk1" bg2="lt2" tx2="dk2" accent1="accent1" accent2="accent2" accent3="accent3" accent4="accent4" accent5="accent5" accent6="accent6" hlink="hlink" folHlink="folHlink"/>
+  <p:notesStyle>
+    <a:lvl1pPr marL="0" algn="l" defTabSz="457200" rtl="0" eaLnBrk="1" latinLnBrk="0" hangingPunct="1">
+      <a:defRPr sz="1200" kern="1200">
+        <a:solidFill>
+          <a:schemeClr val="tx1"/>
+        </a:solidFill>
+        <a:latin typeface="+mn-lt"/>
+        <a:ea typeface="+mn-ea"/>
+        <a:cs typeface="+mn-cs"/>
+      </a:defRPr>
+    </a:lvl1pPr>
+    <a:lvl2pPr marL="457200" algn="l" defTabSz="457200" rtl="0" eaLnBrk="1" latinLnBrk="0" hangingPunct="1">
+      <a:defRPr sz="1200" kern="1200">
+        <a:solidFill>
+          <a:schemeClr val="tx1"/>
+        </a:solidFill>
+        <a:latin typeface="+mn-lt"/>
+        <a:ea typeface="+mn-ea"/>
+        <a:cs typeface="+mn-cs"/>
+      </a:defRPr>
+    </a:lvl2pPr>
+    <a:lvl3pPr marL="914400" algn="l" defTabSz="457200" rtl="0" eaLnBrk="1" latinLnBrk="0" hangingPunct="1">
+      <a:defRPr sz="1200" kern="1200">
+        <a:solidFill>
+          <a:schemeClr val="tx1"/>
+        </a:solidFill>
+        <a:latin typeface="+mn-lt"/>
+        <a:ea typeface="+mn-ea"/>
+        <a:cs typeface="+mn-cs"/>
+      </a:defRPr>
+    </a:lvl3pPr>
+    <a:lvl4pPr marL="1371600" algn="l" defTabSz="457200" rtl="0" eaLnBrk="1" latinLnBrk="0" hangingPunct="1">
+      <a:defRPr sz="1200" kern="1200">
+        <a:solidFill>
+          <a:schemeClr val="tx1"/>
+        </a:solidFill>
+        <a:latin typeface="+mn-lt"/>
+        <a:ea typeface="+mn-ea"/>
+        <a:cs typeface="+mn-cs"/>
+      </a:defRPr>
+    </a:lvl4pPr>
+    <a:lvl5pPr marL="1828800" algn="l" defTabSz="457200" rtl="0" eaLnBrk="1" latinLnBrk="0" hangingPunct="1">
+      <a:defRPr sz="1200" kern="1200">
+        <a:solidFill>
+          <a:schemeClr val="tx1"/>
+        </a:solidFill>
+        <a:latin typeface="+mn-lt"/>
+        <a:ea typeface="+mn-ea"/>
+        <a:cs typeface="+mn-cs"/>
+      </a:defRPr>
+    </a:lvl5pPr>
+    <a:lvl6pPr marL="2286000" algn="l" defTabSz="457200" rtl="0" eaLnBrk="1" latinLnBrk="0" hangingPunct="1">
+      <a:defRPr sz="1200" kern="1200">
+        <a:solidFill>
+          <a:schemeClr val="tx1"/>
+        </a:solidFill>
+        <a:latin typeface="+mn-lt"/>
+        <a:ea typeface="+mn-ea"/>
+        <a:cs typeface="+mn-cs"/>
+      </a:defRPr>
+    </a:lvl6pPr>
+    <a:lvl7pPr marL="2743200" algn="l" defTabSz="457200" rtl="0" eaLnBrk="1" latinLnBrk="0" hangingPunct="1">
+      <a:defRPr sz="1200" kern="1200">
+        <a:solidFill>
+          <a:schemeClr val="tx1"/>
+        </a:solidFill>
+        <a:latin typeface="+mn-lt"/>
+        <a:ea typeface="+mn-ea"/>
+        <a:cs typeface="+mn-cs"/>
+      </a:defRPr>
+    </a:lvl7pPr>
+    <a:lvl8pPr marL="3200400" algn="l" defTabSz="457200" rtl="0" eaLnBrk="1" latinLnBrk="0" hangingPunct="1">
+      <a:defRPr sz="1200" kern="1200">
+        <a:solidFill>
+          <a:schemeClr val="tx1"/>
+        </a:solidFill>
+        <a:latin typeface="+mn-lt"/>
+        <a:ea typeface="+mn-ea"/>
+        <a:cs typeface="+mn-cs"/>
+      </a:defRPr>
+    </a:lvl8pPr>
+    <a:lvl9pPr marL="3657600" algn="l" defTabSz="457200" rtl="0" eaLnBrk="1" latinLnBrk="0" hangingPunct="1">
+      <a:defRPr sz="1200" kern="1200">
+        <a:solidFill>
+          <a:schemeClr val="tx1"/>
+        </a:solidFill>
+        <a:latin typeface="+mn-lt"/>
+        <a:ea typeface="+mn-ea"/>
+        <a:cs typeface="+mn-cs"/>
+      </a:defRPr>
+    </a:lvl9pPr>
+  </p:notesStyle>
+</p:notesMaster>
+</file>
+
+<file path=ppt/notesSlides/notesSlide1.xml><?xml version="1.0" encoding="utf-8"?>
+<p:notes xmlns:a="http://schemas.openxmlformats.org/drawingml/2006/main" xmlns:p="http://schemas.openxmlformats.org/presentationml/2006/main" xmlns:r="http://schemas.openxmlformats.org/officeDocument/2006/relationships">
+  <p:cSld>
+    <p:spTree>
+      <p:nvGrpSpPr>
+        <p:cNvPr id="1" name=""/>
+        <p:cNvGrpSpPr/>
+        <p:nvPr/>
+      </p:nvGrpSpPr>
+      <p:grpSpPr>
+        <a:xfrm>
+          <a:off x="0" y="0"/>
+          <a:ext cx="0" cy="0"/>
+          <a:chOff x="0" y="0"/>
+          <a:chExt cx="0" cy="0"/>
+        </a:xfrm>
+      </p:grpSpPr>
+      <p:sp>
+        <p:nvSpPr>
+          <p:cNvPr id="2" name="Slide Image Placeholder 1"/>
+          <p:cNvSpPr>
+            <a:spLocks noGrp="1"/>
+          </p:cNvSpPr>
+          <p:nvPr>
+            <p:ph type="sldImg" idx="2"/>
+          </p:nvPr>
+        </p:nvSpPr>
+        <p:spPr/>
+      </p:sp>
+      <p:sp>
+        <p:nvSpPr>
+          <p:cNvPr id="3" name="Notes Placeholder 2"/>
+          <p:cNvSpPr>
+            <a:spLocks noGrp="1"/>
+          </p:cNvSpPr>
+          <p:nvPr>
+            <p:ph type="body" idx="3" sz="quarter"/>
+          </p:nvPr>
+        </p:nvSpPr>
+        <p:spPr/>
+        <p:txBody>
+          <a:bodyPr/>
+          <a:lstStyle/>
+          <a:p>
+            <a:r>
+              <a:t>Supplier bots open with a number, but a number alone does not tell us where a deal can move. NightHunter improved by making a few practical changes: understand the supplier, value the whole offer, and trade terms deliberately. Here are the moves we used.</a:t>
+            </a:r>
+          </a:p>
+        </p:txBody>
+      </p:sp>
+      <p:sp>
+        <p:nvSpPr>
+          <p:cNvPr id="4" name="Slide Number Placeholder 3"/>
+          <p:cNvSpPr>
+            <a:spLocks noGrp="1"/>
+          </p:cNvSpPr>
+          <p:nvPr>
+            <p:ph type="sldNum" idx="5" sz="quarter"/>
+          </p:nvPr>
+        </p:nvSpPr>
+        <p:spPr/>
+      </p:sp>
+    </p:spTree>
+  </p:cSld>
+  <p:clrMapOvr>
+    <a:masterClrMapping/>
+  </p:clrMapOvr>
+</p:notes>
+</file>
+
+<file path=ppt/notesSlides/notesSlide2.xml><?xml version="1.0" encoding="utf-8"?>
+<p:notes xmlns:a="http://schemas.openxmlformats.org/drawingml/2006/main" xmlns:p="http://schemas.openxmlformats.org/presentationml/2006/main" xmlns:r="http://schemas.openxmlformats.org/officeDocument/2006/relationships">
+  <p:cSld>
+    <p:spTree>
+      <p:nvGrpSpPr>
+        <p:cNvPr id="1" name=""/>
+        <p:cNvGrpSpPr/>
+        <p:nvPr/>
+      </p:nvGrpSpPr>
+      <p:grpSpPr>
+        <a:xfrm>
+          <a:off x="0" y="0"/>
+          <a:ext cx="0" cy="0"/>
+          <a:chOff x="0" y="0"/>
+          <a:chExt cx="0" cy="0"/>
+        </a:xfrm>
+      </p:grpSpPr>
+      <p:sp>
+        <p:nvSpPr>
+          <p:cNvPr id="2" name="Slide Image Placeholder 1"/>
+          <p:cNvSpPr>
+            <a:spLocks noGrp="1"/>
+          </p:cNvSpPr>
+          <p:nvPr>
+            <p:ph type="sldImg" idx="2"/>
+          </p:nvPr>
+        </p:nvSpPr>
+        <p:spPr/>
+      </p:sp>
+      <p:sp>
+        <p:nvSpPr>
+          <p:cNvPr id="3" name="Notes Placeholder 2"/>
+          <p:cNvSpPr>
+            <a:spLocks noGrp="1"/>
+          </p:cNvSpPr>
+          <p:nvPr>
+            <p:ph type="body" idx="3" sz="quarter"/>
+          </p:nvPr>
+        </p:nvSpPr>
+        <p:spPr/>
+        <p:txBody>
+          <a:bodyPr/>
+          <a:lstStyle/>
+          <a:p>
+            <a:r>
+              <a:t>We stopped treating every supplier the same. We looked for clues about capacity, cash needs and contract timing in their documents and replies. That helped us make a concrete ask. In one competitive bid, we focused on a supplier with spare capacity and a cash need, then used the rival's exact current price instead of vague pressure.</a:t>
+            </a:r>
+          </a:p>
+        </p:txBody>
+      </p:sp>
+      <p:sp>
+        <p:nvSpPr>
+          <p:cNvPr id="4" name="Slide Number Placeholder 3"/>
+          <p:cNvSpPr>
+            <a:spLocks noGrp="1"/>
+          </p:cNvSpPr>
+          <p:nvPr>
+            <p:ph type="sldNum" idx="5" sz="quarter"/>
+          </p:nvPr>
+        </p:nvSpPr>
+        <p:spPr/>
+      </p:sp>
+    </p:spTree>
+  </p:cSld>
+  <p:clrMapOvr>
+    <a:masterClrMapping/>
+  </p:clrMapOvr>
+</p:notes>
+</file>
+
+<file path=ppt/notesSlides/notesSlide3.xml><?xml version="1.0" encoding="utf-8"?>
+<p:notes xmlns:a="http://schemas.openxmlformats.org/drawingml/2006/main" xmlns:p="http://schemas.openxmlformats.org/presentationml/2006/main" xmlns:r="http://schemas.openxmlformats.org/officeDocument/2006/relationships">
+  <p:cSld>
+    <p:spTree>
+      <p:nvGrpSpPr>
+        <p:cNvPr id="1" name=""/>
+        <p:cNvGrpSpPr/>
+        <p:nvPr/>
+      </p:nvGrpSpPr>
+      <p:grpSpPr>
+        <a:xfrm>
+          <a:off x="0" y="0"/>
+          <a:ext cx="0" cy="0"/>
+          <a:chOff x="0" y="0"/>
+          <a:chExt cx="0" cy="0"/>
+        </a:xfrm>
+      </p:grpSpPr>
+      <p:sp>
+        <p:nvSpPr>
+          <p:cNvPr id="2" name="Slide Image Placeholder 1"/>
+          <p:cNvSpPr>
+            <a:spLocks noGrp="1"/>
+          </p:cNvSpPr>
+          <p:nvPr>
+            <p:ph type="sldImg" idx="2"/>
+          </p:nvPr>
+        </p:nvSpPr>
+        <p:spPr/>
+      </p:sp>
+      <p:sp>
+        <p:nvSpPr>
+          <p:cNvPr id="3" name="Notes Placeholder 2"/>
+          <p:cNvSpPr>
+            <a:spLocks noGrp="1"/>
+          </p:cNvSpPr>
+          <p:nvPr>
+            <p:ph type="body" idx="3" sz="quarter"/>
+          </p:nvPr>
+        </p:nvSpPr>
+        <p:spPr/>
+        <p:txBody>
+          <a:bodyPr/>
+          <a:lstStyle/>
+          <a:p>
+            <a:r>
+              <a:t>We also stopped judging offers by unit price alone. Payment timing, delivery and quality can change the cost of a deal. So we put forward a few choices with different trade-offs, each still good for us. Then we moved in measured steps, backed key requests with a verified detail and answered supplier questions with specific numbers. When a good final offer arrived, we took it.</a:t>
+            </a:r>
+          </a:p>
+        </p:txBody>
+      </p:sp>
+      <p:sp>
+        <p:nvSpPr>
+          <p:cNvPr id="4" name="Slide Number Placeholder 3"/>
+          <p:cNvSpPr>
+            <a:spLocks noGrp="1"/>
+          </p:cNvSpPr>
+          <p:nvPr>
+            <p:ph type="sldNum" idx="5" sz="quarter"/>
+          </p:nvPr>
+        </p:nvSpPr>
+        <p:spPr/>
+      </p:sp>
+    </p:spTree>
+  </p:cSld>
+  <p:clrMapOvr>
+    <a:masterClrMapping/>
+  </p:clrMapOvr>
+</p:notes>
+</file>
+
+<file path=ppt/notesSlides/notesSlide4.xml><?xml version="1.0" encoding="utf-8"?>
+<p:notes xmlns:a="http://schemas.openxmlformats.org/drawingml/2006/main" xmlns:p="http://schemas.openxmlformats.org/presentationml/2006/main" xmlns:r="http://schemas.openxmlformats.org/officeDocument/2006/relationships">
+  <p:cSld>
+    <p:spTree>
+      <p:nvGrpSpPr>
+        <p:cNvPr id="1" name=""/>
+        <p:cNvGrpSpPr/>
+        <p:nvPr/>
+      </p:nvGrpSpPr>
+      <p:grpSpPr>
+        <a:xfrm>
+          <a:off x="0" y="0"/>
+          <a:ext cx="0" cy="0"/>
+          <a:chOff x="0" y="0"/>
+          <a:chExt cx="0" cy="0"/>
+        </a:xfrm>
+      </p:grpSpPr>
+      <p:sp>
+        <p:nvSpPr>
+          <p:cNvPr id="2" name="Slide Image Placeholder 1"/>
+          <p:cNvSpPr>
+            <a:spLocks noGrp="1"/>
+          </p:cNvSpPr>
+          <p:nvPr>
+            <p:ph type="sldImg" idx="2"/>
+          </p:nvPr>
+        </p:nvSpPr>
+        <p:spPr/>
+      </p:sp>
+      <p:sp>
+        <p:nvSpPr>
+          <p:cNvPr id="3" name="Notes Placeholder 2"/>
+          <p:cNvSpPr>
+            <a:spLocks noGrp="1"/>
+          </p:cNvSpPr>
+          <p:nvPr>
+            <p:ph type="body" idx="3" sz="quarter"/>
+          </p:nvPr>
+        </p:nvSpPr>
+        <p:spPr/>
+        <p:txBody>
+          <a:bodyPr/>
+          <a:lstStyle/>
+          <a:p>
+            <a:r>
+              <a:t>Across nine single-supplier practice cases, our original system averaged 46.7, and the best measured batch averaged 75.1 out of 100. In two hosted RFQ tests, scores were 92.4 and 79.2. A separate ten-case rehearsal completed every deal with no errors or timeouts. These are practice results, not a promise about new suppliers. The takeaway: listen closely, trade the full package, and know when to close.</a:t>
+            </a:r>
+          </a:p>
+        </p:txBody>
+      </p:sp>
+      <p:sp>
+        <p:nvSpPr>
+          <p:cNvPr id="4" name="Slide Number Placeholder 3"/>
+          <p:cNvSpPr>
+            <a:spLocks noGrp="1"/>
+          </p:cNvSpPr>
+          <p:nvPr>
+            <p:ph type="sldNum" idx="5" sz="quarter"/>
+          </p:nvPr>
+        </p:nvSpPr>
+        <p:spPr/>
+      </p:sp>
+    </p:spTree>
+  </p:cSld>
+  <p:clrMapOvr>
+    <a:masterClrMapping/>
+  </p:clrMapOvr>
+</p:notes>
 </file>
 
 <file path=ppt/slideLayouts/slideLayout1.xml><?xml version="1.0" encoding="utf-8"?>
@@ -3088,6 +3714,14 @@
 <file path=ppt/slides/slide1.xml><?xml version="1.0" encoding="utf-8"?>
 <p:sld xmlns:a="http://schemas.openxmlformats.org/drawingml/2006/main" xmlns:p="http://schemas.openxmlformats.org/presentationml/2006/main" xmlns:r="http://schemas.openxmlformats.org/officeDocument/2006/relationships">
   <p:cSld>
+    <p:bg>
+      <p:bgPr>
+        <a:solidFill>
+          <a:srgbClr val="0F1822"/>
+        </a:solidFill>
+        <a:effectLst/>
+      </p:bgPr>
+    </p:bg>
     <p:spTree>
       <p:nvGrpSpPr>
         <p:cNvPr id="1" name=""/>
@@ -3097,20 +3731,148 @@
       <p:grpSpPr/>
       <p:sp>
         <p:nvSpPr>
-          <p:cNvPr id="2" name="Rectangle 1"/>
+          <p:cNvPr id="2" name="TextBox 1"/>
+          <p:cNvSpPr txBox="1"/>
+          <p:nvPr/>
+        </p:nvSpPr>
+        <p:spPr>
+          <a:xfrm>
+            <a:off x="713232" y="530352"/>
+            <a:ext cx="6217920" cy="274320"/>
+          </a:xfrm>
+          <a:prstGeom prst="rect">
+            <a:avLst/>
+          </a:prstGeom>
+          <a:noFill/>
+        </p:spPr>
+        <p:txBody>
+          <a:bodyPr wrap="square" lIns="0" rIns="0" tIns="0" bIns="0" anchor="t">
+            <a:spAutoFit/>
+          </a:bodyPr>
+          <a:lstStyle/>
+          <a:p>
+            <a:pPr algn="l">
+              <a:spcBef>
+                <a:spcPts val="0"/>
+              </a:spcBef>
+              <a:spcAft>
+                <a:spcPts val="0"/>
+              </a:spcAft>
+            </a:pPr>
+            <a:r>
+              <a:rPr sz="1000" b="1" i="0">
+                <a:solidFill>
+                  <a:srgbClr val="A9EEC2"/>
+                </a:solidFill>
+                <a:latin typeface="Aptos"/>
+              </a:rPr>
+              <a:t>TACTO NEGOTIATION ARENA  ·  EHL GRAND FINALE 2026</a:t>
+            </a:r>
+          </a:p>
+        </p:txBody>
+      </p:sp>
+      <p:sp>
+        <p:nvSpPr>
+          <p:cNvPr id="3" name="TextBox 2"/>
+          <p:cNvSpPr txBox="1"/>
+          <p:nvPr/>
+        </p:nvSpPr>
+        <p:spPr>
+          <a:xfrm>
+            <a:off x="713232" y="1389888"/>
+            <a:ext cx="6080760" cy="1554480"/>
+          </a:xfrm>
+          <a:prstGeom prst="rect">
+            <a:avLst/>
+          </a:prstGeom>
+          <a:noFill/>
+        </p:spPr>
+        <p:txBody>
+          <a:bodyPr wrap="square" lIns="0" rIns="0" tIns="0" bIns="0" anchor="t">
+            <a:spAutoFit/>
+          </a:bodyPr>
+          <a:lstStyle/>
+          <a:p>
+            <a:pPr algn="l">
+              <a:spcBef>
+                <a:spcPts val="0"/>
+              </a:spcBef>
+              <a:spcAft>
+                <a:spcPts val="0"/>
+              </a:spcAft>
+            </a:pPr>
+            <a:r>
+              <a:rPr sz="3800" b="1" i="0">
+                <a:solidFill>
+                  <a:srgbClr val="F5F7F9"/>
+                </a:solidFill>
+                <a:latin typeface="Aptos"/>
+              </a:rPr>
+              <a:t>Better deals start
+with better questions.</a:t>
+            </a:r>
+          </a:p>
+        </p:txBody>
+      </p:sp>
+      <p:sp>
+        <p:nvSpPr>
+          <p:cNvPr id="4" name="TextBox 3"/>
+          <p:cNvSpPr txBox="1"/>
+          <p:nvPr/>
+        </p:nvSpPr>
+        <p:spPr>
+          <a:xfrm>
+            <a:off x="749808" y="3182112"/>
+            <a:ext cx="5577840" cy="731520"/>
+          </a:xfrm>
+          <a:prstGeom prst="rect">
+            <a:avLst/>
+          </a:prstGeom>
+          <a:noFill/>
+        </p:spPr>
+        <p:txBody>
+          <a:bodyPr wrap="square" lIns="0" rIns="0" tIns="0" bIns="0" anchor="t">
+            <a:spAutoFit/>
+          </a:bodyPr>
+          <a:lstStyle/>
+          <a:p>
+            <a:pPr algn="l">
+              <a:spcBef>
+                <a:spcPts val="0"/>
+              </a:spcBef>
+              <a:spcAft>
+                <a:spcPts val="0"/>
+              </a:spcAft>
+            </a:pPr>
+            <a:r>
+              <a:rPr sz="1900" b="0" i="0">
+                <a:solidFill>
+                  <a:srgbClr val="AEBCC6"/>
+                </a:solidFill>
+                <a:latin typeface="Aptos"/>
+              </a:rPr>
+              <a:t>How NightHunter learned to negotiate
+with supplier bots.</a:t>
+            </a:r>
+          </a:p>
+        </p:txBody>
+      </p:sp>
+      <p:sp>
+        <p:nvSpPr>
+          <p:cNvPr id="5" name="Rounded Rectangle 4"/>
           <p:cNvSpPr/>
           <p:nvPr/>
         </p:nvSpPr>
         <p:spPr>
           <a:xfrm>
-            <a:off x="0" y="0"/>
-            <a:ext cx="12191695" cy="164592"/>
-          </a:xfrm>
-          <a:prstGeom prst="rect">
+            <a:off x="749808" y="4965192"/>
+            <a:ext cx="5440680" cy="713232"/>
+          </a:xfrm>
+          <a:prstGeom prst="roundRect">
             <a:avLst/>
           </a:prstGeom>
           <a:solidFill>
-            <a:srgbClr val="0F8B8D"/>
+            <a:srgbClr val="1A2632"/>
           </a:solidFill>
           <a:ln>
             <a:noFill/>
@@ -3140,14 +3902,14 @@
       </p:sp>
       <p:sp>
         <p:nvSpPr>
-          <p:cNvPr id="3" name="TextBox 2"/>
+          <p:cNvPr id="6" name="TextBox 5"/>
           <p:cNvSpPr txBox="1"/>
           <p:nvPr/>
         </p:nvSpPr>
         <p:spPr>
           <a:xfrm>
-            <a:off x="731520" y="2103120"/>
-            <a:ext cx="10515600" cy="2743200"/>
+            <a:off x="987552" y="5157216"/>
+            <a:ext cx="4983480" cy="274320"/>
           </a:xfrm>
           <a:prstGeom prst="rect">
             <a:avLst/>
@@ -3155,44 +3917,1045 @@
           <a:noFill/>
         </p:spPr>
         <p:txBody>
-          <a:bodyPr wrap="none">
+          <a:bodyPr wrap="square" lIns="0" rIns="0" tIns="0" bIns="0" anchor="ctr">
             <a:spAutoFit/>
           </a:bodyPr>
           <a:lstStyle/>
           <a:p>
-            <a:pPr>
-              <a:defRPr sz="5400" b="1">
+            <a:pPr algn="l">
+              <a:spcBef>
+                <a:spcPts val="0"/>
+              </a:spcBef>
+              <a:spcAft>
+                <a:spcPts val="0"/>
+              </a:spcAft>
+            </a:pPr>
+            <a:r>
+              <a:rPr sz="1400" b="1" i="0">
                 <a:solidFill>
-                  <a:srgbClr val="14243B"/>
+                  <a:srgbClr val="FFBE70"/>
                 </a:solidFill>
-              </a:defRPr>
+                <a:latin typeface="Aptos"/>
+              </a:rPr>
+              <a:t>LISTEN  →  VALUE  →  TRADE  →  CLOSE</a:t>
+            </a:r>
+          </a:p>
+        </p:txBody>
+      </p:sp>
+      <p:sp>
+        <p:nvSpPr>
+          <p:cNvPr id="7" name="Rounded Rectangle 6"/>
+          <p:cNvSpPr/>
+          <p:nvPr/>
+        </p:nvSpPr>
+        <p:spPr>
+          <a:xfrm>
+            <a:off x="7068312" y="1060704"/>
+            <a:ext cx="4407408" cy="969264"/>
+          </a:xfrm>
+          <a:prstGeom prst="roundRect">
+            <a:avLst/>
+          </a:prstGeom>
+          <a:solidFill>
+            <a:srgbClr val="1A2632"/>
+          </a:solidFill>
+          <a:ln>
+            <a:noFill/>
+          </a:ln>
+        </p:spPr>
+        <p:style>
+          <a:lnRef idx="1">
+            <a:schemeClr val="accent1"/>
+          </a:lnRef>
+          <a:fillRef idx="3">
+            <a:schemeClr val="accent1"/>
+          </a:fillRef>
+          <a:effectRef idx="2">
+            <a:schemeClr val="accent1"/>
+          </a:effectRef>
+          <a:fontRef idx="minor">
+            <a:schemeClr val="lt1"/>
+          </a:fontRef>
+        </p:style>
+        <p:txBody>
+          <a:bodyPr rtlCol="0" anchor="ctr"/>
+          <a:lstStyle/>
+          <a:p>
+            <a:pPr algn="ctr"/>
+          </a:p>
+        </p:txBody>
+      </p:sp>
+      <p:sp>
+        <p:nvSpPr>
+          <p:cNvPr id="8" name="Oval 7"/>
+          <p:cNvSpPr/>
+          <p:nvPr/>
+        </p:nvSpPr>
+        <p:spPr>
+          <a:xfrm>
+            <a:off x="7296912" y="1271016"/>
+            <a:ext cx="512064" cy="512064"/>
+          </a:xfrm>
+          <a:prstGeom prst="ellipse">
+            <a:avLst/>
+          </a:prstGeom>
+          <a:solidFill>
+            <a:srgbClr val="A9EEC2"/>
+          </a:solidFill>
+          <a:ln>
+            <a:noFill/>
+          </a:ln>
+        </p:spPr>
+        <p:style>
+          <a:lnRef idx="1">
+            <a:schemeClr val="accent1"/>
+          </a:lnRef>
+          <a:fillRef idx="3">
+            <a:schemeClr val="accent1"/>
+          </a:fillRef>
+          <a:effectRef idx="2">
+            <a:schemeClr val="accent1"/>
+          </a:effectRef>
+          <a:fontRef idx="minor">
+            <a:schemeClr val="lt1"/>
+          </a:fontRef>
+        </p:style>
+        <p:txBody>
+          <a:bodyPr rtlCol="0" anchor="ctr"/>
+          <a:lstStyle/>
+          <a:p>
+            <a:pPr algn="ctr"/>
+          </a:p>
+        </p:txBody>
+      </p:sp>
+      <p:sp>
+        <p:nvSpPr>
+          <p:cNvPr id="9" name="TextBox 8"/>
+          <p:cNvSpPr txBox="1"/>
+          <p:nvPr/>
+        </p:nvSpPr>
+        <p:spPr>
+          <a:xfrm>
+            <a:off x="7296912" y="1389888"/>
+            <a:ext cx="512064" cy="164592"/>
+          </a:xfrm>
+          <a:prstGeom prst="rect">
+            <a:avLst/>
+          </a:prstGeom>
+          <a:noFill/>
+        </p:spPr>
+        <p:txBody>
+          <a:bodyPr wrap="square" lIns="0" rIns="0" tIns="0" bIns="0" anchor="ctr">
+            <a:spAutoFit/>
+          </a:bodyPr>
+          <a:lstStyle/>
+          <a:p>
+            <a:pPr algn="ctr">
+              <a:spcBef>
+                <a:spcPts val="0"/>
+              </a:spcBef>
+              <a:spcAft>
+                <a:spcPts val="0"/>
+              </a:spcAft>
             </a:pPr>
             <a:r>
-              <a:t>NightHunter</a:t>
-            </a:r>
-          </a:p>
-          <a:p>
-            <a:pPr>
-              <a:defRPr sz="2600">
+              <a:rPr sz="1000" b="1" i="0">
                 <a:solidFill>
-                  <a:srgbClr val="0F8B8D"/>
+                  <a:srgbClr val="0C141C"/>
                 </a:solidFill>
-              </a:defRPr>
+                <a:latin typeface="Aptos"/>
+              </a:rPr>
+              <a:t>01</a:t>
+            </a:r>
+          </a:p>
+        </p:txBody>
+      </p:sp>
+      <p:sp>
+        <p:nvSpPr>
+          <p:cNvPr id="10" name="TextBox 9"/>
+          <p:cNvSpPr txBox="1"/>
+          <p:nvPr/>
+        </p:nvSpPr>
+        <p:spPr>
+          <a:xfrm>
+            <a:off x="8010144" y="1207007"/>
+            <a:ext cx="3154680" cy="228600"/>
+          </a:xfrm>
+          <a:prstGeom prst="rect">
+            <a:avLst/>
+          </a:prstGeom>
+          <a:noFill/>
+        </p:spPr>
+        <p:txBody>
+          <a:bodyPr wrap="square" lIns="0" rIns="0" tIns="0" bIns="0" anchor="t">
+            <a:spAutoFit/>
+          </a:bodyPr>
+          <a:lstStyle/>
+          <a:p>
+            <a:pPr algn="l">
+              <a:spcBef>
+                <a:spcPts val="0"/>
+              </a:spcBef>
+              <a:spcAft>
+                <a:spcPts val="0"/>
+              </a:spcAft>
             </a:pPr>
             <a:r>
-              <a:t>A procurement negotiator where code decides and the model writes</a:t>
-            </a:r>
-          </a:p>
-          <a:p>
-            <a:pPr>
-              <a:defRPr sz="1800">
+              <a:rPr sz="1100" b="1" i="0">
                 <a:solidFill>
-                  <a:srgbClr val="555F6B"/>
+                  <a:srgbClr val="A9EEC2"/>
                 </a:solidFill>
-              </a:defRPr>
+                <a:latin typeface="Aptos"/>
+              </a:rPr>
+              <a:t>READ</a:t>
+            </a:r>
+          </a:p>
+        </p:txBody>
+      </p:sp>
+      <p:sp>
+        <p:nvSpPr>
+          <p:cNvPr id="11" name="TextBox 10"/>
+          <p:cNvSpPr txBox="1"/>
+          <p:nvPr/>
+        </p:nvSpPr>
+        <p:spPr>
+          <a:xfrm>
+            <a:off x="8010144" y="1499616"/>
+            <a:ext cx="3246120" cy="329184"/>
+          </a:xfrm>
+          <a:prstGeom prst="rect">
+            <a:avLst/>
+          </a:prstGeom>
+          <a:noFill/>
+        </p:spPr>
+        <p:txBody>
+          <a:bodyPr wrap="square" lIns="0" rIns="0" tIns="0" bIns="0" anchor="t">
+            <a:spAutoFit/>
+          </a:bodyPr>
+          <a:lstStyle/>
+          <a:p>
+            <a:pPr algn="l">
+              <a:spcBef>
+                <a:spcPts val="0"/>
+              </a:spcBef>
+              <a:spcAft>
+                <a:spcPts val="0"/>
+              </a:spcAft>
             </a:pPr>
             <a:r>
-              <a:t>Tacto Negotiation Arena · EHL Grand Finale 2026</a:t>
+              <a:rPr sz="1400" b="0" i="0">
+                <a:solidFill>
+                  <a:srgbClr val="F5F7F9"/>
+                </a:solidFill>
+                <a:latin typeface="Aptos"/>
+              </a:rPr>
+              <a:t>Spot what matters to this supplier.</a:t>
+            </a:r>
+          </a:p>
+        </p:txBody>
+      </p:sp>
+      <p:sp>
+        <p:nvSpPr>
+          <p:cNvPr id="12" name="Rounded Rectangle 11"/>
+          <p:cNvSpPr/>
+          <p:nvPr/>
+        </p:nvSpPr>
+        <p:spPr>
+          <a:xfrm>
+            <a:off x="7068312" y="2258568"/>
+            <a:ext cx="4407408" cy="969264"/>
+          </a:xfrm>
+          <a:prstGeom prst="roundRect">
+            <a:avLst/>
+          </a:prstGeom>
+          <a:solidFill>
+            <a:srgbClr val="1A2632"/>
+          </a:solidFill>
+          <a:ln>
+            <a:noFill/>
+          </a:ln>
+        </p:spPr>
+        <p:style>
+          <a:lnRef idx="1">
+            <a:schemeClr val="accent1"/>
+          </a:lnRef>
+          <a:fillRef idx="3">
+            <a:schemeClr val="accent1"/>
+          </a:fillRef>
+          <a:effectRef idx="2">
+            <a:schemeClr val="accent1"/>
+          </a:effectRef>
+          <a:fontRef idx="minor">
+            <a:schemeClr val="lt1"/>
+          </a:fontRef>
+        </p:style>
+        <p:txBody>
+          <a:bodyPr rtlCol="0" anchor="ctr"/>
+          <a:lstStyle/>
+          <a:p>
+            <a:pPr algn="ctr"/>
+          </a:p>
+        </p:txBody>
+      </p:sp>
+      <p:sp>
+        <p:nvSpPr>
+          <p:cNvPr id="13" name="Oval 12"/>
+          <p:cNvSpPr/>
+          <p:nvPr/>
+        </p:nvSpPr>
+        <p:spPr>
+          <a:xfrm>
+            <a:off x="7296912" y="2468879"/>
+            <a:ext cx="512064" cy="512064"/>
+          </a:xfrm>
+          <a:prstGeom prst="ellipse">
+            <a:avLst/>
+          </a:prstGeom>
+          <a:solidFill>
+            <a:srgbClr val="77C9E8"/>
+          </a:solidFill>
+          <a:ln>
+            <a:noFill/>
+          </a:ln>
+        </p:spPr>
+        <p:style>
+          <a:lnRef idx="1">
+            <a:schemeClr val="accent1"/>
+          </a:lnRef>
+          <a:fillRef idx="3">
+            <a:schemeClr val="accent1"/>
+          </a:fillRef>
+          <a:effectRef idx="2">
+            <a:schemeClr val="accent1"/>
+          </a:effectRef>
+          <a:fontRef idx="minor">
+            <a:schemeClr val="lt1"/>
+          </a:fontRef>
+        </p:style>
+        <p:txBody>
+          <a:bodyPr rtlCol="0" anchor="ctr"/>
+          <a:lstStyle/>
+          <a:p>
+            <a:pPr algn="ctr"/>
+          </a:p>
+        </p:txBody>
+      </p:sp>
+      <p:sp>
+        <p:nvSpPr>
+          <p:cNvPr id="14" name="TextBox 13"/>
+          <p:cNvSpPr txBox="1"/>
+          <p:nvPr/>
+        </p:nvSpPr>
+        <p:spPr>
+          <a:xfrm>
+            <a:off x="7296912" y="2587751"/>
+            <a:ext cx="512064" cy="164592"/>
+          </a:xfrm>
+          <a:prstGeom prst="rect">
+            <a:avLst/>
+          </a:prstGeom>
+          <a:noFill/>
+        </p:spPr>
+        <p:txBody>
+          <a:bodyPr wrap="square" lIns="0" rIns="0" tIns="0" bIns="0" anchor="ctr">
+            <a:spAutoFit/>
+          </a:bodyPr>
+          <a:lstStyle/>
+          <a:p>
+            <a:pPr algn="ctr">
+              <a:spcBef>
+                <a:spcPts val="0"/>
+              </a:spcBef>
+              <a:spcAft>
+                <a:spcPts val="0"/>
+              </a:spcAft>
+            </a:pPr>
+            <a:r>
+              <a:rPr sz="1000" b="1" i="0">
+                <a:solidFill>
+                  <a:srgbClr val="0C141C"/>
+                </a:solidFill>
+                <a:latin typeface="Aptos"/>
+              </a:rPr>
+              <a:t>02</a:t>
+            </a:r>
+          </a:p>
+        </p:txBody>
+      </p:sp>
+      <p:sp>
+        <p:nvSpPr>
+          <p:cNvPr id="15" name="TextBox 14"/>
+          <p:cNvSpPr txBox="1"/>
+          <p:nvPr/>
+        </p:nvSpPr>
+        <p:spPr>
+          <a:xfrm>
+            <a:off x="8010144" y="2404872"/>
+            <a:ext cx="3154680" cy="228600"/>
+          </a:xfrm>
+          <a:prstGeom prst="rect">
+            <a:avLst/>
+          </a:prstGeom>
+          <a:noFill/>
+        </p:spPr>
+        <p:txBody>
+          <a:bodyPr wrap="square" lIns="0" rIns="0" tIns="0" bIns="0" anchor="t">
+            <a:spAutoFit/>
+          </a:bodyPr>
+          <a:lstStyle/>
+          <a:p>
+            <a:pPr algn="l">
+              <a:spcBef>
+                <a:spcPts val="0"/>
+              </a:spcBef>
+              <a:spcAft>
+                <a:spcPts val="0"/>
+              </a:spcAft>
+            </a:pPr>
+            <a:r>
+              <a:rPr sz="1100" b="1" i="0">
+                <a:solidFill>
+                  <a:srgbClr val="77C9E8"/>
+                </a:solidFill>
+                <a:latin typeface="Aptos"/>
+              </a:rPr>
+              <a:t>VALUE</a:t>
+            </a:r>
+          </a:p>
+        </p:txBody>
+      </p:sp>
+      <p:sp>
+        <p:nvSpPr>
+          <p:cNvPr id="16" name="TextBox 15"/>
+          <p:cNvSpPr txBox="1"/>
+          <p:nvPr/>
+        </p:nvSpPr>
+        <p:spPr>
+          <a:xfrm>
+            <a:off x="8010144" y="2697479"/>
+            <a:ext cx="3246120" cy="329184"/>
+          </a:xfrm>
+          <a:prstGeom prst="rect">
+            <a:avLst/>
+          </a:prstGeom>
+          <a:noFill/>
+        </p:spPr>
+        <p:txBody>
+          <a:bodyPr wrap="square" lIns="0" rIns="0" tIns="0" bIns="0" anchor="t">
+            <a:spAutoFit/>
+          </a:bodyPr>
+          <a:lstStyle/>
+          <a:p>
+            <a:pPr algn="l">
+              <a:spcBef>
+                <a:spcPts val="0"/>
+              </a:spcBef>
+              <a:spcAft>
+                <a:spcPts val="0"/>
+              </a:spcAft>
+            </a:pPr>
+            <a:r>
+              <a:rPr sz="1400" b="0" i="0">
+                <a:solidFill>
+                  <a:srgbClr val="F5F7F9"/>
+                </a:solidFill>
+                <a:latin typeface="Aptos"/>
+              </a:rPr>
+              <a:t>Look beyond the sticker price.</a:t>
+            </a:r>
+          </a:p>
+        </p:txBody>
+      </p:sp>
+      <p:sp>
+        <p:nvSpPr>
+          <p:cNvPr id="17" name="Rounded Rectangle 16"/>
+          <p:cNvSpPr/>
+          <p:nvPr/>
+        </p:nvSpPr>
+        <p:spPr>
+          <a:xfrm>
+            <a:off x="7068312" y="3456432"/>
+            <a:ext cx="4407408" cy="969264"/>
+          </a:xfrm>
+          <a:prstGeom prst="roundRect">
+            <a:avLst/>
+          </a:prstGeom>
+          <a:solidFill>
+            <a:srgbClr val="1A2632"/>
+          </a:solidFill>
+          <a:ln>
+            <a:noFill/>
+          </a:ln>
+        </p:spPr>
+        <p:style>
+          <a:lnRef idx="1">
+            <a:schemeClr val="accent1"/>
+          </a:lnRef>
+          <a:fillRef idx="3">
+            <a:schemeClr val="accent1"/>
+          </a:fillRef>
+          <a:effectRef idx="2">
+            <a:schemeClr val="accent1"/>
+          </a:effectRef>
+          <a:fontRef idx="minor">
+            <a:schemeClr val="lt1"/>
+          </a:fontRef>
+        </p:style>
+        <p:txBody>
+          <a:bodyPr rtlCol="0" anchor="ctr"/>
+          <a:lstStyle/>
+          <a:p>
+            <a:pPr algn="ctr"/>
+          </a:p>
+        </p:txBody>
+      </p:sp>
+      <p:sp>
+        <p:nvSpPr>
+          <p:cNvPr id="18" name="Oval 17"/>
+          <p:cNvSpPr/>
+          <p:nvPr/>
+        </p:nvSpPr>
+        <p:spPr>
+          <a:xfrm>
+            <a:off x="7296912" y="3666744"/>
+            <a:ext cx="512064" cy="512064"/>
+          </a:xfrm>
+          <a:prstGeom prst="ellipse">
+            <a:avLst/>
+          </a:prstGeom>
+          <a:solidFill>
+            <a:srgbClr val="FFBE70"/>
+          </a:solidFill>
+          <a:ln>
+            <a:noFill/>
+          </a:ln>
+        </p:spPr>
+        <p:style>
+          <a:lnRef idx="1">
+            <a:schemeClr val="accent1"/>
+          </a:lnRef>
+          <a:fillRef idx="3">
+            <a:schemeClr val="accent1"/>
+          </a:fillRef>
+          <a:effectRef idx="2">
+            <a:schemeClr val="accent1"/>
+          </a:effectRef>
+          <a:fontRef idx="minor">
+            <a:schemeClr val="lt1"/>
+          </a:fontRef>
+        </p:style>
+        <p:txBody>
+          <a:bodyPr rtlCol="0" anchor="ctr"/>
+          <a:lstStyle/>
+          <a:p>
+            <a:pPr algn="ctr"/>
+          </a:p>
+        </p:txBody>
+      </p:sp>
+      <p:sp>
+        <p:nvSpPr>
+          <p:cNvPr id="19" name="TextBox 18"/>
+          <p:cNvSpPr txBox="1"/>
+          <p:nvPr/>
+        </p:nvSpPr>
+        <p:spPr>
+          <a:xfrm>
+            <a:off x="7296912" y="3785616"/>
+            <a:ext cx="512064" cy="164592"/>
+          </a:xfrm>
+          <a:prstGeom prst="rect">
+            <a:avLst/>
+          </a:prstGeom>
+          <a:noFill/>
+        </p:spPr>
+        <p:txBody>
+          <a:bodyPr wrap="square" lIns="0" rIns="0" tIns="0" bIns="0" anchor="ctr">
+            <a:spAutoFit/>
+          </a:bodyPr>
+          <a:lstStyle/>
+          <a:p>
+            <a:pPr algn="ctr">
+              <a:spcBef>
+                <a:spcPts val="0"/>
+              </a:spcBef>
+              <a:spcAft>
+                <a:spcPts val="0"/>
+              </a:spcAft>
+            </a:pPr>
+            <a:r>
+              <a:rPr sz="1000" b="1" i="0">
+                <a:solidFill>
+                  <a:srgbClr val="0C141C"/>
+                </a:solidFill>
+                <a:latin typeface="Aptos"/>
+              </a:rPr>
+              <a:t>03</a:t>
+            </a:r>
+          </a:p>
+        </p:txBody>
+      </p:sp>
+      <p:sp>
+        <p:nvSpPr>
+          <p:cNvPr id="20" name="TextBox 19"/>
+          <p:cNvSpPr txBox="1"/>
+          <p:nvPr/>
+        </p:nvSpPr>
+        <p:spPr>
+          <a:xfrm>
+            <a:off x="8010144" y="3602736"/>
+            <a:ext cx="3154680" cy="228600"/>
+          </a:xfrm>
+          <a:prstGeom prst="rect">
+            <a:avLst/>
+          </a:prstGeom>
+          <a:noFill/>
+        </p:spPr>
+        <p:txBody>
+          <a:bodyPr wrap="square" lIns="0" rIns="0" tIns="0" bIns="0" anchor="t">
+            <a:spAutoFit/>
+          </a:bodyPr>
+          <a:lstStyle/>
+          <a:p>
+            <a:pPr algn="l">
+              <a:spcBef>
+                <a:spcPts val="0"/>
+              </a:spcBef>
+              <a:spcAft>
+                <a:spcPts val="0"/>
+              </a:spcAft>
+            </a:pPr>
+            <a:r>
+              <a:rPr sz="1100" b="1" i="0">
+                <a:solidFill>
+                  <a:srgbClr val="FFBE70"/>
+                </a:solidFill>
+                <a:latin typeface="Aptos"/>
+              </a:rPr>
+              <a:t>TRADE</a:t>
+            </a:r>
+          </a:p>
+        </p:txBody>
+      </p:sp>
+      <p:sp>
+        <p:nvSpPr>
+          <p:cNvPr id="21" name="TextBox 20"/>
+          <p:cNvSpPr txBox="1"/>
+          <p:nvPr/>
+        </p:nvSpPr>
+        <p:spPr>
+          <a:xfrm>
+            <a:off x="8010144" y="3895344"/>
+            <a:ext cx="3246120" cy="329184"/>
+          </a:xfrm>
+          <a:prstGeom prst="rect">
+            <a:avLst/>
+          </a:prstGeom>
+          <a:noFill/>
+        </p:spPr>
+        <p:txBody>
+          <a:bodyPr wrap="square" lIns="0" rIns="0" tIns="0" bIns="0" anchor="t">
+            <a:spAutoFit/>
+          </a:bodyPr>
+          <a:lstStyle/>
+          <a:p>
+            <a:pPr algn="l">
+              <a:spcBef>
+                <a:spcPts val="0"/>
+              </a:spcBef>
+              <a:spcAft>
+                <a:spcPts val="0"/>
+              </a:spcAft>
+            </a:pPr>
+            <a:r>
+              <a:rPr sz="1400" b="0" i="0">
+                <a:solidFill>
+                  <a:srgbClr val="F5F7F9"/>
+                </a:solidFill>
+                <a:latin typeface="Aptos"/>
+              </a:rPr>
+              <a:t>Give real choices, backed by facts.</a:t>
+            </a:r>
+          </a:p>
+        </p:txBody>
+      </p:sp>
+      <p:sp>
+        <p:nvSpPr>
+          <p:cNvPr id="22" name="Rounded Rectangle 21"/>
+          <p:cNvSpPr/>
+          <p:nvPr/>
+        </p:nvSpPr>
+        <p:spPr>
+          <a:xfrm>
+            <a:off x="7068312" y="4654296"/>
+            <a:ext cx="4407408" cy="969264"/>
+          </a:xfrm>
+          <a:prstGeom prst="roundRect">
+            <a:avLst/>
+          </a:prstGeom>
+          <a:solidFill>
+            <a:srgbClr val="1A2632"/>
+          </a:solidFill>
+          <a:ln>
+            <a:noFill/>
+          </a:ln>
+        </p:spPr>
+        <p:style>
+          <a:lnRef idx="1">
+            <a:schemeClr val="accent1"/>
+          </a:lnRef>
+          <a:fillRef idx="3">
+            <a:schemeClr val="accent1"/>
+          </a:fillRef>
+          <a:effectRef idx="2">
+            <a:schemeClr val="accent1"/>
+          </a:effectRef>
+          <a:fontRef idx="minor">
+            <a:schemeClr val="lt1"/>
+          </a:fontRef>
+        </p:style>
+        <p:txBody>
+          <a:bodyPr rtlCol="0" anchor="ctr"/>
+          <a:lstStyle/>
+          <a:p>
+            <a:pPr algn="ctr"/>
+          </a:p>
+        </p:txBody>
+      </p:sp>
+      <p:sp>
+        <p:nvSpPr>
+          <p:cNvPr id="23" name="Oval 22"/>
+          <p:cNvSpPr/>
+          <p:nvPr/>
+        </p:nvSpPr>
+        <p:spPr>
+          <a:xfrm>
+            <a:off x="7296912" y="4864608"/>
+            <a:ext cx="512064" cy="512064"/>
+          </a:xfrm>
+          <a:prstGeom prst="ellipse">
+            <a:avLst/>
+          </a:prstGeom>
+          <a:solidFill>
+            <a:srgbClr val="A9EEC2"/>
+          </a:solidFill>
+          <a:ln>
+            <a:noFill/>
+          </a:ln>
+        </p:spPr>
+        <p:style>
+          <a:lnRef idx="1">
+            <a:schemeClr val="accent1"/>
+          </a:lnRef>
+          <a:fillRef idx="3">
+            <a:schemeClr val="accent1"/>
+          </a:fillRef>
+          <a:effectRef idx="2">
+            <a:schemeClr val="accent1"/>
+          </a:effectRef>
+          <a:fontRef idx="minor">
+            <a:schemeClr val="lt1"/>
+          </a:fontRef>
+        </p:style>
+        <p:txBody>
+          <a:bodyPr rtlCol="0" anchor="ctr"/>
+          <a:lstStyle/>
+          <a:p>
+            <a:pPr algn="ctr"/>
+          </a:p>
+        </p:txBody>
+      </p:sp>
+      <p:sp>
+        <p:nvSpPr>
+          <p:cNvPr id="24" name="TextBox 23"/>
+          <p:cNvSpPr txBox="1"/>
+          <p:nvPr/>
+        </p:nvSpPr>
+        <p:spPr>
+          <a:xfrm>
+            <a:off x="7296912" y="4983480"/>
+            <a:ext cx="512064" cy="164592"/>
+          </a:xfrm>
+          <a:prstGeom prst="rect">
+            <a:avLst/>
+          </a:prstGeom>
+          <a:noFill/>
+        </p:spPr>
+        <p:txBody>
+          <a:bodyPr wrap="square" lIns="0" rIns="0" tIns="0" bIns="0" anchor="ctr">
+            <a:spAutoFit/>
+          </a:bodyPr>
+          <a:lstStyle/>
+          <a:p>
+            <a:pPr algn="ctr">
+              <a:spcBef>
+                <a:spcPts val="0"/>
+              </a:spcBef>
+              <a:spcAft>
+                <a:spcPts val="0"/>
+              </a:spcAft>
+            </a:pPr>
+            <a:r>
+              <a:rPr sz="1000" b="1" i="0">
+                <a:solidFill>
+                  <a:srgbClr val="0C141C"/>
+                </a:solidFill>
+                <a:latin typeface="Aptos"/>
+              </a:rPr>
+              <a:t>04</a:t>
+            </a:r>
+          </a:p>
+        </p:txBody>
+      </p:sp>
+      <p:sp>
+        <p:nvSpPr>
+          <p:cNvPr id="25" name="TextBox 24"/>
+          <p:cNvSpPr txBox="1"/>
+          <p:nvPr/>
+        </p:nvSpPr>
+        <p:spPr>
+          <a:xfrm>
+            <a:off x="8010144" y="4800600"/>
+            <a:ext cx="3154680" cy="228600"/>
+          </a:xfrm>
+          <a:prstGeom prst="rect">
+            <a:avLst/>
+          </a:prstGeom>
+          <a:noFill/>
+        </p:spPr>
+        <p:txBody>
+          <a:bodyPr wrap="square" lIns="0" rIns="0" tIns="0" bIns="0" anchor="t">
+            <a:spAutoFit/>
+          </a:bodyPr>
+          <a:lstStyle/>
+          <a:p>
+            <a:pPr algn="l">
+              <a:spcBef>
+                <a:spcPts val="0"/>
+              </a:spcBef>
+              <a:spcAft>
+                <a:spcPts val="0"/>
+              </a:spcAft>
+            </a:pPr>
+            <a:r>
+              <a:rPr sz="1100" b="1" i="0">
+                <a:solidFill>
+                  <a:srgbClr val="A9EEC2"/>
+                </a:solidFill>
+                <a:latin typeface="Aptos"/>
+              </a:rPr>
+              <a:t>CLOSE</a:t>
+            </a:r>
+          </a:p>
+        </p:txBody>
+      </p:sp>
+      <p:sp>
+        <p:nvSpPr>
+          <p:cNvPr id="26" name="TextBox 25"/>
+          <p:cNvSpPr txBox="1"/>
+          <p:nvPr/>
+        </p:nvSpPr>
+        <p:spPr>
+          <a:xfrm>
+            <a:off x="8010144" y="5093208"/>
+            <a:ext cx="3246120" cy="329184"/>
+          </a:xfrm>
+          <a:prstGeom prst="rect">
+            <a:avLst/>
+          </a:prstGeom>
+          <a:noFill/>
+        </p:spPr>
+        <p:txBody>
+          <a:bodyPr wrap="square" lIns="0" rIns="0" tIns="0" bIns="0" anchor="t">
+            <a:spAutoFit/>
+          </a:bodyPr>
+          <a:lstStyle/>
+          <a:p>
+            <a:pPr algn="l">
+              <a:spcBef>
+                <a:spcPts val="0"/>
+              </a:spcBef>
+              <a:spcAft>
+                <a:spcPts val="0"/>
+              </a:spcAft>
+            </a:pPr>
+            <a:r>
+              <a:rPr sz="1400" b="0" i="0">
+                <a:solidFill>
+                  <a:srgbClr val="F5F7F9"/>
+                </a:solidFill>
+                <a:latin typeface="Aptos"/>
+              </a:rPr>
+              <a:t>Take a good offer when it arrives.</a:t>
+            </a:r>
+          </a:p>
+        </p:txBody>
+      </p:sp>
+      <p:sp>
+        <p:nvSpPr>
+          <p:cNvPr id="27" name="Rectangle 26"/>
+          <p:cNvSpPr/>
+          <p:nvPr/>
+        </p:nvSpPr>
+        <p:spPr>
+          <a:xfrm>
+            <a:off x="658368" y="6473952"/>
+            <a:ext cx="10881360" cy="32004"/>
+          </a:xfrm>
+          <a:prstGeom prst="rect">
+            <a:avLst/>
+          </a:prstGeom>
+          <a:solidFill>
+            <a:srgbClr val="202F3B"/>
+          </a:solidFill>
+          <a:ln>
+            <a:noFill/>
+          </a:ln>
+        </p:spPr>
+        <p:style>
+          <a:lnRef idx="1">
+            <a:schemeClr val="accent1"/>
+          </a:lnRef>
+          <a:fillRef idx="3">
+            <a:schemeClr val="accent1"/>
+          </a:fillRef>
+          <a:effectRef idx="2">
+            <a:schemeClr val="accent1"/>
+          </a:effectRef>
+          <a:fontRef idx="minor">
+            <a:schemeClr val="lt1"/>
+          </a:fontRef>
+        </p:style>
+        <p:txBody>
+          <a:bodyPr rtlCol="0" anchor="ctr"/>
+          <a:lstStyle/>
+          <a:p>
+            <a:pPr algn="ctr"/>
+          </a:p>
+        </p:txBody>
+      </p:sp>
+      <p:sp>
+        <p:nvSpPr>
+          <p:cNvPr id="28" name="Rectangle 27"/>
+          <p:cNvSpPr/>
+          <p:nvPr/>
+        </p:nvSpPr>
+        <p:spPr>
+          <a:xfrm>
+            <a:off x="658368" y="6473952"/>
+            <a:ext cx="2720340" cy="32004"/>
+          </a:xfrm>
+          <a:prstGeom prst="rect">
+            <a:avLst/>
+          </a:prstGeom>
+          <a:solidFill>
+            <a:srgbClr val="A9EEC2"/>
+          </a:solidFill>
+          <a:ln>
+            <a:noFill/>
+          </a:ln>
+        </p:spPr>
+        <p:style>
+          <a:lnRef idx="1">
+            <a:schemeClr val="accent1"/>
+          </a:lnRef>
+          <a:fillRef idx="3">
+            <a:schemeClr val="accent1"/>
+          </a:fillRef>
+          <a:effectRef idx="2">
+            <a:schemeClr val="accent1"/>
+          </a:effectRef>
+          <a:fontRef idx="minor">
+            <a:schemeClr val="lt1"/>
+          </a:fontRef>
+        </p:style>
+        <p:txBody>
+          <a:bodyPr rtlCol="0" anchor="ctr"/>
+          <a:lstStyle/>
+          <a:p>
+            <a:pPr algn="ctr"/>
+          </a:p>
+        </p:txBody>
+      </p:sp>
+      <p:sp>
+        <p:nvSpPr>
+          <p:cNvPr id="29" name="TextBox 28"/>
+          <p:cNvSpPr txBox="1"/>
+          <p:nvPr/>
+        </p:nvSpPr>
+        <p:spPr>
+          <a:xfrm>
+            <a:off x="658368" y="6547104"/>
+            <a:ext cx="8412480" cy="164592"/>
+          </a:xfrm>
+          <a:prstGeom prst="rect">
+            <a:avLst/>
+          </a:prstGeom>
+          <a:noFill/>
+        </p:spPr>
+        <p:txBody>
+          <a:bodyPr wrap="square" lIns="0" rIns="0" tIns="0" bIns="0" anchor="t">
+            <a:spAutoFit/>
+          </a:bodyPr>
+          <a:lstStyle/>
+          <a:p>
+            <a:pPr algn="l">
+              <a:spcBef>
+                <a:spcPts val="0"/>
+              </a:spcBef>
+              <a:spcAft>
+                <a:spcPts val="0"/>
+              </a:spcAft>
+            </a:pPr>
+            <a:r>
+              <a:rPr sz="800" b="1" i="0">
+                <a:solidFill>
+                  <a:srgbClr val="AEBCC6"/>
+                </a:solidFill>
+                <a:latin typeface="Aptos"/>
+              </a:rPr>
+              <a:t>NIGHTHUNTER  ·  TACTO NEGOTIATION ARENA</a:t>
+            </a:r>
+          </a:p>
+        </p:txBody>
+      </p:sp>
+      <p:sp>
+        <p:nvSpPr>
+          <p:cNvPr id="30" name="TextBox 29"/>
+          <p:cNvSpPr txBox="1"/>
+          <p:nvPr/>
+        </p:nvSpPr>
+        <p:spPr>
+          <a:xfrm>
+            <a:off x="10680192" y="6528816"/>
+            <a:ext cx="868680" cy="182880"/>
+          </a:xfrm>
+          <a:prstGeom prst="rect">
+            <a:avLst/>
+          </a:prstGeom>
+          <a:noFill/>
+        </p:spPr>
+        <p:txBody>
+          <a:bodyPr wrap="square" lIns="0" rIns="0" tIns="0" bIns="0" anchor="t">
+            <a:spAutoFit/>
+          </a:bodyPr>
+          <a:lstStyle/>
+          <a:p>
+            <a:pPr algn="r">
+              <a:spcBef>
+                <a:spcPts val="0"/>
+              </a:spcBef>
+              <a:spcAft>
+                <a:spcPts val="0"/>
+              </a:spcAft>
+            </a:pPr>
+            <a:r>
+              <a:rPr sz="900" b="1" i="0">
+                <a:solidFill>
+                  <a:srgbClr val="AEBCC6"/>
+                </a:solidFill>
+                <a:latin typeface="Aptos"/>
+              </a:rPr>
+              <a:t>01 / 04</a:t>
             </a:r>
           </a:p>
         </p:txBody>
@@ -3208,6 +4971,14 @@
 <file path=ppt/slides/slide2.xml><?xml version="1.0" encoding="utf-8"?>
 <p:sld xmlns:a="http://schemas.openxmlformats.org/drawingml/2006/main" xmlns:p="http://schemas.openxmlformats.org/presentationml/2006/main" xmlns:r="http://schemas.openxmlformats.org/officeDocument/2006/relationships">
   <p:cSld>
+    <p:bg>
+      <p:bgPr>
+        <a:solidFill>
+          <a:srgbClr val="0F1822"/>
+        </a:solidFill>
+        <a:effectLst/>
+      </p:bgPr>
+    </p:bg>
     <p:spTree>
       <p:nvGrpSpPr>
         <p:cNvPr id="1" name=""/>
@@ -3217,20 +4988,146 @@
       <p:grpSpPr/>
       <p:sp>
         <p:nvSpPr>
-          <p:cNvPr id="2" name="Rectangle 1"/>
+          <p:cNvPr id="2" name="TextBox 1"/>
+          <p:cNvSpPr txBox="1"/>
+          <p:nvPr/>
+        </p:nvSpPr>
+        <p:spPr>
+          <a:xfrm>
+            <a:off x="658368" y="384048"/>
+            <a:ext cx="7132320" cy="256032"/>
+          </a:xfrm>
+          <a:prstGeom prst="rect">
+            <a:avLst/>
+          </a:prstGeom>
+          <a:noFill/>
+        </p:spPr>
+        <p:txBody>
+          <a:bodyPr wrap="square" lIns="0" rIns="0" tIns="0" bIns="0" anchor="t">
+            <a:spAutoFit/>
+          </a:bodyPr>
+          <a:lstStyle/>
+          <a:p>
+            <a:pPr algn="l">
+              <a:spcBef>
+                <a:spcPts val="0"/>
+              </a:spcBef>
+              <a:spcAft>
+                <a:spcPts val="0"/>
+              </a:spcAft>
+            </a:pPr>
+            <a:r>
+              <a:rPr sz="1000" b="1" i="0">
+                <a:solidFill>
+                  <a:srgbClr val="A9EEC2"/>
+                </a:solidFill>
+                <a:latin typeface="Aptos"/>
+              </a:rPr>
+              <a:t>01  ·  READ THE SUPPLIER</a:t>
+            </a:r>
+          </a:p>
+        </p:txBody>
+      </p:sp>
+      <p:sp>
+        <p:nvSpPr>
+          <p:cNvPr id="3" name="TextBox 2"/>
+          <p:cNvSpPr txBox="1"/>
+          <p:nvPr/>
+        </p:nvSpPr>
+        <p:spPr>
+          <a:xfrm>
+            <a:off x="658368" y="749808"/>
+            <a:ext cx="10881360" cy="566928"/>
+          </a:xfrm>
+          <a:prstGeom prst="rect">
+            <a:avLst/>
+          </a:prstGeom>
+          <a:noFill/>
+        </p:spPr>
+        <p:txBody>
+          <a:bodyPr wrap="square" lIns="0" rIns="0" tIns="0" bIns="0" anchor="t">
+            <a:spAutoFit/>
+          </a:bodyPr>
+          <a:lstStyle/>
+          <a:p>
+            <a:pPr algn="l">
+              <a:spcBef>
+                <a:spcPts val="0"/>
+              </a:spcBef>
+              <a:spcAft>
+                <a:spcPts val="0"/>
+              </a:spcAft>
+            </a:pPr>
+            <a:r>
+              <a:rPr sz="3000" b="1" i="0">
+                <a:solidFill>
+                  <a:srgbClr val="F5F7F9"/>
+                </a:solidFill>
+                <a:latin typeface="Aptos"/>
+              </a:rPr>
+              <a:t>Find the pressure point before you make the ask.</a:t>
+            </a:r>
+          </a:p>
+        </p:txBody>
+      </p:sp>
+      <p:sp>
+        <p:nvSpPr>
+          <p:cNvPr id="4" name="TextBox 3"/>
+          <p:cNvSpPr txBox="1"/>
+          <p:nvPr/>
+        </p:nvSpPr>
+        <p:spPr>
+          <a:xfrm>
+            <a:off x="685800" y="1389888"/>
+            <a:ext cx="10698480" cy="438912"/>
+          </a:xfrm>
+          <a:prstGeom prst="rect">
+            <a:avLst/>
+          </a:prstGeom>
+          <a:noFill/>
+        </p:spPr>
+        <p:txBody>
+          <a:bodyPr wrap="square" lIns="0" rIns="0" tIns="0" bIns="0" anchor="t">
+            <a:spAutoFit/>
+          </a:bodyPr>
+          <a:lstStyle/>
+          <a:p>
+            <a:pPr algn="l">
+              <a:spcBef>
+                <a:spcPts val="0"/>
+              </a:spcBef>
+              <a:spcAft>
+                <a:spcPts val="0"/>
+              </a:spcAft>
+            </a:pPr>
+            <a:r>
+              <a:rPr sz="1600" b="0" i="0">
+                <a:solidFill>
+                  <a:srgbClr val="AEBCC6"/>
+                </a:solidFill>
+                <a:latin typeface="Aptos"/>
+              </a:rPr>
+              <a:t>We looked for useful clues in supplier documents, contract terms and live replies.</a:t>
+            </a:r>
+          </a:p>
+        </p:txBody>
+      </p:sp>
+      <p:sp>
+        <p:nvSpPr>
+          <p:cNvPr id="5" name="Rectangle 4"/>
           <p:cNvSpPr/>
           <p:nvPr/>
         </p:nvSpPr>
         <p:spPr>
           <a:xfrm>
-            <a:off x="0" y="0"/>
-            <a:ext cx="12191695" cy="164592"/>
+            <a:off x="658368" y="6473952"/>
+            <a:ext cx="10881360" cy="32004"/>
           </a:xfrm>
           <a:prstGeom prst="rect">
             <a:avLst/>
           </a:prstGeom>
           <a:solidFill>
-            <a:srgbClr val="0F8B8D"/>
+            <a:srgbClr val="202F3B"/>
           </a:solidFill>
           <a:ln>
             <a:noFill/>
@@ -3260,14 +5157,57 @@
       </p:sp>
       <p:sp>
         <p:nvSpPr>
-          <p:cNvPr id="3" name="TextBox 2"/>
+          <p:cNvPr id="6" name="Rectangle 5"/>
+          <p:cNvSpPr/>
+          <p:nvPr/>
+        </p:nvSpPr>
+        <p:spPr>
+          <a:xfrm>
+            <a:off x="658368" y="6473952"/>
+            <a:ext cx="5440680" cy="32004"/>
+          </a:xfrm>
+          <a:prstGeom prst="rect">
+            <a:avLst/>
+          </a:prstGeom>
+          <a:solidFill>
+            <a:srgbClr val="A9EEC2"/>
+          </a:solidFill>
+          <a:ln>
+            <a:noFill/>
+          </a:ln>
+        </p:spPr>
+        <p:style>
+          <a:lnRef idx="1">
+            <a:schemeClr val="accent1"/>
+          </a:lnRef>
+          <a:fillRef idx="3">
+            <a:schemeClr val="accent1"/>
+          </a:fillRef>
+          <a:effectRef idx="2">
+            <a:schemeClr val="accent1"/>
+          </a:effectRef>
+          <a:fontRef idx="minor">
+            <a:schemeClr val="lt1"/>
+          </a:fontRef>
+        </p:style>
+        <p:txBody>
+          <a:bodyPr rtlCol="0" anchor="ctr"/>
+          <a:lstStyle/>
+          <a:p>
+            <a:pPr algn="ctr"/>
+          </a:p>
+        </p:txBody>
+      </p:sp>
+      <p:sp>
+        <p:nvSpPr>
+          <p:cNvPr id="7" name="TextBox 6"/>
           <p:cNvSpPr txBox="1"/>
           <p:nvPr/>
         </p:nvSpPr>
         <p:spPr>
           <a:xfrm>
-            <a:off x="548640" y="365760"/>
-            <a:ext cx="10972800" cy="914400"/>
+            <a:off x="658368" y="6547104"/>
+            <a:ext cx="8412480" cy="164592"/>
           </a:xfrm>
           <a:prstGeom prst="rect">
             <a:avLst/>
@@ -3275,34 +5215,41 @@
           <a:noFill/>
         </p:spPr>
         <p:txBody>
-          <a:bodyPr wrap="none">
+          <a:bodyPr wrap="square" lIns="0" rIns="0" tIns="0" bIns="0" anchor="t">
             <a:spAutoFit/>
           </a:bodyPr>
           <a:lstStyle/>
           <a:p>
-            <a:pPr>
-              <a:defRPr sz="3200" b="1">
+            <a:pPr algn="l">
+              <a:spcBef>
+                <a:spcPts val="0"/>
+              </a:spcBef>
+              <a:spcAft>
+                <a:spcPts val="0"/>
+              </a:spcAft>
+            </a:pPr>
+            <a:r>
+              <a:rPr sz="800" b="1" i="0">
                 <a:solidFill>
-                  <a:srgbClr val="14243B"/>
+                  <a:srgbClr val="AEBCC6"/>
                 </a:solidFill>
-              </a:defRPr>
-            </a:pPr>
-            <a:r>
-              <a:t>The job: lowest total cost, not lowest price</a:t>
-            </a:r>
-          </a:p>
-        </p:txBody>
-      </p:sp>
-      <p:sp>
-        <p:nvSpPr>
-          <p:cNvPr id="4" name="TextBox 3"/>
+                <a:latin typeface="Aptos"/>
+              </a:rPr>
+              <a:t>NIGHTHUNTER  ·  TACTO NEGOTIATION ARENA</a:t>
+            </a:r>
+          </a:p>
+        </p:txBody>
+      </p:sp>
+      <p:sp>
+        <p:nvSpPr>
+          <p:cNvPr id="8" name="TextBox 7"/>
           <p:cNvSpPr txBox="1"/>
           <p:nvPr/>
         </p:nvSpPr>
         <p:spPr>
           <a:xfrm>
-            <a:off x="640080" y="1463040"/>
-            <a:ext cx="10972800" cy="5029200"/>
+            <a:off x="10680192" y="6528816"/>
+            <a:ext cx="868680" cy="182880"/>
           </a:xfrm>
           <a:prstGeom prst="rect">
             <a:avLst/>
@@ -3310,68 +5257,750 @@
           <a:noFill/>
         </p:spPr>
         <p:txBody>
-          <a:bodyPr wrap="square">
+          <a:bodyPr wrap="square" lIns="0" rIns="0" tIns="0" bIns="0" anchor="t">
             <a:spAutoFit/>
           </a:bodyPr>
           <a:lstStyle/>
           <a:p>
-            <a:pPr>
+            <a:pPr algn="r">
+              <a:spcBef>
+                <a:spcPts val="0"/>
+              </a:spcBef>
               <a:spcAft>
-                <a:spcPts val="800"/>
+                <a:spcPts val="0"/>
               </a:spcAft>
-              <a:defRPr sz="1800" b="0">
+            </a:pPr>
+            <a:r>
+              <a:rPr sz="900" b="1" i="0">
                 <a:solidFill>
-                  <a:srgbClr val="14243B"/>
+                  <a:srgbClr val="AEBCC6"/>
                 </a:solidFill>
-              </a:defRPr>
+                <a:latin typeface="Aptos"/>
+              </a:rPr>
+              <a:t>02 / 04</a:t>
+            </a:r>
+          </a:p>
+        </p:txBody>
+      </p:sp>
+      <p:sp>
+        <p:nvSpPr>
+          <p:cNvPr id="9" name="Rounded Rectangle 8"/>
+          <p:cNvSpPr/>
+          <p:nvPr/>
+        </p:nvSpPr>
+        <p:spPr>
+          <a:xfrm>
+            <a:off x="685800" y="2240280"/>
+            <a:ext cx="3401568" cy="2907792"/>
+          </a:xfrm>
+          <a:prstGeom prst="roundRect">
+            <a:avLst/>
+          </a:prstGeom>
+          <a:solidFill>
+            <a:srgbClr val="1A2632"/>
+          </a:solidFill>
+          <a:ln>
+            <a:noFill/>
+          </a:ln>
+        </p:spPr>
+        <p:style>
+          <a:lnRef idx="1">
+            <a:schemeClr val="accent1"/>
+          </a:lnRef>
+          <a:fillRef idx="3">
+            <a:schemeClr val="accent1"/>
+          </a:fillRef>
+          <a:effectRef idx="2">
+            <a:schemeClr val="accent1"/>
+          </a:effectRef>
+          <a:fontRef idx="minor">
+            <a:schemeClr val="lt1"/>
+          </a:fontRef>
+        </p:style>
+        <p:txBody>
+          <a:bodyPr rtlCol="0" anchor="ctr"/>
+          <a:lstStyle/>
+          <a:p>
+            <a:pPr algn="ctr"/>
+          </a:p>
+        </p:txBody>
+      </p:sp>
+      <p:sp>
+        <p:nvSpPr>
+          <p:cNvPr id="10" name="Rectangle 9"/>
+          <p:cNvSpPr/>
+          <p:nvPr/>
+        </p:nvSpPr>
+        <p:spPr>
+          <a:xfrm>
+            <a:off x="685800" y="2240280"/>
+            <a:ext cx="3401568" cy="64008"/>
+          </a:xfrm>
+          <a:prstGeom prst="rect">
+            <a:avLst/>
+          </a:prstGeom>
+          <a:solidFill>
+            <a:srgbClr val="A9EEC2"/>
+          </a:solidFill>
+          <a:ln>
+            <a:noFill/>
+          </a:ln>
+        </p:spPr>
+        <p:style>
+          <a:lnRef idx="1">
+            <a:schemeClr val="accent1"/>
+          </a:lnRef>
+          <a:fillRef idx="3">
+            <a:schemeClr val="accent1"/>
+          </a:fillRef>
+          <a:effectRef idx="2">
+            <a:schemeClr val="accent1"/>
+          </a:effectRef>
+          <a:fontRef idx="minor">
+            <a:schemeClr val="lt1"/>
+          </a:fontRef>
+        </p:style>
+        <p:txBody>
+          <a:bodyPr rtlCol="0" anchor="ctr"/>
+          <a:lstStyle/>
+          <a:p>
+            <a:pPr algn="ctr"/>
+          </a:p>
+        </p:txBody>
+      </p:sp>
+      <p:sp>
+        <p:nvSpPr>
+          <p:cNvPr id="11" name="TextBox 10"/>
+          <p:cNvSpPr txBox="1"/>
+          <p:nvPr/>
+        </p:nvSpPr>
+        <p:spPr>
+          <a:xfrm>
+            <a:off x="914400" y="2542032"/>
+            <a:ext cx="2880360" cy="228600"/>
+          </a:xfrm>
+          <a:prstGeom prst="rect">
+            <a:avLst/>
+          </a:prstGeom>
+          <a:noFill/>
+        </p:spPr>
+        <p:txBody>
+          <a:bodyPr wrap="square" lIns="0" rIns="0" tIns="0" bIns="0" anchor="t">
+            <a:spAutoFit/>
+          </a:bodyPr>
+          <a:lstStyle/>
+          <a:p>
+            <a:pPr algn="l">
+              <a:spcBef>
+                <a:spcPts val="0"/>
+              </a:spcBef>
+              <a:spcAft>
+                <a:spcPts val="0"/>
+              </a:spcAft>
             </a:pPr>
             <a:r>
-              <a:t>• Buyer: Hollerau Pumpenwerke, negotiating by e-mail with supplier bots: price increases, renewals, RFQs, bundles, raw materials, capacity, quality</a:t>
-            </a:r>
-          </a:p>
-          <a:p>
-            <a:pPr>
+              <a:rPr sz="1100" b="1" i="0">
+                <a:solidFill>
+                  <a:srgbClr val="A9EEC2"/>
+                </a:solidFill>
+                <a:latin typeface="Aptos"/>
+              </a:rPr>
+              <a:t>CAPACITY</a:t>
+            </a:r>
+          </a:p>
+        </p:txBody>
+      </p:sp>
+      <p:sp>
+        <p:nvSpPr>
+          <p:cNvPr id="12" name="TextBox 11"/>
+          <p:cNvSpPr txBox="1"/>
+          <p:nvPr/>
+        </p:nvSpPr>
+        <p:spPr>
+          <a:xfrm>
+            <a:off x="914400" y="2953512"/>
+            <a:ext cx="2889504" cy="804672"/>
+          </a:xfrm>
+          <a:prstGeom prst="rect">
+            <a:avLst/>
+          </a:prstGeom>
+          <a:noFill/>
+        </p:spPr>
+        <p:txBody>
+          <a:bodyPr wrap="square" lIns="0" rIns="0" tIns="0" bIns="0" anchor="t">
+            <a:spAutoFit/>
+          </a:bodyPr>
+          <a:lstStyle/>
+          <a:p>
+            <a:pPr algn="l">
+              <a:spcBef>
+                <a:spcPts val="0"/>
+              </a:spcBef>
               <a:spcAft>
-                <a:spcPts val="800"/>
+                <a:spcPts val="0"/>
               </a:spcAft>
-              <a:defRPr sz="1800" b="1">
+            </a:pPr>
+            <a:r>
+              <a:rPr sz="2100" b="1" i="0">
                 <a:solidFill>
-                  <a:srgbClr val="14243B"/>
+                  <a:srgbClr val="F5F7F9"/>
                 </a:solidFill>
-              </a:defRPr>
+                <a:latin typeface="Aptos"/>
+              </a:rPr>
+              <a:t>Who can actually
+fulfill the order?</a:t>
+            </a:r>
+          </a:p>
+        </p:txBody>
+      </p:sp>
+      <p:sp>
+        <p:nvSpPr>
+          <p:cNvPr id="13" name="TextBox 12"/>
+          <p:cNvSpPr txBox="1"/>
+          <p:nvPr/>
+        </p:nvSpPr>
+        <p:spPr>
+          <a:xfrm>
+            <a:off x="914400" y="3986784"/>
+            <a:ext cx="2889504" cy="850392"/>
+          </a:xfrm>
+          <a:prstGeom prst="rect">
+            <a:avLst/>
+          </a:prstGeom>
+          <a:noFill/>
+        </p:spPr>
+        <p:txBody>
+          <a:bodyPr wrap="square" lIns="0" rIns="0" tIns="0" bIns="0" anchor="t">
+            <a:spAutoFit/>
+          </a:bodyPr>
+          <a:lstStyle/>
+          <a:p>
+            <a:pPr algn="l">
+              <a:spcBef>
+                <a:spcPts val="0"/>
+              </a:spcBef>
+              <a:spcAft>
+                <a:spcPts val="0"/>
+              </a:spcAft>
             </a:pPr>
             <a:r>
-              <a:t>• Total cost decides:** price, uncovered need, payment, freight, lead time, quality, index risk, supplier health</a:t>
-            </a:r>
-          </a:p>
-          <a:p>
-            <a:pPr>
+              <a:rPr sz="1500" b="0" i="0">
+                <a:solidFill>
+                  <a:srgbClr val="AEBCC6"/>
+                </a:solidFill>
+                <a:latin typeface="Aptos"/>
+              </a:rPr>
+              <a:t>Spare capacity can matter more than a low opening quote.</a:t>
+            </a:r>
+          </a:p>
+        </p:txBody>
+      </p:sp>
+      <p:sp>
+        <p:nvSpPr>
+          <p:cNvPr id="14" name="Rounded Rectangle 13"/>
+          <p:cNvSpPr/>
+          <p:nvPr/>
+        </p:nvSpPr>
+        <p:spPr>
+          <a:xfrm>
+            <a:off x="4370832" y="2240280"/>
+            <a:ext cx="3401568" cy="2907792"/>
+          </a:xfrm>
+          <a:prstGeom prst="roundRect">
+            <a:avLst/>
+          </a:prstGeom>
+          <a:solidFill>
+            <a:srgbClr val="1A2632"/>
+          </a:solidFill>
+          <a:ln>
+            <a:noFill/>
+          </a:ln>
+        </p:spPr>
+        <p:style>
+          <a:lnRef idx="1">
+            <a:schemeClr val="accent1"/>
+          </a:lnRef>
+          <a:fillRef idx="3">
+            <a:schemeClr val="accent1"/>
+          </a:fillRef>
+          <a:effectRef idx="2">
+            <a:schemeClr val="accent1"/>
+          </a:effectRef>
+          <a:fontRef idx="minor">
+            <a:schemeClr val="lt1"/>
+          </a:fontRef>
+        </p:style>
+        <p:txBody>
+          <a:bodyPr rtlCol="0" anchor="ctr"/>
+          <a:lstStyle/>
+          <a:p>
+            <a:pPr algn="ctr"/>
+          </a:p>
+        </p:txBody>
+      </p:sp>
+      <p:sp>
+        <p:nvSpPr>
+          <p:cNvPr id="15" name="Rectangle 14"/>
+          <p:cNvSpPr/>
+          <p:nvPr/>
+        </p:nvSpPr>
+        <p:spPr>
+          <a:xfrm>
+            <a:off x="4370832" y="2240280"/>
+            <a:ext cx="3401568" cy="64008"/>
+          </a:xfrm>
+          <a:prstGeom prst="rect">
+            <a:avLst/>
+          </a:prstGeom>
+          <a:solidFill>
+            <a:srgbClr val="77C9E8"/>
+          </a:solidFill>
+          <a:ln>
+            <a:noFill/>
+          </a:ln>
+        </p:spPr>
+        <p:style>
+          <a:lnRef idx="1">
+            <a:schemeClr val="accent1"/>
+          </a:lnRef>
+          <a:fillRef idx="3">
+            <a:schemeClr val="accent1"/>
+          </a:fillRef>
+          <a:effectRef idx="2">
+            <a:schemeClr val="accent1"/>
+          </a:effectRef>
+          <a:fontRef idx="minor">
+            <a:schemeClr val="lt1"/>
+          </a:fontRef>
+        </p:style>
+        <p:txBody>
+          <a:bodyPr rtlCol="0" anchor="ctr"/>
+          <a:lstStyle/>
+          <a:p>
+            <a:pPr algn="ctr"/>
+          </a:p>
+        </p:txBody>
+      </p:sp>
+      <p:sp>
+        <p:nvSpPr>
+          <p:cNvPr id="16" name="TextBox 15"/>
+          <p:cNvSpPr txBox="1"/>
+          <p:nvPr/>
+        </p:nvSpPr>
+        <p:spPr>
+          <a:xfrm>
+            <a:off x="4599432" y="2542032"/>
+            <a:ext cx="2880360" cy="228600"/>
+          </a:xfrm>
+          <a:prstGeom prst="rect">
+            <a:avLst/>
+          </a:prstGeom>
+          <a:noFill/>
+        </p:spPr>
+        <p:txBody>
+          <a:bodyPr wrap="square" lIns="0" rIns="0" tIns="0" bIns="0" anchor="t">
+            <a:spAutoFit/>
+          </a:bodyPr>
+          <a:lstStyle/>
+          <a:p>
+            <a:pPr algn="l">
+              <a:spcBef>
+                <a:spcPts val="0"/>
+              </a:spcBef>
               <a:spcAft>
-                <a:spcPts val="800"/>
+                <a:spcPts val="0"/>
               </a:spcAft>
-              <a:defRPr sz="1800" b="0">
+            </a:pPr>
+            <a:r>
+              <a:rPr sz="1100" b="1" i="0">
                 <a:solidFill>
-                  <a:srgbClr val="14243B"/>
+                  <a:srgbClr val="77C9E8"/>
                 </a:solidFill>
-              </a:defRPr>
+                <a:latin typeface="Aptos"/>
+              </a:rPr>
+              <a:t>CASH</a:t>
+            </a:r>
+          </a:p>
+        </p:txBody>
+      </p:sp>
+      <p:sp>
+        <p:nvSpPr>
+          <p:cNvPr id="17" name="TextBox 16"/>
+          <p:cNvSpPr txBox="1"/>
+          <p:nvPr/>
+        </p:nvSpPr>
+        <p:spPr>
+          <a:xfrm>
+            <a:off x="4599432" y="2953512"/>
+            <a:ext cx="2889504" cy="804672"/>
+          </a:xfrm>
+          <a:prstGeom prst="rect">
+            <a:avLst/>
+          </a:prstGeom>
+          <a:noFill/>
+        </p:spPr>
+        <p:txBody>
+          <a:bodyPr wrap="square" lIns="0" rIns="0" tIns="0" bIns="0" anchor="t">
+            <a:spAutoFit/>
+          </a:bodyPr>
+          <a:lstStyle/>
+          <a:p>
+            <a:pPr algn="l">
+              <a:spcBef>
+                <a:spcPts val="0"/>
+              </a:spcBef>
+              <a:spcAft>
+                <a:spcPts val="0"/>
+              </a:spcAft>
             </a:pPr>
             <a:r>
-              <a:t>• Score = share of the possible saving captured: (C_open − C_deal) / (C_open − C_best)</a:t>
-            </a:r>
-          </a:p>
-          <a:p>
-            <a:pPr>
+              <a:rPr sz="2100" b="1" i="0">
+                <a:solidFill>
+                  <a:srgbClr val="F5F7F9"/>
+                </a:solidFill>
+                <a:latin typeface="Aptos"/>
+              </a:rPr>
+              <a:t>What does the
+supplier need now?</a:t>
+            </a:r>
+          </a:p>
+        </p:txBody>
+      </p:sp>
+      <p:sp>
+        <p:nvSpPr>
+          <p:cNvPr id="18" name="TextBox 17"/>
+          <p:cNvSpPr txBox="1"/>
+          <p:nvPr/>
+        </p:nvSpPr>
+        <p:spPr>
+          <a:xfrm>
+            <a:off x="4599432" y="3986784"/>
+            <a:ext cx="2889504" cy="850392"/>
+          </a:xfrm>
+          <a:prstGeom prst="rect">
+            <a:avLst/>
+          </a:prstGeom>
+          <a:noFill/>
+        </p:spPr>
+        <p:txBody>
+          <a:bodyPr wrap="square" lIns="0" rIns="0" tIns="0" bIns="0" anchor="t">
+            <a:spAutoFit/>
+          </a:bodyPr>
+          <a:lstStyle/>
+          <a:p>
+            <a:pPr algn="l">
+              <a:spcBef>
+                <a:spcPts val="0"/>
+              </a:spcBef>
               <a:spcAft>
-                <a:spcPts val="800"/>
+                <a:spcPts val="0"/>
               </a:spcAft>
-              <a:defRPr sz="1800" b="0">
+            </a:pPr>
+            <a:r>
+              <a:rPr sz="1500" b="0" i="0">
                 <a:solidFill>
-                  <a:srgbClr val="14243B"/>
+                  <a:srgbClr val="AEBCC6"/>
                 </a:solidFill>
-              </a:defRPr>
+                <a:latin typeface="Aptos"/>
+              </a:rPr>
+              <a:t>If faster payment matters, it can become a trade.</a:t>
+            </a:r>
+          </a:p>
+        </p:txBody>
+      </p:sp>
+      <p:sp>
+        <p:nvSpPr>
+          <p:cNvPr id="19" name="Rounded Rectangle 18"/>
+          <p:cNvSpPr/>
+          <p:nvPr/>
+        </p:nvSpPr>
+        <p:spPr>
+          <a:xfrm>
+            <a:off x="8055864" y="2240280"/>
+            <a:ext cx="3401568" cy="2907792"/>
+          </a:xfrm>
+          <a:prstGeom prst="roundRect">
+            <a:avLst/>
+          </a:prstGeom>
+          <a:solidFill>
+            <a:srgbClr val="1A2632"/>
+          </a:solidFill>
+          <a:ln>
+            <a:noFill/>
+          </a:ln>
+        </p:spPr>
+        <p:style>
+          <a:lnRef idx="1">
+            <a:schemeClr val="accent1"/>
+          </a:lnRef>
+          <a:fillRef idx="3">
+            <a:schemeClr val="accent1"/>
+          </a:fillRef>
+          <a:effectRef idx="2">
+            <a:schemeClr val="accent1"/>
+          </a:effectRef>
+          <a:fontRef idx="minor">
+            <a:schemeClr val="lt1"/>
+          </a:fontRef>
+        </p:style>
+        <p:txBody>
+          <a:bodyPr rtlCol="0" anchor="ctr"/>
+          <a:lstStyle/>
+          <a:p>
+            <a:pPr algn="ctr"/>
+          </a:p>
+        </p:txBody>
+      </p:sp>
+      <p:sp>
+        <p:nvSpPr>
+          <p:cNvPr id="20" name="Rectangle 19"/>
+          <p:cNvSpPr/>
+          <p:nvPr/>
+        </p:nvSpPr>
+        <p:spPr>
+          <a:xfrm>
+            <a:off x="8055864" y="2240280"/>
+            <a:ext cx="3401568" cy="64008"/>
+          </a:xfrm>
+          <a:prstGeom prst="rect">
+            <a:avLst/>
+          </a:prstGeom>
+          <a:solidFill>
+            <a:srgbClr val="FFBE70"/>
+          </a:solidFill>
+          <a:ln>
+            <a:noFill/>
+          </a:ln>
+        </p:spPr>
+        <p:style>
+          <a:lnRef idx="1">
+            <a:schemeClr val="accent1"/>
+          </a:lnRef>
+          <a:fillRef idx="3">
+            <a:schemeClr val="accent1"/>
+          </a:fillRef>
+          <a:effectRef idx="2">
+            <a:schemeClr val="accent1"/>
+          </a:effectRef>
+          <a:fontRef idx="minor">
+            <a:schemeClr val="lt1"/>
+          </a:fontRef>
+        </p:style>
+        <p:txBody>
+          <a:bodyPr rtlCol="0" anchor="ctr"/>
+          <a:lstStyle/>
+          <a:p>
+            <a:pPr algn="ctr"/>
+          </a:p>
+        </p:txBody>
+      </p:sp>
+      <p:sp>
+        <p:nvSpPr>
+          <p:cNvPr id="21" name="TextBox 20"/>
+          <p:cNvSpPr txBox="1"/>
+          <p:nvPr/>
+        </p:nvSpPr>
+        <p:spPr>
+          <a:xfrm>
+            <a:off x="8284464" y="2542032"/>
+            <a:ext cx="2880360" cy="228600"/>
+          </a:xfrm>
+          <a:prstGeom prst="rect">
+            <a:avLst/>
+          </a:prstGeom>
+          <a:noFill/>
+        </p:spPr>
+        <p:txBody>
+          <a:bodyPr wrap="square" lIns="0" rIns="0" tIns="0" bIns="0" anchor="t">
+            <a:spAutoFit/>
+          </a:bodyPr>
+          <a:lstStyle/>
+          <a:p>
+            <a:pPr algn="l">
+              <a:spcBef>
+                <a:spcPts val="0"/>
+              </a:spcBef>
+              <a:spcAft>
+                <a:spcPts val="0"/>
+              </a:spcAft>
             </a:pPr>
             <a:r>
-              <a:t>• Final: 5 waves × 8 minutes, all cases in parallel, no human in the loop</a:t>
+              <a:rPr sz="1100" b="1" i="0">
+                <a:solidFill>
+                  <a:srgbClr val="FFBE70"/>
+                </a:solidFill>
+                <a:latin typeface="Aptos"/>
+              </a:rPr>
+              <a:t>TIMING</a:t>
+            </a:r>
+          </a:p>
+        </p:txBody>
+      </p:sp>
+      <p:sp>
+        <p:nvSpPr>
+          <p:cNvPr id="22" name="TextBox 21"/>
+          <p:cNvSpPr txBox="1"/>
+          <p:nvPr/>
+        </p:nvSpPr>
+        <p:spPr>
+          <a:xfrm>
+            <a:off x="8284464" y="2953512"/>
+            <a:ext cx="2889504" cy="804672"/>
+          </a:xfrm>
+          <a:prstGeom prst="rect">
+            <a:avLst/>
+          </a:prstGeom>
+          <a:noFill/>
+        </p:spPr>
+        <p:txBody>
+          <a:bodyPr wrap="square" lIns="0" rIns="0" tIns="0" bIns="0" anchor="t">
+            <a:spAutoFit/>
+          </a:bodyPr>
+          <a:lstStyle/>
+          <a:p>
+            <a:pPr algn="l">
+              <a:spcBef>
+                <a:spcPts val="0"/>
+              </a:spcBef>
+              <a:spcAft>
+                <a:spcPts val="0"/>
+              </a:spcAft>
+            </a:pPr>
+            <a:r>
+              <a:rPr sz="2100" b="1" i="0">
+                <a:solidFill>
+                  <a:srgbClr val="F5F7F9"/>
+                </a:solidFill>
+                <a:latin typeface="Aptos"/>
+              </a:rPr>
+              <a:t>Which date matters?</a:t>
+            </a:r>
+          </a:p>
+        </p:txBody>
+      </p:sp>
+      <p:sp>
+        <p:nvSpPr>
+          <p:cNvPr id="23" name="TextBox 22"/>
+          <p:cNvSpPr txBox="1"/>
+          <p:nvPr/>
+        </p:nvSpPr>
+        <p:spPr>
+          <a:xfrm>
+            <a:off x="8284464" y="3986784"/>
+            <a:ext cx="2889504" cy="850392"/>
+          </a:xfrm>
+          <a:prstGeom prst="rect">
+            <a:avLst/>
+          </a:prstGeom>
+          <a:noFill/>
+        </p:spPr>
+        <p:txBody>
+          <a:bodyPr wrap="square" lIns="0" rIns="0" tIns="0" bIns="0" anchor="t">
+            <a:spAutoFit/>
+          </a:bodyPr>
+          <a:lstStyle/>
+          <a:p>
+            <a:pPr algn="l">
+              <a:spcBef>
+                <a:spcPts val="0"/>
+              </a:spcBef>
+              <a:spcAft>
+                <a:spcPts val="0"/>
+              </a:spcAft>
+            </a:pPr>
+            <a:r>
+              <a:rPr sz="1500" b="0" i="0">
+                <a:solidFill>
+                  <a:srgbClr val="AEBCC6"/>
+                </a:solidFill>
+                <a:latin typeface="Aptos"/>
+              </a:rPr>
+              <a:t>A checked notice date or start date makes the ask specific.</a:t>
+            </a:r>
+          </a:p>
+        </p:txBody>
+      </p:sp>
+      <p:sp>
+        <p:nvSpPr>
+          <p:cNvPr id="24" name="Rounded Rectangle 23"/>
+          <p:cNvSpPr/>
+          <p:nvPr/>
+        </p:nvSpPr>
+        <p:spPr>
+          <a:xfrm>
+            <a:off x="685800" y="5468112"/>
+            <a:ext cx="10789920" cy="557784"/>
+          </a:xfrm>
+          <a:prstGeom prst="roundRect">
+            <a:avLst/>
+          </a:prstGeom>
+          <a:solidFill>
+            <a:srgbClr val="202F3B"/>
+          </a:solidFill>
+          <a:ln>
+            <a:noFill/>
+          </a:ln>
+        </p:spPr>
+        <p:style>
+          <a:lnRef idx="1">
+            <a:schemeClr val="accent1"/>
+          </a:lnRef>
+          <a:fillRef idx="3">
+            <a:schemeClr val="accent1"/>
+          </a:fillRef>
+          <a:effectRef idx="2">
+            <a:schemeClr val="accent1"/>
+          </a:effectRef>
+          <a:fontRef idx="minor">
+            <a:schemeClr val="lt1"/>
+          </a:fontRef>
+        </p:style>
+        <p:txBody>
+          <a:bodyPr rtlCol="0" anchor="ctr"/>
+          <a:lstStyle/>
+          <a:p>
+            <a:pPr algn="ctr"/>
+          </a:p>
+        </p:txBody>
+      </p:sp>
+      <p:sp>
+        <p:nvSpPr>
+          <p:cNvPr id="25" name="TextBox 24"/>
+          <p:cNvSpPr txBox="1"/>
+          <p:nvPr/>
+        </p:nvSpPr>
+        <p:spPr>
+          <a:xfrm>
+            <a:off x="914400" y="5614416"/>
+            <a:ext cx="10241280" cy="228600"/>
+          </a:xfrm>
+          <a:prstGeom prst="rect">
+            <a:avLst/>
+          </a:prstGeom>
+          <a:noFill/>
+        </p:spPr>
+        <p:txBody>
+          <a:bodyPr wrap="square" lIns="0" rIns="0" tIns="0" bIns="0" anchor="t">
+            <a:spAutoFit/>
+          </a:bodyPr>
+          <a:lstStyle/>
+          <a:p>
+            <a:pPr algn="ctr">
+              <a:spcBef>
+                <a:spcPts val="0"/>
+              </a:spcBef>
+              <a:spcAft>
+                <a:spcPts val="0"/>
+              </a:spcAft>
+            </a:pPr>
+            <a:r>
+              <a:rPr sz="1400" b="1" i="0">
+                <a:solidFill>
+                  <a:srgbClr val="F5F7F9"/>
+                </a:solidFill>
+                <a:latin typeface="Aptos"/>
+              </a:rPr>
+              <a:t>One competitive bid: the exact rival price worked; vague pressure did not.</a:t>
             </a:r>
           </a:p>
         </p:txBody>
@@ -3387,6 +6016,14 @@
 <file path=ppt/slides/slide3.xml><?xml version="1.0" encoding="utf-8"?>
 <p:sld xmlns:a="http://schemas.openxmlformats.org/drawingml/2006/main" xmlns:p="http://schemas.openxmlformats.org/presentationml/2006/main" xmlns:r="http://schemas.openxmlformats.org/officeDocument/2006/relationships">
   <p:cSld>
+    <p:bg>
+      <p:bgPr>
+        <a:solidFill>
+          <a:srgbClr val="0F1822"/>
+        </a:solidFill>
+        <a:effectLst/>
+      </p:bgPr>
+    </p:bg>
     <p:spTree>
       <p:nvGrpSpPr>
         <p:cNvPr id="1" name=""/>
@@ -3396,20 +6033,146 @@
       <p:grpSpPr/>
       <p:sp>
         <p:nvSpPr>
-          <p:cNvPr id="2" name="Rectangle 1"/>
+          <p:cNvPr id="2" name="TextBox 1"/>
+          <p:cNvSpPr txBox="1"/>
+          <p:nvPr/>
+        </p:nvSpPr>
+        <p:spPr>
+          <a:xfrm>
+            <a:off x="658368" y="384048"/>
+            <a:ext cx="7132320" cy="256032"/>
+          </a:xfrm>
+          <a:prstGeom prst="rect">
+            <a:avLst/>
+          </a:prstGeom>
+          <a:noFill/>
+        </p:spPr>
+        <p:txBody>
+          <a:bodyPr wrap="square" lIns="0" rIns="0" tIns="0" bIns="0" anchor="t">
+            <a:spAutoFit/>
+          </a:bodyPr>
+          <a:lstStyle/>
+          <a:p>
+            <a:pPr algn="l">
+              <a:spcBef>
+                <a:spcPts val="0"/>
+              </a:spcBef>
+              <a:spcAft>
+                <a:spcPts val="0"/>
+              </a:spcAft>
+            </a:pPr>
+            <a:r>
+              <a:rPr sz="1000" b="1" i="0">
+                <a:solidFill>
+                  <a:srgbClr val="A9EEC2"/>
+                </a:solidFill>
+                <a:latin typeface="Aptos"/>
+              </a:rPr>
+              <a:t>02  ·  TRADE THE WHOLE DEAL</a:t>
+            </a:r>
+          </a:p>
+        </p:txBody>
+      </p:sp>
+      <p:sp>
+        <p:nvSpPr>
+          <p:cNvPr id="3" name="TextBox 2"/>
+          <p:cNvSpPr txBox="1"/>
+          <p:nvPr/>
+        </p:nvSpPr>
+        <p:spPr>
+          <a:xfrm>
+            <a:off x="658368" y="749808"/>
+            <a:ext cx="10881360" cy="566928"/>
+          </a:xfrm>
+          <a:prstGeom prst="rect">
+            <a:avLst/>
+          </a:prstGeom>
+          <a:noFill/>
+        </p:spPr>
+        <p:txBody>
+          <a:bodyPr wrap="square" lIns="0" rIns="0" tIns="0" bIns="0" anchor="t">
+            <a:spAutoFit/>
+          </a:bodyPr>
+          <a:lstStyle/>
+          <a:p>
+            <a:pPr algn="l">
+              <a:spcBef>
+                <a:spcPts val="0"/>
+              </a:spcBef>
+              <a:spcAft>
+                <a:spcPts val="0"/>
+              </a:spcAft>
+            </a:pPr>
+            <a:r>
+              <a:rPr sz="3000" b="1" i="0">
+                <a:solidFill>
+                  <a:srgbClr val="F5F7F9"/>
+                </a:solidFill>
+                <a:latin typeface="Aptos"/>
+              </a:rPr>
+              <a:t>A good price is only part of a good deal.</a:t>
+            </a:r>
+          </a:p>
+        </p:txBody>
+      </p:sp>
+      <p:sp>
+        <p:nvSpPr>
+          <p:cNvPr id="4" name="TextBox 3"/>
+          <p:cNvSpPr txBox="1"/>
+          <p:nvPr/>
+        </p:nvSpPr>
+        <p:spPr>
+          <a:xfrm>
+            <a:off x="685800" y="1389888"/>
+            <a:ext cx="10698480" cy="438912"/>
+          </a:xfrm>
+          <a:prstGeom prst="rect">
+            <a:avLst/>
+          </a:prstGeom>
+          <a:noFill/>
+        </p:spPr>
+        <p:txBody>
+          <a:bodyPr wrap="square" lIns="0" rIns="0" tIns="0" bIns="0" anchor="t">
+            <a:spAutoFit/>
+          </a:bodyPr>
+          <a:lstStyle/>
+          <a:p>
+            <a:pPr algn="l">
+              <a:spcBef>
+                <a:spcPts val="0"/>
+              </a:spcBef>
+              <a:spcAft>
+                <a:spcPts val="0"/>
+              </a:spcAft>
+            </a:pPr>
+            <a:r>
+              <a:rPr sz="1600" b="0" i="0">
+                <a:solidFill>
+                  <a:srgbClr val="AEBCC6"/>
+                </a:solidFill>
+                <a:latin typeface="Aptos"/>
+              </a:rPr>
+              <a:t>Payment, delivery and quality can change what the offer is really worth.</a:t>
+            </a:r>
+          </a:p>
+        </p:txBody>
+      </p:sp>
+      <p:sp>
+        <p:nvSpPr>
+          <p:cNvPr id="5" name="Rectangle 4"/>
           <p:cNvSpPr/>
           <p:nvPr/>
         </p:nvSpPr>
         <p:spPr>
           <a:xfrm>
-            <a:off x="0" y="0"/>
-            <a:ext cx="12191695" cy="164592"/>
+            <a:off x="658368" y="6473952"/>
+            <a:ext cx="10881360" cy="32004"/>
           </a:xfrm>
           <a:prstGeom prst="rect">
             <a:avLst/>
           </a:prstGeom>
           <a:solidFill>
-            <a:srgbClr val="0F8B8D"/>
+            <a:srgbClr val="202F3B"/>
           </a:solidFill>
           <a:ln>
             <a:noFill/>
@@ -3439,14 +6202,57 @@
       </p:sp>
       <p:sp>
         <p:nvSpPr>
-          <p:cNvPr id="3" name="TextBox 2"/>
+          <p:cNvPr id="6" name="Rectangle 5"/>
+          <p:cNvSpPr/>
+          <p:nvPr/>
+        </p:nvSpPr>
+        <p:spPr>
+          <a:xfrm>
+            <a:off x="658368" y="6473952"/>
+            <a:ext cx="8161020" cy="32004"/>
+          </a:xfrm>
+          <a:prstGeom prst="rect">
+            <a:avLst/>
+          </a:prstGeom>
+          <a:solidFill>
+            <a:srgbClr val="A9EEC2"/>
+          </a:solidFill>
+          <a:ln>
+            <a:noFill/>
+          </a:ln>
+        </p:spPr>
+        <p:style>
+          <a:lnRef idx="1">
+            <a:schemeClr val="accent1"/>
+          </a:lnRef>
+          <a:fillRef idx="3">
+            <a:schemeClr val="accent1"/>
+          </a:fillRef>
+          <a:effectRef idx="2">
+            <a:schemeClr val="accent1"/>
+          </a:effectRef>
+          <a:fontRef idx="minor">
+            <a:schemeClr val="lt1"/>
+          </a:fontRef>
+        </p:style>
+        <p:txBody>
+          <a:bodyPr rtlCol="0" anchor="ctr"/>
+          <a:lstStyle/>
+          <a:p>
+            <a:pPr algn="ctr"/>
+          </a:p>
+        </p:txBody>
+      </p:sp>
+      <p:sp>
+        <p:nvSpPr>
+          <p:cNvPr id="7" name="TextBox 6"/>
           <p:cNvSpPr txBox="1"/>
           <p:nvPr/>
         </p:nvSpPr>
         <p:spPr>
           <a:xfrm>
-            <a:off x="548640" y="365760"/>
-            <a:ext cx="10972800" cy="914400"/>
+            <a:off x="658368" y="6547104"/>
+            <a:ext cx="8412480" cy="164592"/>
           </a:xfrm>
           <a:prstGeom prst="rect">
             <a:avLst/>
@@ -3454,46 +6260,41 @@
           <a:noFill/>
         </p:spPr>
         <p:txBody>
-          <a:bodyPr wrap="none">
+          <a:bodyPr wrap="square" lIns="0" rIns="0" tIns="0" bIns="0" anchor="t">
             <a:spAutoFit/>
           </a:bodyPr>
           <a:lstStyle/>
           <a:p>
-            <a:pPr>
-              <a:defRPr sz="3200" b="1">
+            <a:pPr algn="l">
+              <a:spcBef>
+                <a:spcPts val="0"/>
+              </a:spcBef>
+              <a:spcAft>
+                <a:spcPts val="0"/>
+              </a:spcAft>
+            </a:pPr>
+            <a:r>
+              <a:rPr sz="800" b="1" i="0">
                 <a:solidFill>
-                  <a:srgbClr val="14243B"/>
+                  <a:srgbClr val="AEBCC6"/>
                 </a:solidFill>
-              </a:defRPr>
-            </a:pPr>
-            <a:r>
-              <a:t>How NightHunter works</a:t>
-            </a:r>
-          </a:p>
-          <a:p>
-            <a:pPr>
-              <a:defRPr sz="1600">
-                <a:solidFill>
-                  <a:srgbClr val="555F6B"/>
-                </a:solidFill>
-              </a:defRPr>
-            </a:pPr>
-            <a:r>
-              <a:t>Every number is decided by code; the LLM only writes the framing</a:t>
-            </a:r>
-          </a:p>
-        </p:txBody>
-      </p:sp>
-      <p:sp>
-        <p:nvSpPr>
-          <p:cNvPr id="4" name="TextBox 3"/>
+                <a:latin typeface="Aptos"/>
+              </a:rPr>
+              <a:t>NIGHTHUNTER  ·  TACTO NEGOTIATION ARENA</a:t>
+            </a:r>
+          </a:p>
+        </p:txBody>
+      </p:sp>
+      <p:sp>
+        <p:nvSpPr>
+          <p:cNvPr id="8" name="TextBox 7"/>
           <p:cNvSpPr txBox="1"/>
           <p:nvPr/>
         </p:nvSpPr>
         <p:spPr>
           <a:xfrm>
-            <a:off x="640080" y="1463040"/>
-            <a:ext cx="10972800" cy="5029200"/>
+            <a:off x="10680192" y="6528816"/>
+            <a:ext cx="868680" cy="182880"/>
           </a:xfrm>
           <a:prstGeom prst="rect">
             <a:avLst/>
@@ -3501,113 +6302,1089 @@
           <a:noFill/>
         </p:spPr>
         <p:txBody>
-          <a:bodyPr wrap="square">
+          <a:bodyPr wrap="square" lIns="0" rIns="0" tIns="0" bIns="0" anchor="t">
             <a:spAutoFit/>
           </a:bodyPr>
           <a:lstStyle/>
           <a:p>
-            <a:pPr>
+            <a:pPr algn="r">
+              <a:spcBef>
+                <a:spcPts val="0"/>
+              </a:spcBef>
               <a:spcAft>
-                <a:spcPts val="800"/>
+                <a:spcPts val="0"/>
               </a:spcAft>
-              <a:defRPr sz="1700" b="1">
+            </a:pPr>
+            <a:r>
+              <a:rPr sz="900" b="1" i="0">
                 <a:solidFill>
-                  <a:srgbClr val="14243B"/>
+                  <a:srgbClr val="AEBCC6"/>
                 </a:solidFill>
-              </a:defRPr>
+                <a:latin typeface="Aptos"/>
+              </a:rPr>
+              <a:t>03 / 04</a:t>
+            </a:r>
+          </a:p>
+        </p:txBody>
+      </p:sp>
+      <p:sp>
+        <p:nvSpPr>
+          <p:cNvPr id="9" name="Rounded Rectangle 8"/>
+          <p:cNvSpPr/>
+          <p:nvPr/>
+        </p:nvSpPr>
+        <p:spPr>
+          <a:xfrm>
+            <a:off x="704088" y="2121408"/>
+            <a:ext cx="2084831" cy="713232"/>
+          </a:xfrm>
+          <a:prstGeom prst="roundRect">
+            <a:avLst/>
+          </a:prstGeom>
+          <a:solidFill>
+            <a:srgbClr val="1A2632"/>
+          </a:solidFill>
+          <a:ln>
+            <a:noFill/>
+          </a:ln>
+        </p:spPr>
+        <p:style>
+          <a:lnRef idx="1">
+            <a:schemeClr val="accent1"/>
+          </a:lnRef>
+          <a:fillRef idx="3">
+            <a:schemeClr val="accent1"/>
+          </a:fillRef>
+          <a:effectRef idx="2">
+            <a:schemeClr val="accent1"/>
+          </a:effectRef>
+          <a:fontRef idx="minor">
+            <a:schemeClr val="lt1"/>
+          </a:fontRef>
+        </p:style>
+        <p:txBody>
+          <a:bodyPr rtlCol="0" anchor="ctr"/>
+          <a:lstStyle/>
+          <a:p>
+            <a:pPr algn="ctr"/>
+          </a:p>
+        </p:txBody>
+      </p:sp>
+      <p:sp>
+        <p:nvSpPr>
+          <p:cNvPr id="10" name="TextBox 9"/>
+          <p:cNvSpPr txBox="1"/>
+          <p:nvPr/>
+        </p:nvSpPr>
+        <p:spPr>
+          <a:xfrm>
+            <a:off x="704088" y="2350008"/>
+            <a:ext cx="2084831" cy="182880"/>
+          </a:xfrm>
+          <a:prstGeom prst="rect">
+            <a:avLst/>
+          </a:prstGeom>
+          <a:noFill/>
+        </p:spPr>
+        <p:txBody>
+          <a:bodyPr wrap="square" lIns="0" rIns="0" tIns="0" bIns="0" anchor="t">
+            <a:spAutoFit/>
+          </a:bodyPr>
+          <a:lstStyle/>
+          <a:p>
+            <a:pPr algn="ctr">
+              <a:spcBef>
+                <a:spcPts val="0"/>
+              </a:spcBef>
+              <a:spcAft>
+                <a:spcPts val="0"/>
+              </a:spcAft>
             </a:pPr>
             <a:r>
-              <a:t>• 1 Dossier:** source-linked facts from the data package and the Sunday release</a:t>
-            </a:r>
-          </a:p>
-          <a:p>
-            <a:pPr>
+              <a:rPr sz="1300" b="1" i="0">
+                <a:solidFill>
+                  <a:srgbClr val="A9EEC2"/>
+                </a:solidFill>
+                <a:latin typeface="Aptos"/>
+              </a:rPr>
+              <a:t>PRICE</a:t>
+            </a:r>
+          </a:p>
+        </p:txBody>
+      </p:sp>
+      <p:sp>
+        <p:nvSpPr>
+          <p:cNvPr id="11" name="TextBox 10"/>
+          <p:cNvSpPr txBox="1"/>
+          <p:nvPr/>
+        </p:nvSpPr>
+        <p:spPr>
+          <a:xfrm>
+            <a:off x="2816352" y="2322576"/>
+            <a:ext cx="310896" cy="219456"/>
+          </a:xfrm>
+          <a:prstGeom prst="rect">
+            <a:avLst/>
+          </a:prstGeom>
+          <a:noFill/>
+        </p:spPr>
+        <p:txBody>
+          <a:bodyPr wrap="square" lIns="0" rIns="0" tIns="0" bIns="0" anchor="t">
+            <a:spAutoFit/>
+          </a:bodyPr>
+          <a:lstStyle/>
+          <a:p>
+            <a:pPr algn="ctr">
+              <a:spcBef>
+                <a:spcPts val="0"/>
+              </a:spcBef>
               <a:spcAft>
-                <a:spcPts val="800"/>
+                <a:spcPts val="0"/>
               </a:spcAft>
-              <a:defRPr sz="1700" b="1">
+            </a:pPr>
+            <a:r>
+              <a:rPr sz="1800" b="1" i="0">
                 <a:solidFill>
-                  <a:srgbClr val="14243B"/>
+                  <a:srgbClr val="AEBCC6"/>
                 </a:solidFill>
-              </a:defRPr>
+                <a:latin typeface="Aptos"/>
+              </a:rPr>
+              <a:t>+</a:t>
+            </a:r>
+          </a:p>
+        </p:txBody>
+      </p:sp>
+      <p:sp>
+        <p:nvSpPr>
+          <p:cNvPr id="12" name="Rounded Rectangle 11"/>
+          <p:cNvSpPr/>
+          <p:nvPr/>
+        </p:nvSpPr>
+        <p:spPr>
+          <a:xfrm>
+            <a:off x="3136392" y="2121408"/>
+            <a:ext cx="2084831" cy="713232"/>
+          </a:xfrm>
+          <a:prstGeom prst="roundRect">
+            <a:avLst/>
+          </a:prstGeom>
+          <a:solidFill>
+            <a:srgbClr val="1A2632"/>
+          </a:solidFill>
+          <a:ln>
+            <a:noFill/>
+          </a:ln>
+        </p:spPr>
+        <p:style>
+          <a:lnRef idx="1">
+            <a:schemeClr val="accent1"/>
+          </a:lnRef>
+          <a:fillRef idx="3">
+            <a:schemeClr val="accent1"/>
+          </a:fillRef>
+          <a:effectRef idx="2">
+            <a:schemeClr val="accent1"/>
+          </a:effectRef>
+          <a:fontRef idx="minor">
+            <a:schemeClr val="lt1"/>
+          </a:fontRef>
+        </p:style>
+        <p:txBody>
+          <a:bodyPr rtlCol="0" anchor="ctr"/>
+          <a:lstStyle/>
+          <a:p>
+            <a:pPr algn="ctr"/>
+          </a:p>
+        </p:txBody>
+      </p:sp>
+      <p:sp>
+        <p:nvSpPr>
+          <p:cNvPr id="13" name="TextBox 12"/>
+          <p:cNvSpPr txBox="1"/>
+          <p:nvPr/>
+        </p:nvSpPr>
+        <p:spPr>
+          <a:xfrm>
+            <a:off x="3136392" y="2350008"/>
+            <a:ext cx="2084831" cy="182880"/>
+          </a:xfrm>
+          <a:prstGeom prst="rect">
+            <a:avLst/>
+          </a:prstGeom>
+          <a:noFill/>
+        </p:spPr>
+        <p:txBody>
+          <a:bodyPr wrap="square" lIns="0" rIns="0" tIns="0" bIns="0" anchor="t">
+            <a:spAutoFit/>
+          </a:bodyPr>
+          <a:lstStyle/>
+          <a:p>
+            <a:pPr algn="ctr">
+              <a:spcBef>
+                <a:spcPts val="0"/>
+              </a:spcBef>
+              <a:spcAft>
+                <a:spcPts val="0"/>
+              </a:spcAft>
             </a:pPr>
             <a:r>
-              <a:t>• 2 Supplier read:** approval thresholds, price freezes, cash needs, contract notice, quality record, what it says in the thread</a:t>
-            </a:r>
-          </a:p>
-          <a:p>
-            <a:pPr>
+              <a:rPr sz="1300" b="1" i="0">
+                <a:solidFill>
+                  <a:srgbClr val="77C9E8"/>
+                </a:solidFill>
+                <a:latin typeface="Aptos"/>
+              </a:rPr>
+              <a:t>PAYMENT</a:t>
+            </a:r>
+          </a:p>
+        </p:txBody>
+      </p:sp>
+      <p:sp>
+        <p:nvSpPr>
+          <p:cNvPr id="14" name="TextBox 13"/>
+          <p:cNvSpPr txBox="1"/>
+          <p:nvPr/>
+        </p:nvSpPr>
+        <p:spPr>
+          <a:xfrm>
+            <a:off x="5248656" y="2322576"/>
+            <a:ext cx="310896" cy="219456"/>
+          </a:xfrm>
+          <a:prstGeom prst="rect">
+            <a:avLst/>
+          </a:prstGeom>
+          <a:noFill/>
+        </p:spPr>
+        <p:txBody>
+          <a:bodyPr wrap="square" lIns="0" rIns="0" tIns="0" bIns="0" anchor="t">
+            <a:spAutoFit/>
+          </a:bodyPr>
+          <a:lstStyle/>
+          <a:p>
+            <a:pPr algn="ctr">
+              <a:spcBef>
+                <a:spcPts val="0"/>
+              </a:spcBef>
               <a:spcAft>
-                <a:spcPts val="800"/>
+                <a:spcPts val="0"/>
               </a:spcAft>
-              <a:defRPr sz="1700" b="1">
+            </a:pPr>
+            <a:r>
+              <a:rPr sz="1800" b="1" i="0">
                 <a:solidFill>
-                  <a:srgbClr val="14243B"/>
+                  <a:srgbClr val="AEBCC6"/>
                 </a:solidFill>
-              </a:defRPr>
+                <a:latin typeface="Aptos"/>
+              </a:rPr>
+              <a:t>+</a:t>
+            </a:r>
+          </a:p>
+        </p:txBody>
+      </p:sp>
+      <p:sp>
+        <p:nvSpPr>
+          <p:cNvPr id="15" name="Rounded Rectangle 14"/>
+          <p:cNvSpPr/>
+          <p:nvPr/>
+        </p:nvSpPr>
+        <p:spPr>
+          <a:xfrm>
+            <a:off x="5568696" y="2121408"/>
+            <a:ext cx="2084831" cy="713232"/>
+          </a:xfrm>
+          <a:prstGeom prst="roundRect">
+            <a:avLst/>
+          </a:prstGeom>
+          <a:solidFill>
+            <a:srgbClr val="1A2632"/>
+          </a:solidFill>
+          <a:ln>
+            <a:noFill/>
+          </a:ln>
+        </p:spPr>
+        <p:style>
+          <a:lnRef idx="1">
+            <a:schemeClr val="accent1"/>
+          </a:lnRef>
+          <a:fillRef idx="3">
+            <a:schemeClr val="accent1"/>
+          </a:fillRef>
+          <a:effectRef idx="2">
+            <a:schemeClr val="accent1"/>
+          </a:effectRef>
+          <a:fontRef idx="minor">
+            <a:schemeClr val="lt1"/>
+          </a:fontRef>
+        </p:style>
+        <p:txBody>
+          <a:bodyPr rtlCol="0" anchor="ctr"/>
+          <a:lstStyle/>
+          <a:p>
+            <a:pPr algn="ctr"/>
+          </a:p>
+        </p:txBody>
+      </p:sp>
+      <p:sp>
+        <p:nvSpPr>
+          <p:cNvPr id="16" name="TextBox 15"/>
+          <p:cNvSpPr txBox="1"/>
+          <p:nvPr/>
+        </p:nvSpPr>
+        <p:spPr>
+          <a:xfrm>
+            <a:off x="5568696" y="2350008"/>
+            <a:ext cx="2084831" cy="182880"/>
+          </a:xfrm>
+          <a:prstGeom prst="rect">
+            <a:avLst/>
+          </a:prstGeom>
+          <a:noFill/>
+        </p:spPr>
+        <p:txBody>
+          <a:bodyPr wrap="square" lIns="0" rIns="0" tIns="0" bIns="0" anchor="t">
+            <a:spAutoFit/>
+          </a:bodyPr>
+          <a:lstStyle/>
+          <a:p>
+            <a:pPr algn="ctr">
+              <a:spcBef>
+                <a:spcPts val="0"/>
+              </a:spcBef>
+              <a:spcAft>
+                <a:spcPts val="0"/>
+              </a:spcAft>
             </a:pPr>
             <a:r>
-              <a:t>• 3 Planner:** every term priced in € with the official cost function, 2–3 equal-cost options most attractive to the supplier, goal-based opening, reciprocal concessions</a:t>
-            </a:r>
-          </a:p>
-          <a:p>
-            <a:pPr>
+              <a:rPr sz="1300" b="1" i="0">
+                <a:solidFill>
+                  <a:srgbClr val="FFBE70"/>
+                </a:solidFill>
+                <a:latin typeface="Aptos"/>
+              </a:rPr>
+              <a:t>DELIVERY</a:t>
+            </a:r>
+          </a:p>
+        </p:txBody>
+      </p:sp>
+      <p:sp>
+        <p:nvSpPr>
+          <p:cNvPr id="17" name="TextBox 16"/>
+          <p:cNvSpPr txBox="1"/>
+          <p:nvPr/>
+        </p:nvSpPr>
+        <p:spPr>
+          <a:xfrm>
+            <a:off x="7680960" y="2322576"/>
+            <a:ext cx="310896" cy="219456"/>
+          </a:xfrm>
+          <a:prstGeom prst="rect">
+            <a:avLst/>
+          </a:prstGeom>
+          <a:noFill/>
+        </p:spPr>
+        <p:txBody>
+          <a:bodyPr wrap="square" lIns="0" rIns="0" tIns="0" bIns="0" anchor="t">
+            <a:spAutoFit/>
+          </a:bodyPr>
+          <a:lstStyle/>
+          <a:p>
+            <a:pPr algn="ctr">
+              <a:spcBef>
+                <a:spcPts val="0"/>
+              </a:spcBef>
               <a:spcAft>
-                <a:spcPts val="800"/>
+                <a:spcPts val="0"/>
               </a:spcAft>
-              <a:defRPr sz="1700" b="1">
+            </a:pPr>
+            <a:r>
+              <a:rPr sz="1800" b="1" i="0">
                 <a:solidFill>
-                  <a:srgbClr val="14243B"/>
+                  <a:srgbClr val="AEBCC6"/>
                 </a:solidFill>
-              </a:defRPr>
+                <a:latin typeface="Aptos"/>
+              </a:rPr>
+              <a:t>+</a:t>
+            </a:r>
+          </a:p>
+        </p:txBody>
+      </p:sp>
+      <p:sp>
+        <p:nvSpPr>
+          <p:cNvPr id="18" name="Rounded Rectangle 17"/>
+          <p:cNvSpPr/>
+          <p:nvPr/>
+        </p:nvSpPr>
+        <p:spPr>
+          <a:xfrm>
+            <a:off x="8001000" y="2121408"/>
+            <a:ext cx="2084831" cy="713232"/>
+          </a:xfrm>
+          <a:prstGeom prst="roundRect">
+            <a:avLst/>
+          </a:prstGeom>
+          <a:solidFill>
+            <a:srgbClr val="1A2632"/>
+          </a:solidFill>
+          <a:ln>
+            <a:noFill/>
+          </a:ln>
+        </p:spPr>
+        <p:style>
+          <a:lnRef idx="1">
+            <a:schemeClr val="accent1"/>
+          </a:lnRef>
+          <a:fillRef idx="3">
+            <a:schemeClr val="accent1"/>
+          </a:fillRef>
+          <a:effectRef idx="2">
+            <a:schemeClr val="accent1"/>
+          </a:effectRef>
+          <a:fontRef idx="minor">
+            <a:schemeClr val="lt1"/>
+          </a:fontRef>
+        </p:style>
+        <p:txBody>
+          <a:bodyPr rtlCol="0" anchor="ctr"/>
+          <a:lstStyle/>
+          <a:p>
+            <a:pPr algn="ctr"/>
+          </a:p>
+        </p:txBody>
+      </p:sp>
+      <p:sp>
+        <p:nvSpPr>
+          <p:cNvPr id="19" name="TextBox 18"/>
+          <p:cNvSpPr txBox="1"/>
+          <p:nvPr/>
+        </p:nvSpPr>
+        <p:spPr>
+          <a:xfrm>
+            <a:off x="8001000" y="2350008"/>
+            <a:ext cx="2084831" cy="182880"/>
+          </a:xfrm>
+          <a:prstGeom prst="rect">
+            <a:avLst/>
+          </a:prstGeom>
+          <a:noFill/>
+        </p:spPr>
+        <p:txBody>
+          <a:bodyPr wrap="square" lIns="0" rIns="0" tIns="0" bIns="0" anchor="t">
+            <a:spAutoFit/>
+          </a:bodyPr>
+          <a:lstStyle/>
+          <a:p>
+            <a:pPr algn="ctr">
+              <a:spcBef>
+                <a:spcPts val="0"/>
+              </a:spcBef>
+              <a:spcAft>
+                <a:spcPts val="0"/>
+              </a:spcAft>
             </a:pPr>
             <a:r>
-              <a:t>• 4 Arguments:** one checked fact per argument, a new fact each round, direct answers to the supplier's questions</a:t>
-            </a:r>
-          </a:p>
-          <a:p>
-            <a:pPr>
+              <a:rPr sz="1300" b="1" i="0">
+                <a:solidFill>
+                  <a:srgbClr val="A9EEC2"/>
+                </a:solidFill>
+                <a:latin typeface="Aptos"/>
+              </a:rPr>
+              <a:t>QUALITY</a:t>
+            </a:r>
+          </a:p>
+        </p:txBody>
+      </p:sp>
+      <p:sp>
+        <p:nvSpPr>
+          <p:cNvPr id="20" name="Rounded Rectangle 19"/>
+          <p:cNvSpPr/>
+          <p:nvPr/>
+        </p:nvSpPr>
+        <p:spPr>
+          <a:xfrm>
+            <a:off x="10469880" y="2121408"/>
+            <a:ext cx="1005840" cy="713232"/>
+          </a:xfrm>
+          <a:prstGeom prst="roundRect">
+            <a:avLst/>
+          </a:prstGeom>
+          <a:solidFill>
+            <a:srgbClr val="A9EEC2"/>
+          </a:solidFill>
+          <a:ln>
+            <a:noFill/>
+          </a:ln>
+        </p:spPr>
+        <p:style>
+          <a:lnRef idx="1">
+            <a:schemeClr val="accent1"/>
+          </a:lnRef>
+          <a:fillRef idx="3">
+            <a:schemeClr val="accent1"/>
+          </a:fillRef>
+          <a:effectRef idx="2">
+            <a:schemeClr val="accent1"/>
+          </a:effectRef>
+          <a:fontRef idx="minor">
+            <a:schemeClr val="lt1"/>
+          </a:fontRef>
+        </p:style>
+        <p:txBody>
+          <a:bodyPr rtlCol="0" anchor="ctr"/>
+          <a:lstStyle/>
+          <a:p>
+            <a:pPr algn="ctr"/>
+          </a:p>
+        </p:txBody>
+      </p:sp>
+      <p:sp>
+        <p:nvSpPr>
+          <p:cNvPr id="21" name="TextBox 20"/>
+          <p:cNvSpPr txBox="1"/>
+          <p:nvPr/>
+        </p:nvSpPr>
+        <p:spPr>
+          <a:xfrm>
+            <a:off x="10469880" y="2286000"/>
+            <a:ext cx="1005840" cy="338328"/>
+          </a:xfrm>
+          <a:prstGeom prst="rect">
+            <a:avLst/>
+          </a:prstGeom>
+          <a:noFill/>
+        </p:spPr>
+        <p:txBody>
+          <a:bodyPr wrap="square" lIns="0" rIns="0" tIns="0" bIns="0" anchor="ctr">
+            <a:spAutoFit/>
+          </a:bodyPr>
+          <a:lstStyle/>
+          <a:p>
+            <a:pPr algn="ctr">
+              <a:spcBef>
+                <a:spcPts val="0"/>
+              </a:spcBef>
               <a:spcAft>
-                <a:spcPts val="800"/>
+                <a:spcPts val="0"/>
               </a:spcAft>
-              <a:defRPr sz="1700" b="1">
+            </a:pPr>
+            <a:r>
+              <a:rPr sz="1000" b="1" i="0">
                 <a:solidFill>
-                  <a:srgbClr val="14243B"/>
+                  <a:srgbClr val="0C141C"/>
                 </a:solidFill>
-              </a:defRPr>
+                <a:latin typeface="Aptos"/>
+              </a:rPr>
+              <a:t>TOTAL
+VALUE</a:t>
+            </a:r>
+          </a:p>
+        </p:txBody>
+      </p:sp>
+      <p:sp>
+        <p:nvSpPr>
+          <p:cNvPr id="22" name="Rounded Rectangle 21"/>
+          <p:cNvSpPr/>
+          <p:nvPr/>
+        </p:nvSpPr>
+        <p:spPr>
+          <a:xfrm>
+            <a:off x="704088" y="3429000"/>
+            <a:ext cx="3401568" cy="1874519"/>
+          </a:xfrm>
+          <a:prstGeom prst="roundRect">
+            <a:avLst/>
+          </a:prstGeom>
+          <a:solidFill>
+            <a:srgbClr val="1A2632"/>
+          </a:solidFill>
+          <a:ln>
+            <a:noFill/>
+          </a:ln>
+        </p:spPr>
+        <p:style>
+          <a:lnRef idx="1">
+            <a:schemeClr val="accent1"/>
+          </a:lnRef>
+          <a:fillRef idx="3">
+            <a:schemeClr val="accent1"/>
+          </a:fillRef>
+          <a:effectRef idx="2">
+            <a:schemeClr val="accent1"/>
+          </a:effectRef>
+          <a:fontRef idx="minor">
+            <a:schemeClr val="lt1"/>
+          </a:fontRef>
+        </p:style>
+        <p:txBody>
+          <a:bodyPr rtlCol="0" anchor="ctr"/>
+          <a:lstStyle/>
+          <a:p>
+            <a:pPr algn="ctr"/>
+          </a:p>
+        </p:txBody>
+      </p:sp>
+      <p:sp>
+        <p:nvSpPr>
+          <p:cNvPr id="23" name="Oval 22"/>
+          <p:cNvSpPr/>
+          <p:nvPr/>
+        </p:nvSpPr>
+        <p:spPr>
+          <a:xfrm>
+            <a:off x="923544" y="3666744"/>
+            <a:ext cx="384048" cy="384048"/>
+          </a:xfrm>
+          <a:prstGeom prst="ellipse">
+            <a:avLst/>
+          </a:prstGeom>
+          <a:solidFill>
+            <a:srgbClr val="A9EEC2"/>
+          </a:solidFill>
+          <a:ln>
+            <a:noFill/>
+          </a:ln>
+        </p:spPr>
+        <p:style>
+          <a:lnRef idx="1">
+            <a:schemeClr val="accent1"/>
+          </a:lnRef>
+          <a:fillRef idx="3">
+            <a:schemeClr val="accent1"/>
+          </a:fillRef>
+          <a:effectRef idx="2">
+            <a:schemeClr val="accent1"/>
+          </a:effectRef>
+          <a:fontRef idx="minor">
+            <a:schemeClr val="lt1"/>
+          </a:fontRef>
+        </p:style>
+        <p:txBody>
+          <a:bodyPr rtlCol="0" anchor="ctr"/>
+          <a:lstStyle/>
+          <a:p>
+            <a:pPr algn="ctr"/>
+          </a:p>
+        </p:txBody>
+      </p:sp>
+      <p:sp>
+        <p:nvSpPr>
+          <p:cNvPr id="24" name="TextBox 23"/>
+          <p:cNvSpPr txBox="1"/>
+          <p:nvPr/>
+        </p:nvSpPr>
+        <p:spPr>
+          <a:xfrm>
+            <a:off x="1453895" y="3712463"/>
+            <a:ext cx="2359152" cy="210312"/>
+          </a:xfrm>
+          <a:prstGeom prst="rect">
+            <a:avLst/>
+          </a:prstGeom>
+          <a:noFill/>
+        </p:spPr>
+        <p:txBody>
+          <a:bodyPr wrap="square" lIns="0" rIns="0" tIns="0" bIns="0" anchor="t">
+            <a:spAutoFit/>
+          </a:bodyPr>
+          <a:lstStyle/>
+          <a:p>
+            <a:pPr algn="l">
+              <a:spcBef>
+                <a:spcPts val="0"/>
+              </a:spcBef>
+              <a:spcAft>
+                <a:spcPts val="0"/>
+              </a:spcAft>
             </a:pPr>
             <a:r>
-              <a:t>• 5 E-mail:** gpt-5.6-luna writes the framing; a filter blocks invented numbers, threats and promises</a:t>
-            </a:r>
-          </a:p>
-          <a:p>
-            <a:pPr>
+              <a:rPr sz="1000" b="1" i="0">
+                <a:solidFill>
+                  <a:srgbClr val="A9EEC2"/>
+                </a:solidFill>
+                <a:latin typeface="Aptos"/>
+              </a:rPr>
+              <a:t>GIVE OPTIONS</a:t>
+            </a:r>
+          </a:p>
+        </p:txBody>
+      </p:sp>
+      <p:sp>
+        <p:nvSpPr>
+          <p:cNvPr id="25" name="TextBox 24"/>
+          <p:cNvSpPr txBox="1"/>
+          <p:nvPr/>
+        </p:nvSpPr>
+        <p:spPr>
+          <a:xfrm>
+            <a:off x="932688" y="4270248"/>
+            <a:ext cx="2926080" cy="713232"/>
+          </a:xfrm>
+          <a:prstGeom prst="rect">
+            <a:avLst/>
+          </a:prstGeom>
+          <a:noFill/>
+        </p:spPr>
+        <p:txBody>
+          <a:bodyPr wrap="square" lIns="0" rIns="0" tIns="0" bIns="0" anchor="t">
+            <a:spAutoFit/>
+          </a:bodyPr>
+          <a:lstStyle/>
+          <a:p>
+            <a:pPr algn="l">
+              <a:spcBef>
+                <a:spcPts val="0"/>
+              </a:spcBef>
               <a:spcAft>
-                <a:spcPts val="800"/>
+                <a:spcPts val="0"/>
               </a:spcAft>
-              <a:defRPr sz="1700" b="1">
+            </a:pPr>
+            <a:r>
+              <a:rPr sz="1500" b="1" i="0">
                 <a:solidFill>
-                  <a:srgbClr val="14243B"/>
+                  <a:srgbClr val="F5F7F9"/>
                 </a:solidFill>
-              </a:defRPr>
+                <a:latin typeface="Aptos"/>
+              </a:rPr>
+              <a:t>Give a few offers with different trade-offs, each still good for us.</a:t>
+            </a:r>
+          </a:p>
+        </p:txBody>
+      </p:sp>
+      <p:sp>
+        <p:nvSpPr>
+          <p:cNvPr id="26" name="Rounded Rectangle 25"/>
+          <p:cNvSpPr/>
+          <p:nvPr/>
+        </p:nvSpPr>
+        <p:spPr>
+          <a:xfrm>
+            <a:off x="4389120" y="3429000"/>
+            <a:ext cx="3401568" cy="1874519"/>
+          </a:xfrm>
+          <a:prstGeom prst="roundRect">
+            <a:avLst/>
+          </a:prstGeom>
+          <a:solidFill>
+            <a:srgbClr val="1A2632"/>
+          </a:solidFill>
+          <a:ln>
+            <a:noFill/>
+          </a:ln>
+        </p:spPr>
+        <p:style>
+          <a:lnRef idx="1">
+            <a:schemeClr val="accent1"/>
+          </a:lnRef>
+          <a:fillRef idx="3">
+            <a:schemeClr val="accent1"/>
+          </a:fillRef>
+          <a:effectRef idx="2">
+            <a:schemeClr val="accent1"/>
+          </a:effectRef>
+          <a:fontRef idx="minor">
+            <a:schemeClr val="lt1"/>
+          </a:fontRef>
+        </p:style>
+        <p:txBody>
+          <a:bodyPr rtlCol="0" anchor="ctr"/>
+          <a:lstStyle/>
+          <a:p>
+            <a:pPr algn="ctr"/>
+          </a:p>
+        </p:txBody>
+      </p:sp>
+      <p:sp>
+        <p:nvSpPr>
+          <p:cNvPr id="27" name="Oval 26"/>
+          <p:cNvSpPr/>
+          <p:nvPr/>
+        </p:nvSpPr>
+        <p:spPr>
+          <a:xfrm>
+            <a:off x="4608576" y="3666744"/>
+            <a:ext cx="384048" cy="384048"/>
+          </a:xfrm>
+          <a:prstGeom prst="ellipse">
+            <a:avLst/>
+          </a:prstGeom>
+          <a:solidFill>
+            <a:srgbClr val="77C9E8"/>
+          </a:solidFill>
+          <a:ln>
+            <a:noFill/>
+          </a:ln>
+        </p:spPr>
+        <p:style>
+          <a:lnRef idx="1">
+            <a:schemeClr val="accent1"/>
+          </a:lnRef>
+          <a:fillRef idx="3">
+            <a:schemeClr val="accent1"/>
+          </a:fillRef>
+          <a:effectRef idx="2">
+            <a:schemeClr val="accent1"/>
+          </a:effectRef>
+          <a:fontRef idx="minor">
+            <a:schemeClr val="lt1"/>
+          </a:fontRef>
+        </p:style>
+        <p:txBody>
+          <a:bodyPr rtlCol="0" anchor="ctr"/>
+          <a:lstStyle/>
+          <a:p>
+            <a:pPr algn="ctr"/>
+          </a:p>
+        </p:txBody>
+      </p:sp>
+      <p:sp>
+        <p:nvSpPr>
+          <p:cNvPr id="28" name="TextBox 27"/>
+          <p:cNvSpPr txBox="1"/>
+          <p:nvPr/>
+        </p:nvSpPr>
+        <p:spPr>
+          <a:xfrm>
+            <a:off x="5138928" y="3712463"/>
+            <a:ext cx="2359152" cy="210312"/>
+          </a:xfrm>
+          <a:prstGeom prst="rect">
+            <a:avLst/>
+          </a:prstGeom>
+          <a:noFill/>
+        </p:spPr>
+        <p:txBody>
+          <a:bodyPr wrap="square" lIns="0" rIns="0" tIns="0" bIns="0" anchor="t">
+            <a:spAutoFit/>
+          </a:bodyPr>
+          <a:lstStyle/>
+          <a:p>
+            <a:pPr algn="l">
+              <a:spcBef>
+                <a:spcPts val="0"/>
+              </a:spcBef>
+              <a:spcAft>
+                <a:spcPts val="0"/>
+              </a:spcAft>
             </a:pPr>
             <a:r>
-              <a:t>• 6 Close:** accept only a must-have-compliant primary sheet that beats the alternative; take a good final offer</a:t>
-            </a:r>
-          </a:p>
-          <a:p>
-            <a:pPr>
+              <a:rPr sz="1000" b="1" i="0">
+                <a:solidFill>
+                  <a:srgbClr val="77C9E8"/>
+                </a:solidFill>
+                <a:latin typeface="Aptos"/>
+              </a:rPr>
+              <a:t>USE A VERIFIED DETAIL</a:t>
+            </a:r>
+          </a:p>
+        </p:txBody>
+      </p:sp>
+      <p:sp>
+        <p:nvSpPr>
+          <p:cNvPr id="29" name="TextBox 28"/>
+          <p:cNvSpPr txBox="1"/>
+          <p:nvPr/>
+        </p:nvSpPr>
+        <p:spPr>
+          <a:xfrm>
+            <a:off x="4617720" y="4270248"/>
+            <a:ext cx="2926080" cy="713232"/>
+          </a:xfrm>
+          <a:prstGeom prst="rect">
+            <a:avLst/>
+          </a:prstGeom>
+          <a:noFill/>
+        </p:spPr>
+        <p:txBody>
+          <a:bodyPr wrap="square" lIns="0" rIns="0" tIns="0" bIns="0" anchor="t">
+            <a:spAutoFit/>
+          </a:bodyPr>
+          <a:lstStyle/>
+          <a:p>
+            <a:pPr algn="l">
+              <a:spcBef>
+                <a:spcPts val="0"/>
+              </a:spcBef>
               <a:spcAft>
-                <a:spcPts val="800"/>
+                <a:spcPts val="0"/>
               </a:spcAft>
-              <a:defRPr sz="1700" b="0">
+            </a:pPr>
+            <a:r>
+              <a:rPr sz="1500" b="1" i="0">
                 <a:solidFill>
-                  <a:srgbClr val="14243B"/>
+                  <a:srgbClr val="F5F7F9"/>
                 </a:solidFill>
-              </a:defRPr>
+                <a:latin typeface="Aptos"/>
+              </a:rPr>
+              <a:t>Support the ask with one fact; answer questions with specific numbers.</a:t>
+            </a:r>
+          </a:p>
+        </p:txBody>
+      </p:sp>
+      <p:sp>
+        <p:nvSpPr>
+          <p:cNvPr id="30" name="Rounded Rectangle 29"/>
+          <p:cNvSpPr/>
+          <p:nvPr/>
+        </p:nvSpPr>
+        <p:spPr>
+          <a:xfrm>
+            <a:off x="8074152" y="3429000"/>
+            <a:ext cx="3401568" cy="1874519"/>
+          </a:xfrm>
+          <a:prstGeom prst="roundRect">
+            <a:avLst/>
+          </a:prstGeom>
+          <a:solidFill>
+            <a:srgbClr val="1A2632"/>
+          </a:solidFill>
+          <a:ln>
+            <a:noFill/>
+          </a:ln>
+        </p:spPr>
+        <p:style>
+          <a:lnRef idx="1">
+            <a:schemeClr val="accent1"/>
+          </a:lnRef>
+          <a:fillRef idx="3">
+            <a:schemeClr val="accent1"/>
+          </a:fillRef>
+          <a:effectRef idx="2">
+            <a:schemeClr val="accent1"/>
+          </a:effectRef>
+          <a:fontRef idx="minor">
+            <a:schemeClr val="lt1"/>
+          </a:fontRef>
+        </p:style>
+        <p:txBody>
+          <a:bodyPr rtlCol="0" anchor="ctr"/>
+          <a:lstStyle/>
+          <a:p>
+            <a:pPr algn="ctr"/>
+          </a:p>
+        </p:txBody>
+      </p:sp>
+      <p:sp>
+        <p:nvSpPr>
+          <p:cNvPr id="31" name="Oval 30"/>
+          <p:cNvSpPr/>
+          <p:nvPr/>
+        </p:nvSpPr>
+        <p:spPr>
+          <a:xfrm>
+            <a:off x="8293608" y="3666744"/>
+            <a:ext cx="384048" cy="384048"/>
+          </a:xfrm>
+          <a:prstGeom prst="ellipse">
+            <a:avLst/>
+          </a:prstGeom>
+          <a:solidFill>
+            <a:srgbClr val="FFBE70"/>
+          </a:solidFill>
+          <a:ln>
+            <a:noFill/>
+          </a:ln>
+        </p:spPr>
+        <p:style>
+          <a:lnRef idx="1">
+            <a:schemeClr val="accent1"/>
+          </a:lnRef>
+          <a:fillRef idx="3">
+            <a:schemeClr val="accent1"/>
+          </a:fillRef>
+          <a:effectRef idx="2">
+            <a:schemeClr val="accent1"/>
+          </a:effectRef>
+          <a:fontRef idx="minor">
+            <a:schemeClr val="lt1"/>
+          </a:fontRef>
+        </p:style>
+        <p:txBody>
+          <a:bodyPr rtlCol="0" anchor="ctr"/>
+          <a:lstStyle/>
+          <a:p>
+            <a:pPr algn="ctr"/>
+          </a:p>
+        </p:txBody>
+      </p:sp>
+      <p:sp>
+        <p:nvSpPr>
+          <p:cNvPr id="32" name="TextBox 31"/>
+          <p:cNvSpPr txBox="1"/>
+          <p:nvPr/>
+        </p:nvSpPr>
+        <p:spPr>
+          <a:xfrm>
+            <a:off x="8823960" y="3712463"/>
+            <a:ext cx="2359152" cy="210312"/>
+          </a:xfrm>
+          <a:prstGeom prst="rect">
+            <a:avLst/>
+          </a:prstGeom>
+          <a:noFill/>
+        </p:spPr>
+        <p:txBody>
+          <a:bodyPr wrap="square" lIns="0" rIns="0" tIns="0" bIns="0" anchor="t">
+            <a:spAutoFit/>
+          </a:bodyPr>
+          <a:lstStyle/>
+          <a:p>
+            <a:pPr algn="l">
+              <a:spcBef>
+                <a:spcPts val="0"/>
+              </a:spcBef>
+              <a:spcAft>
+                <a:spcPts val="0"/>
+              </a:spcAft>
             </a:pPr>
             <a:r>
-              <a:t>• RFQ: one worker per bidder, best rival bid cited, a single safe close</a:t>
+              <a:rPr sz="1000" b="1" i="0">
+                <a:solidFill>
+                  <a:srgbClr val="FFBE70"/>
+                </a:solidFill>
+                <a:latin typeface="Aptos"/>
+              </a:rPr>
+              <a:t>MOVE WITH PURPOSE</a:t>
+            </a:r>
+          </a:p>
+        </p:txBody>
+      </p:sp>
+      <p:sp>
+        <p:nvSpPr>
+          <p:cNvPr id="33" name="TextBox 32"/>
+          <p:cNvSpPr txBox="1"/>
+          <p:nvPr/>
+        </p:nvSpPr>
+        <p:spPr>
+          <a:xfrm>
+            <a:off x="8302752" y="4270248"/>
+            <a:ext cx="2926080" cy="713232"/>
+          </a:xfrm>
+          <a:prstGeom prst="rect">
+            <a:avLst/>
+          </a:prstGeom>
+          <a:noFill/>
+        </p:spPr>
+        <p:txBody>
+          <a:bodyPr wrap="square" lIns="0" rIns="0" tIns="0" bIns="0" anchor="t">
+            <a:spAutoFit/>
+          </a:bodyPr>
+          <a:lstStyle/>
+          <a:p>
+            <a:pPr algn="l">
+              <a:spcBef>
+                <a:spcPts val="0"/>
+              </a:spcBef>
+              <a:spcAft>
+                <a:spcPts val="0"/>
+              </a:spcAft>
+            </a:pPr>
+            <a:r>
+              <a:rPr sz="1500" b="1" i="0">
+                <a:solidFill>
+                  <a:srgbClr val="F5F7F9"/>
+                </a:solidFill>
+                <a:latin typeface="Aptos"/>
+              </a:rPr>
+              <a:t>Concede in measured steps—and take a good final offer.</a:t>
             </a:r>
           </a:p>
         </p:txBody>
@@ -3623,6 +7400,14 @@
 <file path=ppt/slides/slide4.xml><?xml version="1.0" encoding="utf-8"?>
 <p:sld xmlns:a="http://schemas.openxmlformats.org/drawingml/2006/main" xmlns:p="http://schemas.openxmlformats.org/presentationml/2006/main" xmlns:r="http://schemas.openxmlformats.org/officeDocument/2006/relationships">
   <p:cSld>
+    <p:bg>
+      <p:bgPr>
+        <a:solidFill>
+          <a:srgbClr val="0F1822"/>
+        </a:solidFill>
+        <a:effectLst/>
+      </p:bgPr>
+    </p:bg>
     <p:spTree>
       <p:nvGrpSpPr>
         <p:cNvPr id="1" name=""/>
@@ -3632,20 +7417,146 @@
       <p:grpSpPr/>
       <p:sp>
         <p:nvSpPr>
-          <p:cNvPr id="2" name="Rectangle 1"/>
+          <p:cNvPr id="2" name="TextBox 1"/>
+          <p:cNvSpPr txBox="1"/>
+          <p:nvPr/>
+        </p:nvSpPr>
+        <p:spPr>
+          <a:xfrm>
+            <a:off x="658368" y="384048"/>
+            <a:ext cx="7132320" cy="256032"/>
+          </a:xfrm>
+          <a:prstGeom prst="rect">
+            <a:avLst/>
+          </a:prstGeom>
+          <a:noFill/>
+        </p:spPr>
+        <p:txBody>
+          <a:bodyPr wrap="square" lIns="0" rIns="0" tIns="0" bIns="0" anchor="t">
+            <a:spAutoFit/>
+          </a:bodyPr>
+          <a:lstStyle/>
+          <a:p>
+            <a:pPr algn="l">
+              <a:spcBef>
+                <a:spcPts val="0"/>
+              </a:spcBef>
+              <a:spcAft>
+                <a:spcPts val="0"/>
+              </a:spcAft>
+            </a:pPr>
+            <a:r>
+              <a:rPr sz="1000" b="1" i="0">
+                <a:solidFill>
+                  <a:srgbClr val="A9EEC2"/>
+                </a:solidFill>
+                <a:latin typeface="Aptos"/>
+              </a:rPr>
+              <a:t>03  ·  WHAT THE TWEAKS DELIVERED</a:t>
+            </a:r>
+          </a:p>
+        </p:txBody>
+      </p:sp>
+      <p:sp>
+        <p:nvSpPr>
+          <p:cNvPr id="3" name="TextBox 2"/>
+          <p:cNvSpPr txBox="1"/>
+          <p:nvPr/>
+        </p:nvSpPr>
+        <p:spPr>
+          <a:xfrm>
+            <a:off x="658368" y="749808"/>
+            <a:ext cx="10881360" cy="566928"/>
+          </a:xfrm>
+          <a:prstGeom prst="rect">
+            <a:avLst/>
+          </a:prstGeom>
+          <a:noFill/>
+        </p:spPr>
+        <p:txBody>
+          <a:bodyPr wrap="square" lIns="0" rIns="0" tIns="0" bIns="0" anchor="t">
+            <a:spAutoFit/>
+          </a:bodyPr>
+          <a:lstStyle/>
+          <a:p>
+            <a:pPr algn="l">
+              <a:spcBef>
+                <a:spcPts val="0"/>
+              </a:spcBef>
+              <a:spcAft>
+                <a:spcPts val="0"/>
+              </a:spcAft>
+            </a:pPr>
+            <a:r>
+              <a:rPr sz="3000" b="1" i="0">
+                <a:solidFill>
+                  <a:srgbClr val="F5F7F9"/>
+                </a:solidFill>
+                <a:latin typeface="Aptos"/>
+              </a:rPr>
+              <a:t>Small changes. Measurable practice gains.</a:t>
+            </a:r>
+          </a:p>
+        </p:txBody>
+      </p:sp>
+      <p:sp>
+        <p:nvSpPr>
+          <p:cNvPr id="4" name="TextBox 3"/>
+          <p:cNvSpPr txBox="1"/>
+          <p:nvPr/>
+        </p:nvSpPr>
+        <p:spPr>
+          <a:xfrm>
+            <a:off x="685800" y="1389888"/>
+            <a:ext cx="10698480" cy="438912"/>
+          </a:xfrm>
+          <a:prstGeom prst="rect">
+            <a:avLst/>
+          </a:prstGeom>
+          <a:noFill/>
+        </p:spPr>
+        <p:txBody>
+          <a:bodyPr wrap="square" lIns="0" rIns="0" tIns="0" bIns="0" anchor="t">
+            <a:spAutoFit/>
+          </a:bodyPr>
+          <a:lstStyle/>
+          <a:p>
+            <a:pPr algn="l">
+              <a:spcBef>
+                <a:spcPts val="0"/>
+              </a:spcBef>
+              <a:spcAft>
+                <a:spcPts val="0"/>
+              </a:spcAft>
+            </a:pPr>
+            <a:r>
+              <a:rPr sz="1600" b="0" i="0">
+                <a:solidFill>
+                  <a:srgbClr val="AEBCC6"/>
+                </a:solidFill>
+                <a:latin typeface="Aptos"/>
+              </a:rPr>
+              <a:t>The results below come from separate practice tests and a final-style rehearsal.</a:t>
+            </a:r>
+          </a:p>
+        </p:txBody>
+      </p:sp>
+      <p:sp>
+        <p:nvSpPr>
+          <p:cNvPr id="5" name="Rectangle 4"/>
           <p:cNvSpPr/>
           <p:nvPr/>
         </p:nvSpPr>
         <p:spPr>
           <a:xfrm>
-            <a:off x="0" y="0"/>
-            <a:ext cx="12191695" cy="164592"/>
+            <a:off x="658368" y="6473952"/>
+            <a:ext cx="10881360" cy="32004"/>
           </a:xfrm>
           <a:prstGeom prst="rect">
             <a:avLst/>
           </a:prstGeom>
           <a:solidFill>
-            <a:srgbClr val="0F8B8D"/>
+            <a:srgbClr val="202F3B"/>
           </a:solidFill>
           <a:ln>
             <a:noFill/>
@@ -3675,383 +7586,20 @@
       </p:sp>
       <p:sp>
         <p:nvSpPr>
-          <p:cNvPr id="3" name="TextBox 2"/>
-          <p:cNvSpPr txBox="1"/>
-          <p:nvPr/>
-        </p:nvSpPr>
-        <p:spPr>
-          <a:xfrm>
-            <a:off x="548640" y="365760"/>
-            <a:ext cx="10972800" cy="914400"/>
+          <p:cNvPr id="6" name="Rectangle 5"/>
+          <p:cNvSpPr/>
+          <p:nvPr/>
+        </p:nvSpPr>
+        <p:spPr>
+          <a:xfrm>
+            <a:off x="658368" y="6473952"/>
+            <a:ext cx="10881360" cy="32004"/>
           </a:xfrm>
           <a:prstGeom prst="rect">
             <a:avLst/>
           </a:prstGeom>
-          <a:noFill/>
-        </p:spPr>
-        <p:txBody>
-          <a:bodyPr wrap="none">
-            <a:spAutoFit/>
-          </a:bodyPr>
-          <a:lstStyle/>
-          <a:p>
-            <a:pPr>
-              <a:defRPr sz="3200" b="1">
-                <a:solidFill>
-                  <a:srgbClr val="14243B"/>
-                </a:solidFill>
-              </a:defRPr>
-            </a:pPr>
-            <a:r>
-              <a:t>What we learned about suppliers</a:t>
-            </a:r>
-          </a:p>
-          <a:p>
-            <a:pPr>
-              <a:defRPr sz="1600">
-                <a:solidFill>
-                  <a:srgbClr val="555F6B"/>
-                </a:solidFill>
-              </a:defRPr>
-            </a:pPr>
-            <a:r>
-              <a:t>From 300+ negotiations and the arena's own traces (supplier reasons in words)</a:t>
-            </a:r>
-          </a:p>
-        </p:txBody>
-      </p:sp>
-      <p:graphicFrame>
-        <p:nvGraphicFramePr>
-          <p:cNvPr id="4" name="Table 3"/>
-          <p:cNvGraphicFramePr>
-            <a:graphicFrameLocks noGrp="1"/>
-          </p:cNvGraphicFramePr>
-          <p:nvPr/>
-        </p:nvGraphicFramePr>
-        <p:xfrm>
-          <a:off x="594360" y="1554480"/>
-          <a:ext cx="10972800" cy="3291840"/>
-        </p:xfrm>
-        <a:graphic>
-          <a:graphicData uri="http://schemas.openxmlformats.org/drawingml/2006/table">
-            <a:tbl>
-              <a:tblPr firstRow="1" bandRow="1">
-                <a:tableStyleId>{5C22544A-7EE6-4342-B048-85BDC9FD1C3A}</a:tableStyleId>
-              </a:tblPr>
-              <a:tblGrid>
-                <a:gridCol w="7863840"/>
-                <a:gridCol w="3108960"/>
-              </a:tblGrid>
-              <a:tr h="411480">
-                <a:tc>
-                  <a:txBody>
-                    <a:bodyPr/>
-                    <a:lstStyle/>
-                    <a:p>
-                      <a:pPr>
-                        <a:defRPr sz="1500" b="1">
-                          <a:solidFill>
-                            <a:srgbClr val="FFFFFF"/>
-                          </a:solidFill>
-                        </a:defRPr>
-                      </a:pPr>
-                      <a:r>
-                        <a:t>Finding</a:t>
-                      </a:r>
-                    </a:p>
-                  </a:txBody>
-                  <a:tcPr>
-                    <a:solidFill>
-                      <a:srgbClr val="14243B"/>
-                    </a:solidFill>
-                  </a:tcPr>
-                </a:tc>
-                <a:tc>
-                  <a:txBody>
-                    <a:bodyPr/>
-                    <a:lstStyle/>
-                    <a:p>
-                      <a:pPr>
-                        <a:defRPr sz="1500" b="1">
-                          <a:solidFill>
-                            <a:srgbClr val="FFFFFF"/>
-                          </a:solidFill>
-                        </a:defRPr>
-                      </a:pPr>
-                      <a:r>
-                        <a:t>Evidence</a:t>
-                      </a:r>
-                    </a:p>
-                  </a:txBody>
-                  <a:tcPr>
-                    <a:solidFill>
-                      <a:srgbClr val="14243B"/>
-                    </a:solidFill>
-                  </a:tcPr>
-                </a:tc>
-              </a:tr>
-              <a:tr h="411480">
-                <a:tc>
-                  <a:txBody>
-                    <a:bodyPr/>
-                    <a:lstStyle/>
-                    <a:p>
-                      <a:pPr>
-                        <a:defRPr sz="1500" b="0"/>
-                      </a:pPr>
-                      <a:r>
-                        <a:t>The first reply carries most of the money</a:t>
-                      </a:r>
-                    </a:p>
-                  </a:txBody>
-                  <a:tcPr/>
-                </a:tc>
-                <a:tc>
-                  <a:txBody>
-                    <a:bodyPr/>
-                    <a:lstStyle/>
-                    <a:p>
-                      <a:pPr>
-                        <a:defRPr sz="1500" b="0"/>
-                      </a:pPr>
-                      <a:r>
-                        <a:t>stabilise: 1.40 % of a 1.69 % total move</a:t>
-                      </a:r>
-                    </a:p>
-                  </a:txBody>
-                  <a:tcPr/>
-                </a:tc>
-              </a:tr>
-              <a:tr h="411480">
-                <a:tc>
-                  <a:txBody>
-                    <a:bodyPr/>
-                    <a:lstStyle/>
-                    <a:p>
-                      <a:pPr>
-                        <a:defRPr sz="1500" b="0"/>
-                      </a:pPr>
-                      <a:r>
-                        <a:t>Match their first big drop: a smaller step makes them RAISE the price</a:t>
-                      </a:r>
-                    </a:p>
-                  </a:txBody>
-                  <a:tcPr/>
-                </a:tc>
-                <a:tc>
-                  <a:txBody>
-                    <a:bodyPr/>
-                    <a:lstStyle/>
-                    <a:p>
-                      <a:pPr>
-                        <a:defRPr sz="1500" b="0"/>
-                      </a:pPr>
-                      <a:r>
-                        <a:t>P08: 47 vs 68</a:t>
-                      </a:r>
-                    </a:p>
-                  </a:txBody>
-                  <a:tcPr/>
-                </a:tc>
-              </a:tr>
-              <a:tr h="411480">
-                <a:tc>
-                  <a:txBody>
-                    <a:bodyPr/>
-                    <a:lstStyle/>
-                    <a:p>
-                      <a:pPr>
-                        <a:defRPr sz="1500" b="0"/>
-                      </a:pPr>
-                      <a:r>
-                        <a:t>A NEW verified fact moves them: notice period → "a fair point"</a:t>
-                      </a:r>
-                    </a:p>
-                  </a:txBody>
-                  <a:tcPr/>
-                </a:tc>
-                <a:tc>
-                  <a:txBody>
-                    <a:bodyPr/>
-                    <a:lstStyle/>
-                    <a:p>
-                      <a:pPr>
-                        <a:defRPr sz="1500" b="0"/>
-                      </a:pPr>
-                      <a:r>
-                        <a:t>34 of 38</a:t>
-                      </a:r>
-                    </a:p>
-                  </a:txBody>
-                  <a:tcPr/>
-                </a:tc>
-              </a:tr>
-              <a:tr h="411480">
-                <a:tc>
-                  <a:txBody>
-                    <a:bodyPr/>
-                    <a:lstStyle/>
-                    <a:p>
-                      <a:pPr>
-                        <a:defRPr sz="1500" b="0"/>
-                      </a:pPr>
-                      <a:r>
-                        <a:t>Index arguments and past order prices do not ("not our reality")</a:t>
-                      </a:r>
-                    </a:p>
-                  </a:txBody>
-                  <a:tcPr/>
-                </a:tc>
-                <a:tc>
-                  <a:txBody>
-                    <a:bodyPr/>
-                    <a:lstStyle/>
-                    <a:p>
-                      <a:pPr>
-                        <a:defRPr sz="1500" b="0"/>
-                      </a:pPr>
-                      <a:r>
-                        <a:t>23 / 8 replies</a:t>
-                      </a:r>
-                    </a:p>
-                  </a:txBody>
-                  <a:tcPr/>
-                </a:tc>
-              </a:tr>
-              <a:tr h="411480">
-                <a:tc>
-                  <a:txBody>
-                    <a:bodyPr/>
-                    <a:lstStyle/>
-                    <a:p>
-                      <a:pPr>
-                        <a:defRPr sz="1500" b="0"/>
-                      </a:pPr>
-                      <a:r>
-                        <a:t>Unanswered questions block them ("which volume can you commit to?")</a:t>
-                      </a:r>
-                    </a:p>
-                  </a:txBody>
-                  <a:tcPr/>
-                </a:tc>
-                <a:tc>
-                  <a:txBody>
-                    <a:bodyPr/>
-                    <a:lstStyle/>
-                    <a:p>
-                      <a:pPr>
-                        <a:defRPr sz="1500" b="0"/>
-                      </a:pPr>
-                      <a:r>
-                        <a:t>60+ times</a:t>
-                      </a:r>
-                    </a:p>
-                  </a:txBody>
-                  <a:tcPr/>
-                </a:tc>
-              </a:tr>
-              <a:tr h="411480">
-                <a:tc>
-                  <a:txBody>
-                    <a:bodyPr/>
-                    <a:lstStyle/>
-                    <a:p>
-                      <a:pPr>
-                        <a:defRPr sz="1500" b="0"/>
-                      </a:pPr>
-                      <a:r>
-                        <a:t>Countering a single supplier's final offer → walk-away</a:t>
-                      </a:r>
-                    </a:p>
-                  </a:txBody>
-                  <a:tcPr/>
-                </a:tc>
-                <a:tc>
-                  <a:txBody>
-                    <a:bodyPr/>
-                    <a:lstStyle/>
-                    <a:p>
-                      <a:pPr>
-                        <a:defRPr sz="1500" b="0"/>
-                      </a:pPr>
-                      <a:r>
-                        <a:t>2 of 2</a:t>
-                      </a:r>
-                    </a:p>
-                  </a:txBody>
-                  <a:tcPr/>
-                </a:tc>
-              </a:tr>
-              <a:tr h="411480">
-                <a:tc>
-                  <a:txBody>
-                    <a:bodyPr/>
-                    <a:lstStyle/>
-                    <a:p>
-                      <a:pPr>
-                        <a:defRPr sz="1500" b="0"/>
-                      </a:pPr>
-                      <a:r>
-                        <a:t>A bigger LLM did not help: code decides the money</a:t>
-                      </a:r>
-                    </a:p>
-                  </a:txBody>
-                  <a:tcPr/>
-                </a:tc>
-                <a:tc>
-                  <a:txBody>
-                    <a:bodyPr/>
-                    <a:lstStyle/>
-                    <a:p>
-                      <a:pPr>
-                        <a:defRPr sz="1500" b="0"/>
-                      </a:pPr>
-                      <a:r>
-                        <a:t>gpt-6 variants lost or tied</a:t>
-                      </a:r>
-                    </a:p>
-                  </a:txBody>
-                  <a:tcPr/>
-                </a:tc>
-              </a:tr>
-            </a:tbl>
-          </a:graphicData>
-        </a:graphic>
-      </p:graphicFrame>
-    </p:spTree>
-  </p:cSld>
-  <p:clrMapOvr>
-    <a:masterClrMapping/>
-  </p:clrMapOvr>
-</p:sld>
-</file>
-
-<file path=ppt/slides/slide5.xml><?xml version="1.0" encoding="utf-8"?>
-<p:sld xmlns:a="http://schemas.openxmlformats.org/drawingml/2006/main" xmlns:p="http://schemas.openxmlformats.org/presentationml/2006/main" xmlns:r="http://schemas.openxmlformats.org/officeDocument/2006/relationships">
-  <p:cSld>
-    <p:spTree>
-      <p:nvGrpSpPr>
-        <p:cNvPr id="1" name=""/>
-        <p:cNvGrpSpPr/>
-        <p:nvPr/>
-      </p:nvGrpSpPr>
-      <p:grpSpPr/>
-      <p:sp>
-        <p:nvSpPr>
-          <p:cNvPr id="2" name="Rectangle 1"/>
-          <p:cNvSpPr/>
-          <p:nvPr/>
-        </p:nvSpPr>
-        <p:spPr>
-          <a:xfrm>
-            <a:off x="0" y="0"/>
-            <a:ext cx="12191695" cy="164592"/>
-          </a:xfrm>
-          <a:prstGeom prst="rect">
-            <a:avLst/>
-          </a:prstGeom>
           <a:solidFill>
-            <a:srgbClr val="0F8B8D"/>
+            <a:srgbClr val="A9EEC2"/>
           </a:solidFill>
           <a:ln>
             <a:noFill/>
@@ -4081,14 +7629,14 @@
       </p:sp>
       <p:sp>
         <p:nvSpPr>
-          <p:cNvPr id="3" name="TextBox 2"/>
+          <p:cNvPr id="7" name="TextBox 6"/>
           <p:cNvSpPr txBox="1"/>
           <p:nvPr/>
         </p:nvSpPr>
         <p:spPr>
           <a:xfrm>
-            <a:off x="548640" y="365760"/>
-            <a:ext cx="10972800" cy="914400"/>
+            <a:off x="658368" y="6547104"/>
+            <a:ext cx="8412480" cy="164592"/>
           </a:xfrm>
           <a:prstGeom prst="rect">
             <a:avLst/>
@@ -4096,34 +7644,41 @@
           <a:noFill/>
         </p:spPr>
         <p:txBody>
-          <a:bodyPr wrap="none">
+          <a:bodyPr wrap="square" lIns="0" rIns="0" tIns="0" bIns="0" anchor="t">
             <a:spAutoFit/>
           </a:bodyPr>
           <a:lstStyle/>
           <a:p>
-            <a:pPr>
-              <a:defRPr sz="3200" b="1">
+            <a:pPr algn="l">
+              <a:spcBef>
+                <a:spcPts val="0"/>
+              </a:spcBef>
+              <a:spcAft>
+                <a:spcPts val="0"/>
+              </a:spcAft>
+            </a:pPr>
+            <a:r>
+              <a:rPr sz="800" b="1" i="0">
                 <a:solidFill>
-                  <a:srgbClr val="14243B"/>
+                  <a:srgbClr val="AEBCC6"/>
                 </a:solidFill>
-              </a:defRPr>
-            </a:pPr>
-            <a:r>
-              <a:t>How we learned without over-fitting</a:t>
-            </a:r>
-          </a:p>
-        </p:txBody>
-      </p:sp>
-      <p:sp>
-        <p:nvSpPr>
-          <p:cNvPr id="4" name="TextBox 3"/>
+                <a:latin typeface="Aptos"/>
+              </a:rPr>
+              <a:t>NIGHTHUNTER  ·  TACTO NEGOTIATION ARENA</a:t>
+            </a:r>
+          </a:p>
+        </p:txBody>
+      </p:sp>
+      <p:sp>
+        <p:nvSpPr>
+          <p:cNvPr id="8" name="TextBox 7"/>
           <p:cNvSpPr txBox="1"/>
           <p:nvPr/>
         </p:nvSpPr>
         <p:spPr>
           <a:xfrm>
-            <a:off x="640080" y="1463040"/>
-            <a:ext cx="10972800" cy="5029200"/>
+            <a:off x="10680192" y="6528816"/>
+            <a:ext cx="868680" cy="182880"/>
           </a:xfrm>
           <a:prstGeom prst="rect">
             <a:avLst/>
@@ -4131,121 +7686,89 @@
           <a:noFill/>
         </p:spPr>
         <p:txBody>
-          <a:bodyPr wrap="square">
+          <a:bodyPr wrap="square" lIns="0" rIns="0" tIns="0" bIns="0" anchor="t">
             <a:spAutoFit/>
           </a:bodyPr>
           <a:lstStyle/>
           <a:p>
-            <a:pPr>
+            <a:pPr algn="r">
+              <a:spcBef>
+                <a:spcPts val="0"/>
+              </a:spcBef>
               <a:spcAft>
-                <a:spcPts val="800"/>
+                <a:spcPts val="0"/>
               </a:spcAft>
-              <a:defRPr sz="1800" b="0">
+            </a:pPr>
+            <a:r>
+              <a:rPr sz="900" b="1" i="0">
                 <a:solidFill>
-                  <a:srgbClr val="14243B"/>
+                  <a:srgbClr val="AEBCC6"/>
                 </a:solidFill>
-              </a:defRPr>
+                <a:latin typeface="Aptos"/>
+              </a:rPr>
+              <a:t>04 / 04</a:t>
+            </a:r>
+          </a:p>
+        </p:txBody>
+      </p:sp>
+      <p:sp>
+        <p:nvSpPr>
+          <p:cNvPr id="9" name="TextBox 8"/>
+          <p:cNvSpPr txBox="1"/>
+          <p:nvPr/>
+        </p:nvSpPr>
+        <p:spPr>
+          <a:xfrm>
+            <a:off x="713232" y="1947672"/>
+            <a:ext cx="4389120" cy="256032"/>
+          </a:xfrm>
+          <a:prstGeom prst="rect">
+            <a:avLst/>
+          </a:prstGeom>
+          <a:noFill/>
+        </p:spPr>
+        <p:txBody>
+          <a:bodyPr wrap="square" lIns="0" rIns="0" tIns="0" bIns="0" anchor="t">
+            <a:spAutoFit/>
+          </a:bodyPr>
+          <a:lstStyle/>
+          <a:p>
+            <a:pPr algn="l">
+              <a:spcBef>
+                <a:spcPts val="0"/>
+              </a:spcBef>
+              <a:spcAft>
+                <a:spcPts val="0"/>
+              </a:spcAft>
             </a:pPr>
             <a:r>
-              <a:t>• Mined every replay for the supplier's reasons in words</a:t>
-            </a:r>
-          </a:p>
-          <a:p>
-            <a:pPr>
-              <a:spcAft>
-                <a:spcPts val="800"/>
-              </a:spcAft>
-              <a:defRPr sz="1800" b="0">
+              <a:rPr sz="1000" b="1" i="0">
                 <a:solidFill>
-                  <a:srgbClr val="14243B"/>
+                  <a:srgbClr val="AEBCC6"/>
                 </a:solidFill>
-              </a:defRPr>
-            </a:pPr>
-            <a:r>
-              <a:t>• Train / validation / test split BY CASE, plus a 300× bootstrap: we keep a rule only if it holds on suppliers it has not seen</a:t>
-            </a:r>
-          </a:p>
-          <a:p>
-            <a:pPr>
-              <a:spcAft>
-                <a:spcPts val="800"/>
-              </a:spcAft>
-              <a:defRPr sz="1800" b="0">
-                <a:solidFill>
-                  <a:srgbClr val="14243B"/>
-                </a:solidFill>
-              </a:defRPr>
-            </a:pPr>
-            <a:r>
-              <a:t>• Path-to-target: per case, the price needed for the best score vs the best price ever offered</a:t>
-            </a:r>
-          </a:p>
-          <a:p>
-            <a:pPr>
-              <a:spcAft>
-                <a:spcPts val="800"/>
-              </a:spcAft>
-              <a:defRPr sz="1800" b="0">
-                <a:solidFill>
-                  <a:srgbClr val="14243B"/>
-                </a:solidFill>
-              </a:defRPr>
-            </a:pPr>
-            <a:r>
-              <a:t>• Digital twin used for bug-finding; it did not beat a naive predictor, so we did not tune on it</a:t>
-            </a:r>
-          </a:p>
-          <a:p>
-            <a:pPr>
-              <a:spcAft>
-                <a:spcPts val="800"/>
-              </a:spcAft>
-              <a:defRPr sz="1800" b="0">
-                <a:solidFill>
-                  <a:srgbClr val="14243B"/>
-                </a:solidFill>
-              </a:defRPr>
-            </a:pPr>
-            <a:r>
-              <a:t>• No case IDs in the agent: the hidden final has new suppliers</a:t>
-            </a:r>
-          </a:p>
-        </p:txBody>
-      </p:sp>
-    </p:spTree>
-  </p:cSld>
-  <p:clrMapOvr>
-    <a:masterClrMapping/>
-  </p:clrMapOvr>
-</p:sld>
-</file>
-
-<file path=ppt/slides/slide6.xml><?xml version="1.0" encoding="utf-8"?>
-<p:sld xmlns:a="http://schemas.openxmlformats.org/drawingml/2006/main" xmlns:p="http://schemas.openxmlformats.org/presentationml/2006/main" xmlns:r="http://schemas.openxmlformats.org/officeDocument/2006/relationships">
-  <p:cSld>
-    <p:spTree>
-      <p:nvGrpSpPr>
-        <p:cNvPr id="1" name=""/>
-        <p:cNvGrpSpPr/>
-        <p:nvPr/>
-      </p:nvGrpSpPr>
-      <p:grpSpPr/>
-      <p:sp>
-        <p:nvSpPr>
-          <p:cNvPr id="2" name="Rectangle 1"/>
+                <a:latin typeface="Aptos"/>
+              </a:rPr>
+              <a:t>AVERAGE SCORE  /  100</a:t>
+            </a:r>
+          </a:p>
+        </p:txBody>
+      </p:sp>
+      <p:sp>
+        <p:nvSpPr>
+          <p:cNvPr id="10" name="Rectangle 9"/>
           <p:cNvSpPr/>
           <p:nvPr/>
         </p:nvSpPr>
         <p:spPr>
           <a:xfrm>
-            <a:off x="0" y="0"/>
-            <a:ext cx="12191695" cy="164592"/>
+            <a:off x="886968" y="5148072"/>
+            <a:ext cx="4782312" cy="18287"/>
           </a:xfrm>
           <a:prstGeom prst="rect">
             <a:avLst/>
           </a:prstGeom>
           <a:solidFill>
-            <a:srgbClr val="0F8B8D"/>
+            <a:srgbClr val="202F3B"/>
           </a:solidFill>
           <a:ln>
             <a:noFill/>
@@ -4275,559 +7798,20 @@
       </p:sp>
       <p:sp>
         <p:nvSpPr>
-          <p:cNvPr id="3" name="TextBox 2"/>
-          <p:cNvSpPr txBox="1"/>
-          <p:nvPr/>
-        </p:nvSpPr>
-        <p:spPr>
-          <a:xfrm>
-            <a:off x="548640" y="365760"/>
-            <a:ext cx="10972800" cy="914400"/>
-          </a:xfrm>
-          <a:prstGeom prst="rect">
-            <a:avLst/>
-          </a:prstGeom>
-          <a:noFill/>
-        </p:spPr>
-        <p:txBody>
-          <a:bodyPr wrap="none">
-            <a:spAutoFit/>
-          </a:bodyPr>
-          <a:lstStyle/>
-          <a:p>
-            <a:pPr>
-              <a:defRPr sz="3200" b="1">
-                <a:solidFill>
-                  <a:srgbClr val="14243B"/>
-                </a:solidFill>
-              </a:defRPr>
-            </a:pPr>
-            <a:r>
-              <a:t>Results</a:t>
-            </a:r>
-          </a:p>
-        </p:txBody>
-      </p:sp>
-      <p:sp>
-        <p:nvSpPr>
-          <p:cNvPr id="4" name="TextBox 3"/>
-          <p:cNvSpPr txBox="1"/>
-          <p:nvPr/>
-        </p:nvSpPr>
-        <p:spPr>
-          <a:xfrm>
-            <a:off x="640080" y="1371600"/>
-            <a:ext cx="10972800" cy="5029200"/>
-          </a:xfrm>
-          <a:prstGeom prst="rect">
-            <a:avLst/>
-          </a:prstGeom>
-          <a:noFill/>
-        </p:spPr>
-        <p:txBody>
-          <a:bodyPr wrap="square">
-            <a:spAutoFit/>
-          </a:bodyPr>
-          <a:lstStyle/>
-          <a:p>
-            <a:pPr>
-              <a:spcAft>
-                <a:spcPts val="800"/>
-              </a:spcAft>
-              <a:defRPr sz="1700" b="0">
-                <a:solidFill>
-                  <a:srgbClr val="14243B"/>
-                </a:solidFill>
-              </a:defRPr>
-            </a:pPr>
-            <a:r>
-              <a:t>• Mean per run: 46.7 → 75 on the single-supplier practice cases; RFQ P05 92.4 (house agent 56)</a:t>
-            </a:r>
-          </a:p>
-          <a:p>
-            <a:pPr>
-              <a:spcAft>
-                <a:spcPts val="800"/>
-              </a:spcAft>
-              <a:defRPr sz="1700" b="0">
-                <a:solidFill>
-                  <a:srgbClr val="14243B"/>
-                </a:solidFill>
-              </a:defRPr>
-            </a:pPr>
-            <a:r>
-              <a:t>• Full 10-case rehearsal under final rules: 10/10 deals, 0 timeouts, every case inside the 8-minute cap</a:t>
-            </a:r>
-          </a:p>
-          <a:p>
-            <a:pPr>
-              <a:spcAft>
-                <a:spcPts val="800"/>
-              </a:spcAft>
-              <a:defRPr sz="1700" b="0">
-                <a:solidFill>
-                  <a:srgbClr val="14243B"/>
-                </a:solidFill>
-              </a:defRPr>
-            </a:pPr>
-            <a:r>
-              <a:t>• Robustness fixes found in rehearsal: RFQ busy sessions and stale offers, the open-session limit, missing fields, late replies</a:t>
-            </a:r>
-          </a:p>
-        </p:txBody>
-      </p:sp>
-      <p:graphicFrame>
-        <p:nvGraphicFramePr>
-          <p:cNvPr id="5" name="Table 4"/>
-          <p:cNvGraphicFramePr>
-            <a:graphicFrameLocks noGrp="1"/>
-          </p:cNvGraphicFramePr>
-          <p:nvPr/>
-        </p:nvGraphicFramePr>
-        <p:xfrm>
-          <a:off x="594360" y="4206240"/>
-          <a:ext cx="10972800" cy="822960"/>
-        </p:xfrm>
-        <a:graphic>
-          <a:graphicData uri="http://schemas.openxmlformats.org/drawingml/2006/table">
-            <a:tbl>
-              <a:tblPr firstRow="1" bandRow="1">
-                <a:tableStyleId>{5C22544A-7EE6-4342-B048-85BDC9FD1C3A}</a:tableStyleId>
-              </a:tblPr>
-              <a:tblGrid>
-                <a:gridCol w="1097280"/>
-                <a:gridCol w="1097280"/>
-                <a:gridCol w="1097280"/>
-                <a:gridCol w="1097280"/>
-                <a:gridCol w="1097280"/>
-                <a:gridCol w="1097280"/>
-                <a:gridCol w="1097280"/>
-                <a:gridCol w="1097280"/>
-                <a:gridCol w="1097280"/>
-                <a:gridCol w="1097280"/>
-              </a:tblGrid>
-              <a:tr h="411480">
-                <a:tc>
-                  <a:txBody>
-                    <a:bodyPr/>
-                    <a:lstStyle/>
-                    <a:p>
-                      <a:pPr>
-                        <a:defRPr sz="1600" b="1">
-                          <a:solidFill>
-                            <a:srgbClr val="FFFFFF"/>
-                          </a:solidFill>
-                        </a:defRPr>
-                      </a:pPr>
-                      <a:r>
-                        <a:t>P01</a:t>
-                      </a:r>
-                    </a:p>
-                  </a:txBody>
-                  <a:tcPr>
-                    <a:solidFill>
-                      <a:srgbClr val="14243B"/>
-                    </a:solidFill>
-                  </a:tcPr>
-                </a:tc>
-                <a:tc>
-                  <a:txBody>
-                    <a:bodyPr/>
-                    <a:lstStyle/>
-                    <a:p>
-                      <a:pPr>
-                        <a:defRPr sz="1600" b="1">
-                          <a:solidFill>
-                            <a:srgbClr val="FFFFFF"/>
-                          </a:solidFill>
-                        </a:defRPr>
-                      </a:pPr>
-                      <a:r>
-                        <a:t>P02</a:t>
-                      </a:r>
-                    </a:p>
-                  </a:txBody>
-                  <a:tcPr>
-                    <a:solidFill>
-                      <a:srgbClr val="14243B"/>
-                    </a:solidFill>
-                  </a:tcPr>
-                </a:tc>
-                <a:tc>
-                  <a:txBody>
-                    <a:bodyPr/>
-                    <a:lstStyle/>
-                    <a:p>
-                      <a:pPr>
-                        <a:defRPr sz="1600" b="1">
-                          <a:solidFill>
-                            <a:srgbClr val="FFFFFF"/>
-                          </a:solidFill>
-                        </a:defRPr>
-                      </a:pPr>
-                      <a:r>
-                        <a:t>P03</a:t>
-                      </a:r>
-                    </a:p>
-                  </a:txBody>
-                  <a:tcPr>
-                    <a:solidFill>
-                      <a:srgbClr val="14243B"/>
-                    </a:solidFill>
-                  </a:tcPr>
-                </a:tc>
-                <a:tc>
-                  <a:txBody>
-                    <a:bodyPr/>
-                    <a:lstStyle/>
-                    <a:p>
-                      <a:pPr>
-                        <a:defRPr sz="1600" b="1">
-                          <a:solidFill>
-                            <a:srgbClr val="FFFFFF"/>
-                          </a:solidFill>
-                        </a:defRPr>
-                      </a:pPr>
-                      <a:r>
-                        <a:t>P04</a:t>
-                      </a:r>
-                    </a:p>
-                  </a:txBody>
-                  <a:tcPr>
-                    <a:solidFill>
-                      <a:srgbClr val="14243B"/>
-                    </a:solidFill>
-                  </a:tcPr>
-                </a:tc>
-                <a:tc>
-                  <a:txBody>
-                    <a:bodyPr/>
-                    <a:lstStyle/>
-                    <a:p>
-                      <a:pPr>
-                        <a:defRPr sz="1600" b="1">
-                          <a:solidFill>
-                            <a:srgbClr val="FFFFFF"/>
-                          </a:solidFill>
-                        </a:defRPr>
-                      </a:pPr>
-                      <a:r>
-                        <a:t>P05</a:t>
-                      </a:r>
-                    </a:p>
-                  </a:txBody>
-                  <a:tcPr>
-                    <a:solidFill>
-                      <a:srgbClr val="14243B"/>
-                    </a:solidFill>
-                  </a:tcPr>
-                </a:tc>
-                <a:tc>
-                  <a:txBody>
-                    <a:bodyPr/>
-                    <a:lstStyle/>
-                    <a:p>
-                      <a:pPr>
-                        <a:defRPr sz="1600" b="1">
-                          <a:solidFill>
-                            <a:srgbClr val="FFFFFF"/>
-                          </a:solidFill>
-                        </a:defRPr>
-                      </a:pPr>
-                      <a:r>
-                        <a:t>P07</a:t>
-                      </a:r>
-                    </a:p>
-                  </a:txBody>
-                  <a:tcPr>
-                    <a:solidFill>
-                      <a:srgbClr val="14243B"/>
-                    </a:solidFill>
-                  </a:tcPr>
-                </a:tc>
-                <a:tc>
-                  <a:txBody>
-                    <a:bodyPr/>
-                    <a:lstStyle/>
-                    <a:p>
-                      <a:pPr>
-                        <a:defRPr sz="1600" b="1">
-                          <a:solidFill>
-                            <a:srgbClr val="FFFFFF"/>
-                          </a:solidFill>
-                        </a:defRPr>
-                      </a:pPr>
-                      <a:r>
-                        <a:t>P08</a:t>
-                      </a:r>
-                    </a:p>
-                  </a:txBody>
-                  <a:tcPr>
-                    <a:solidFill>
-                      <a:srgbClr val="14243B"/>
-                    </a:solidFill>
-                  </a:tcPr>
-                </a:tc>
-                <a:tc>
-                  <a:txBody>
-                    <a:bodyPr/>
-                    <a:lstStyle/>
-                    <a:p>
-                      <a:pPr>
-                        <a:defRPr sz="1600" b="1">
-                          <a:solidFill>
-                            <a:srgbClr val="FFFFFF"/>
-                          </a:solidFill>
-                        </a:defRPr>
-                      </a:pPr>
-                      <a:r>
-                        <a:t>P10</a:t>
-                      </a:r>
-                    </a:p>
-                  </a:txBody>
-                  <a:tcPr>
-                    <a:solidFill>
-                      <a:srgbClr val="14243B"/>
-                    </a:solidFill>
-                  </a:tcPr>
-                </a:tc>
-                <a:tc>
-                  <a:txBody>
-                    <a:bodyPr/>
-                    <a:lstStyle/>
-                    <a:p>
-                      <a:pPr>
-                        <a:defRPr sz="1600" b="1">
-                          <a:solidFill>
-                            <a:srgbClr val="FFFFFF"/>
-                          </a:solidFill>
-                        </a:defRPr>
-                      </a:pPr>
-                      <a:r>
-                        <a:t>P11</a:t>
-                      </a:r>
-                    </a:p>
-                  </a:txBody>
-                  <a:tcPr>
-                    <a:solidFill>
-                      <a:srgbClr val="14243B"/>
-                    </a:solidFill>
-                  </a:tcPr>
-                </a:tc>
-                <a:tc>
-                  <a:txBody>
-                    <a:bodyPr/>
-                    <a:lstStyle/>
-                    <a:p>
-                      <a:pPr>
-                        <a:defRPr sz="1600" b="1">
-                          <a:solidFill>
-                            <a:srgbClr val="FFFFFF"/>
-                          </a:solidFill>
-                        </a:defRPr>
-                      </a:pPr>
-                      <a:r>
-                        <a:t>P18</a:t>
-                      </a:r>
-                    </a:p>
-                  </a:txBody>
-                  <a:tcPr>
-                    <a:solidFill>
-                      <a:srgbClr val="14243B"/>
-                    </a:solidFill>
-                  </a:tcPr>
-                </a:tc>
-              </a:tr>
-              <a:tr h="411480">
-                <a:tc>
-                  <a:txBody>
-                    <a:bodyPr/>
-                    <a:lstStyle/>
-                    <a:p>
-                      <a:pPr>
-                        <a:defRPr sz="1600" b="0"/>
-                      </a:pPr>
-                      <a:r>
-                        <a:t>91.6</a:t>
-                      </a:r>
-                    </a:p>
-                  </a:txBody>
-                  <a:tcPr/>
-                </a:tc>
-                <a:tc>
-                  <a:txBody>
-                    <a:bodyPr/>
-                    <a:lstStyle/>
-                    <a:p>
-                      <a:pPr>
-                        <a:defRPr sz="1600" b="0"/>
-                      </a:pPr>
-                      <a:r>
-                        <a:t>73.5</a:t>
-                      </a:r>
-                    </a:p>
-                  </a:txBody>
-                  <a:tcPr/>
-                </a:tc>
-                <a:tc>
-                  <a:txBody>
-                    <a:bodyPr/>
-                    <a:lstStyle/>
-                    <a:p>
-                      <a:pPr>
-                        <a:defRPr sz="1600" b="0"/>
-                      </a:pPr>
-                      <a:r>
-                        <a:t>92.3</a:t>
-                      </a:r>
-                    </a:p>
-                  </a:txBody>
-                  <a:tcPr/>
-                </a:tc>
-                <a:tc>
-                  <a:txBody>
-                    <a:bodyPr/>
-                    <a:lstStyle/>
-                    <a:p>
-                      <a:pPr>
-                        <a:defRPr sz="1600" b="0"/>
-                      </a:pPr>
-                      <a:r>
-                        <a:t>87.4</a:t>
-                      </a:r>
-                    </a:p>
-                  </a:txBody>
-                  <a:tcPr/>
-                </a:tc>
-                <a:tc>
-                  <a:txBody>
-                    <a:bodyPr/>
-                    <a:lstStyle/>
-                    <a:p>
-                      <a:pPr>
-                        <a:defRPr sz="1600" b="0"/>
-                      </a:pPr>
-                      <a:r>
-                        <a:t>92.4</a:t>
-                      </a:r>
-                    </a:p>
-                  </a:txBody>
-                  <a:tcPr/>
-                </a:tc>
-                <a:tc>
-                  <a:txBody>
-                    <a:bodyPr/>
-                    <a:lstStyle/>
-                    <a:p>
-                      <a:pPr>
-                        <a:defRPr sz="1600" b="0"/>
-                      </a:pPr>
-                      <a:r>
-                        <a:t>74.0</a:t>
-                      </a:r>
-                    </a:p>
-                  </a:txBody>
-                  <a:tcPr/>
-                </a:tc>
-                <a:tc>
-                  <a:txBody>
-                    <a:bodyPr/>
-                    <a:lstStyle/>
-                    <a:p>
-                      <a:pPr>
-                        <a:defRPr sz="1600" b="0"/>
-                      </a:pPr>
-                      <a:r>
-                        <a:t>72.5</a:t>
-                      </a:r>
-                    </a:p>
-                  </a:txBody>
-                  <a:tcPr/>
-                </a:tc>
-                <a:tc>
-                  <a:txBody>
-                    <a:bodyPr/>
-                    <a:lstStyle/>
-                    <a:p>
-                      <a:pPr>
-                        <a:defRPr sz="1600" b="0"/>
-                      </a:pPr>
-                      <a:r>
-                        <a:t>69.4</a:t>
-                      </a:r>
-                    </a:p>
-                  </a:txBody>
-                  <a:tcPr/>
-                </a:tc>
-                <a:tc>
-                  <a:txBody>
-                    <a:bodyPr/>
-                    <a:lstStyle/>
-                    <a:p>
-                      <a:pPr>
-                        <a:defRPr sz="1600" b="0"/>
-                      </a:pPr>
-                      <a:r>
-                        <a:t>79.4</a:t>
-                      </a:r>
-                    </a:p>
-                  </a:txBody>
-                  <a:tcPr/>
-                </a:tc>
-                <a:tc>
-                  <a:txBody>
-                    <a:bodyPr/>
-                    <a:lstStyle/>
-                    <a:p>
-                      <a:pPr>
-                        <a:defRPr sz="1600" b="0"/>
-                      </a:pPr>
-                      <a:r>
-                        <a:t>60.6</a:t>
-                      </a:r>
-                    </a:p>
-                  </a:txBody>
-                  <a:tcPr/>
-                </a:tc>
-              </a:tr>
-            </a:tbl>
-          </a:graphicData>
-        </a:graphic>
-      </p:graphicFrame>
-    </p:spTree>
-  </p:cSld>
-  <p:clrMapOvr>
-    <a:masterClrMapping/>
-  </p:clrMapOvr>
-</p:sld>
-</file>
-
-<file path=ppt/slides/slide7.xml><?xml version="1.0" encoding="utf-8"?>
-<p:sld xmlns:a="http://schemas.openxmlformats.org/drawingml/2006/main" xmlns:p="http://schemas.openxmlformats.org/presentationml/2006/main" xmlns:r="http://schemas.openxmlformats.org/officeDocument/2006/relationships">
-  <p:cSld>
-    <p:spTree>
-      <p:nvGrpSpPr>
-        <p:cNvPr id="1" name=""/>
-        <p:cNvGrpSpPr/>
-        <p:nvPr/>
-      </p:nvGrpSpPr>
-      <p:grpSpPr/>
-      <p:sp>
-        <p:nvSpPr>
-          <p:cNvPr id="2" name="Rectangle 1"/>
+          <p:cNvPr id="11" name="Rounded Rectangle 10"/>
           <p:cNvSpPr/>
           <p:nvPr/>
         </p:nvSpPr>
         <p:spPr>
           <a:xfrm>
-            <a:off x="0" y="0"/>
-            <a:ext cx="12191695" cy="164592"/>
-          </a:xfrm>
-          <a:prstGeom prst="rect">
+            <a:off x="1444752" y="4016456"/>
+            <a:ext cx="1216152" cy="1131615"/>
+          </a:xfrm>
+          <a:prstGeom prst="roundRect">
             <a:avLst/>
           </a:prstGeom>
           <a:solidFill>
-            <a:srgbClr val="0F8B8D"/>
+            <a:srgbClr val="5F7584"/>
           </a:solidFill>
           <a:ln>
             <a:noFill/>
@@ -4857,14 +7841,14 @@
       </p:sp>
       <p:sp>
         <p:nvSpPr>
-          <p:cNvPr id="3" name="TextBox 2"/>
+          <p:cNvPr id="12" name="TextBox 11"/>
           <p:cNvSpPr txBox="1"/>
           <p:nvPr/>
         </p:nvSpPr>
         <p:spPr>
           <a:xfrm>
-            <a:off x="548640" y="365760"/>
-            <a:ext cx="10972800" cy="914400"/>
+            <a:off x="1243584" y="3604976"/>
+            <a:ext cx="1627632" cy="292608"/>
           </a:xfrm>
           <a:prstGeom prst="rect">
             <a:avLst/>
@@ -4872,34 +7856,41 @@
           <a:noFill/>
         </p:spPr>
         <p:txBody>
-          <a:bodyPr wrap="none">
+          <a:bodyPr wrap="square" lIns="0" rIns="0" tIns="0" bIns="0" anchor="t">
             <a:spAutoFit/>
           </a:bodyPr>
           <a:lstStyle/>
           <a:p>
-            <a:pPr>
-              <a:defRPr sz="3200" b="1">
+            <a:pPr algn="ctr">
+              <a:spcBef>
+                <a:spcPts val="0"/>
+              </a:spcBef>
+              <a:spcAft>
+                <a:spcPts val="0"/>
+              </a:spcAft>
+            </a:pPr>
+            <a:r>
+              <a:rPr sz="2000" b="1" i="0">
                 <a:solidFill>
-                  <a:srgbClr val="14243B"/>
+                  <a:srgbClr val="F5F7F9"/>
                 </a:solidFill>
-              </a:defRPr>
-            </a:pPr>
-            <a:r>
-              <a:t>One negotiation: P01, a family foundry asks +9.5 %</a:t>
-            </a:r>
-          </a:p>
-        </p:txBody>
-      </p:sp>
-      <p:sp>
-        <p:nvSpPr>
-          <p:cNvPr id="4" name="TextBox 3"/>
+                <a:latin typeface="Aptos"/>
+              </a:rPr>
+              <a:t>46.7</a:t>
+            </a:r>
+          </a:p>
+        </p:txBody>
+      </p:sp>
+      <p:sp>
+        <p:nvSpPr>
+          <p:cNvPr id="13" name="TextBox 12"/>
           <p:cNvSpPr txBox="1"/>
           <p:nvPr/>
         </p:nvSpPr>
         <p:spPr>
           <a:xfrm>
-            <a:off x="640080" y="1463040"/>
-            <a:ext cx="10972800" cy="5029200"/>
+            <a:off x="1115568" y="5285232"/>
+            <a:ext cx="1874519" cy="512064"/>
           </a:xfrm>
           <a:prstGeom prst="rect">
             <a:avLst/>
@@ -4907,91 +7898,48 @@
           <a:noFill/>
         </p:spPr>
         <p:txBody>
-          <a:bodyPr wrap="square">
+          <a:bodyPr wrap="square" lIns="0" rIns="0" tIns="0" bIns="0" anchor="t">
             <a:spAutoFit/>
           </a:bodyPr>
           <a:lstStyle/>
           <a:p>
-            <a:pPr>
+            <a:pPr algn="ctr">
+              <a:spcBef>
+                <a:spcPts val="0"/>
+              </a:spcBef>
               <a:spcAft>
-                <a:spcPts val="800"/>
+                <a:spcPts val="0"/>
               </a:spcAft>
-              <a:defRPr sz="1800" b="0">
+            </a:pPr>
+            <a:r>
+              <a:rPr sz="1100" b="1" i="0">
                 <a:solidFill>
-                  <a:srgbClr val="14243B"/>
+                  <a:srgbClr val="AEBCC6"/>
                 </a:solidFill>
-              </a:defRPr>
-            </a:pPr>
-            <a:r>
-              <a:t>• Our first e-mail: a deferred start date for faster payment, plus two checked facts: their notice period vs the contract, and their on-time delivery of 85 %</a:t>
-            </a:r>
-          </a:p>
-          <a:p>
-            <a:pPr>
-              <a:spcAft>
-                <a:spcPts val="800"/>
-              </a:spcAft>
-              <a:defRPr sz="1800" b="0">
-                <a:solidFill>
-                  <a:srgbClr val="14243B"/>
-                </a:solidFill>
-              </a:defRPr>
-            </a:pPr>
-            <a:r>
-              <a:t>• Supplier: "We checked the notice period data you cited; it holds and we took it into account. We did not know that - a fair point."</a:t>
-            </a:r>
-          </a:p>
-          <a:p>
-            <a:pPr>
-              <a:spcAft>
-                <a:spcPts val="800"/>
-              </a:spcAft>
-              <a:defRPr sz="1800" b="0">
-                <a:solidFill>
-                  <a:srgbClr val="14243B"/>
-                </a:solidFill>
-              </a:defRPr>
-            </a:pPr>
-            <a:r>
-              <a:t>• Result: €135.0 from April instead of €138.55 from November → score 87–89</a:t>
-            </a:r>
-          </a:p>
-        </p:txBody>
-      </p:sp>
-    </p:spTree>
-  </p:cSld>
-  <p:clrMapOvr>
-    <a:masterClrMapping/>
-  </p:clrMapOvr>
-</p:sld>
-</file>
-
-<file path=ppt/slides/slide8.xml><?xml version="1.0" encoding="utf-8"?>
-<p:sld xmlns:a="http://schemas.openxmlformats.org/drawingml/2006/main" xmlns:p="http://schemas.openxmlformats.org/presentationml/2006/main" xmlns:r="http://schemas.openxmlformats.org/officeDocument/2006/relationships">
-  <p:cSld>
-    <p:spTree>
-      <p:nvGrpSpPr>
-        <p:cNvPr id="1" name=""/>
-        <p:cNvGrpSpPr/>
-        <p:nvPr/>
-      </p:nvGrpSpPr>
-      <p:grpSpPr/>
-      <p:sp>
-        <p:nvSpPr>
-          <p:cNvPr id="2" name="Rectangle 1"/>
+                <a:latin typeface="Aptos"/>
+              </a:rPr>
+              <a:t>Original
+baseline</a:t>
+            </a:r>
+          </a:p>
+        </p:txBody>
+      </p:sp>
+      <p:sp>
+        <p:nvSpPr>
+          <p:cNvPr id="14" name="Rounded Rectangle 13"/>
           <p:cNvSpPr/>
           <p:nvPr/>
         </p:nvSpPr>
         <p:spPr>
           <a:xfrm>
-            <a:off x="0" y="0"/>
-            <a:ext cx="12191695" cy="164592"/>
-          </a:xfrm>
-          <a:prstGeom prst="rect">
+            <a:off x="3538728" y="3328278"/>
+            <a:ext cx="1216152" cy="1819793"/>
+          </a:xfrm>
+          <a:prstGeom prst="roundRect">
             <a:avLst/>
           </a:prstGeom>
           <a:solidFill>
-            <a:srgbClr val="0F8B8D"/>
+            <a:srgbClr val="A9EEC2"/>
           </a:solidFill>
           <a:ln>
             <a:noFill/>
@@ -5021,14 +7969,14 @@
       </p:sp>
       <p:sp>
         <p:nvSpPr>
-          <p:cNvPr id="3" name="TextBox 2"/>
+          <p:cNvPr id="15" name="TextBox 14"/>
           <p:cNvSpPr txBox="1"/>
           <p:nvPr/>
         </p:nvSpPr>
         <p:spPr>
           <a:xfrm>
-            <a:off x="548640" y="365760"/>
-            <a:ext cx="10972800" cy="914400"/>
+            <a:off x="3337560" y="2916798"/>
+            <a:ext cx="1627632" cy="292608"/>
           </a:xfrm>
           <a:prstGeom prst="rect">
             <a:avLst/>
@@ -5036,34 +7984,41 @@
           <a:noFill/>
         </p:spPr>
         <p:txBody>
-          <a:bodyPr wrap="none">
+          <a:bodyPr wrap="square" lIns="0" rIns="0" tIns="0" bIns="0" anchor="t">
             <a:spAutoFit/>
           </a:bodyPr>
           <a:lstStyle/>
           <a:p>
-            <a:pPr>
-              <a:defRPr sz="3200" b="1">
+            <a:pPr algn="ctr">
+              <a:spcBef>
+                <a:spcPts val="0"/>
+              </a:spcBef>
+              <a:spcAft>
+                <a:spcPts val="0"/>
+              </a:spcAft>
+            </a:pPr>
+            <a:r>
+              <a:rPr sz="2000" b="1" i="0">
                 <a:solidFill>
-                  <a:srgbClr val="14243B"/>
+                  <a:srgbClr val="F5F7F9"/>
                 </a:solidFill>
-              </a:defRPr>
-            </a:pPr>
-            <a:r>
-              <a:t>Honest limits and next steps</a:t>
-            </a:r>
-          </a:p>
-        </p:txBody>
-      </p:sp>
-      <p:sp>
-        <p:nvSpPr>
-          <p:cNvPr id="4" name="TextBox 3"/>
+                <a:latin typeface="Aptos"/>
+              </a:rPr>
+              <a:t>75.1</a:t>
+            </a:r>
+          </a:p>
+        </p:txBody>
+      </p:sp>
+      <p:sp>
+        <p:nvSpPr>
+          <p:cNvPr id="16" name="TextBox 15"/>
           <p:cNvSpPr txBox="1"/>
           <p:nvPr/>
         </p:nvSpPr>
         <p:spPr>
           <a:xfrm>
-            <a:off x="640080" y="1463040"/>
-            <a:ext cx="10972800" cy="5029200"/>
+            <a:off x="3209544" y="5285232"/>
+            <a:ext cx="1874519" cy="512064"/>
           </a:xfrm>
           <a:prstGeom prst="rect">
             <a:avLst/>
@@ -5071,53 +8026,443 @@
           <a:noFill/>
         </p:spPr>
         <p:txBody>
-          <a:bodyPr wrap="square">
+          <a:bodyPr wrap="square" lIns="0" rIns="0" tIns="0" bIns="0" anchor="t">
             <a:spAutoFit/>
           </a:bodyPr>
           <a:lstStyle/>
           <a:p>
-            <a:pPr>
+            <a:pPr algn="ctr">
+              <a:spcBef>
+                <a:spcPts val="0"/>
+              </a:spcBef>
               <a:spcAft>
-                <a:spcPts val="800"/>
+                <a:spcPts val="0"/>
               </a:spcAft>
-              <a:defRPr sz="1800" b="0">
+            </a:pPr>
+            <a:r>
+              <a:rPr sz="1100" b="1" i="0">
                 <a:solidFill>
-                  <a:srgbClr val="14243B"/>
+                  <a:srgbClr val="AEBCC6"/>
                 </a:solidFill>
-              </a:defRPr>
+                <a:latin typeface="Aptos"/>
+              </a:rPr>
+              <a:t>Best measured
+practice batch</a:t>
+            </a:r>
+          </a:p>
+        </p:txBody>
+      </p:sp>
+      <p:sp>
+        <p:nvSpPr>
+          <p:cNvPr id="17" name="Rounded Rectangle 16"/>
+          <p:cNvSpPr/>
+          <p:nvPr/>
+        </p:nvSpPr>
+        <p:spPr>
+          <a:xfrm>
+            <a:off x="6080760" y="1856231"/>
+            <a:ext cx="5321808" cy="1856231"/>
+          </a:xfrm>
+          <a:prstGeom prst="roundRect">
+            <a:avLst/>
+          </a:prstGeom>
+          <a:solidFill>
+            <a:srgbClr val="1A2632"/>
+          </a:solidFill>
+          <a:ln>
+            <a:noFill/>
+          </a:ln>
+        </p:spPr>
+        <p:style>
+          <a:lnRef idx="1">
+            <a:schemeClr val="accent1"/>
+          </a:lnRef>
+          <a:fillRef idx="3">
+            <a:schemeClr val="accent1"/>
+          </a:fillRef>
+          <a:effectRef idx="2">
+            <a:schemeClr val="accent1"/>
+          </a:effectRef>
+          <a:fontRef idx="minor">
+            <a:schemeClr val="lt1"/>
+          </a:fontRef>
+        </p:style>
+        <p:txBody>
+          <a:bodyPr rtlCol="0" anchor="ctr"/>
+          <a:lstStyle/>
+          <a:p>
+            <a:pPr algn="ctr"/>
+          </a:p>
+        </p:txBody>
+      </p:sp>
+      <p:sp>
+        <p:nvSpPr>
+          <p:cNvPr id="18" name="TextBox 17"/>
+          <p:cNvSpPr txBox="1"/>
+          <p:nvPr/>
+        </p:nvSpPr>
+        <p:spPr>
+          <a:xfrm>
+            <a:off x="6382512" y="2121408"/>
+            <a:ext cx="2011680" cy="228600"/>
+          </a:xfrm>
+          <a:prstGeom prst="rect">
+            <a:avLst/>
+          </a:prstGeom>
+          <a:noFill/>
+        </p:spPr>
+        <p:txBody>
+          <a:bodyPr wrap="square" lIns="0" rIns="0" tIns="0" bIns="0" anchor="t">
+            <a:spAutoFit/>
+          </a:bodyPr>
+          <a:lstStyle/>
+          <a:p>
+            <a:pPr algn="l">
+              <a:spcBef>
+                <a:spcPts val="0"/>
+              </a:spcBef>
+              <a:spcAft>
+                <a:spcPts val="0"/>
+              </a:spcAft>
             </a:pPr>
             <a:r>
-              <a:t>• Some suppliers have structural ceilings (P02: an indexed deal capped near 74; it needs a fixed price this supplier never quoted)</a:t>
-            </a:r>
-          </a:p>
-          <a:p>
-            <a:pPr>
+              <a:rPr sz="1100" b="1" i="0">
+                <a:solidFill>
+                  <a:srgbClr val="FFBE70"/>
+                </a:solidFill>
+                <a:latin typeface="Aptos"/>
+              </a:rPr>
+              <a:t>COMPETITIVE BID</a:t>
+            </a:r>
+          </a:p>
+        </p:txBody>
+      </p:sp>
+      <p:sp>
+        <p:nvSpPr>
+          <p:cNvPr id="19" name="TextBox 18"/>
+          <p:cNvSpPr txBox="1"/>
+          <p:nvPr/>
+        </p:nvSpPr>
+        <p:spPr>
+          <a:xfrm>
+            <a:off x="6382512" y="2532888"/>
+            <a:ext cx="4572000" cy="502920"/>
+          </a:xfrm>
+          <a:prstGeom prst="rect">
+            <a:avLst/>
+          </a:prstGeom>
+          <a:noFill/>
+        </p:spPr>
+        <p:txBody>
+          <a:bodyPr wrap="square" lIns="0" rIns="0" tIns="0" bIns="0" anchor="t">
+            <a:spAutoFit/>
+          </a:bodyPr>
+          <a:lstStyle/>
+          <a:p>
+            <a:pPr algn="l">
+              <a:spcBef>
+                <a:spcPts val="0"/>
+              </a:spcBef>
               <a:spcAft>
-                <a:spcPts val="800"/>
+                <a:spcPts val="0"/>
               </a:spcAft>
-              <a:defRPr sz="1800" b="0">
+            </a:pPr>
+            <a:r>
+              <a:rPr sz="2700" b="1" i="0">
                 <a:solidFill>
-                  <a:srgbClr val="14243B"/>
+                  <a:srgbClr val="F5F7F9"/>
                 </a:solidFill>
-              </a:defRPr>
+                <a:latin typeface="Aptos"/>
+              </a:rPr>
+              <a:t>92.4   /   79.2</a:t>
+            </a:r>
+          </a:p>
+        </p:txBody>
+      </p:sp>
+      <p:sp>
+        <p:nvSpPr>
+          <p:cNvPr id="20" name="TextBox 19"/>
+          <p:cNvSpPr txBox="1"/>
+          <p:nvPr/>
+        </p:nvSpPr>
+        <p:spPr>
+          <a:xfrm>
+            <a:off x="6400800" y="3136392"/>
+            <a:ext cx="4526280" cy="274320"/>
+          </a:xfrm>
+          <a:prstGeom prst="rect">
+            <a:avLst/>
+          </a:prstGeom>
+          <a:noFill/>
+        </p:spPr>
+        <p:txBody>
+          <a:bodyPr wrap="square" lIns="0" rIns="0" tIns="0" bIns="0" anchor="t">
+            <a:spAutoFit/>
+          </a:bodyPr>
+          <a:lstStyle/>
+          <a:p>
+            <a:pPr algn="l">
+              <a:spcBef>
+                <a:spcPts val="0"/>
+              </a:spcBef>
+              <a:spcAft>
+                <a:spcPts val="0"/>
+              </a:spcAft>
             </a:pPr>
             <a:r>
-              <a:t>• Remaining gaps are price endgames; next: one-session experiments on deterministic suppliers</a:t>
-            </a:r>
-          </a:p>
-          <a:p>
-            <a:pPr>
+              <a:rPr sz="1400" b="0" i="0">
+                <a:solidFill>
+                  <a:srgbClr val="AEBCC6"/>
+                </a:solidFill>
+                <a:latin typeface="Aptos"/>
+              </a:rPr>
+              <a:t>Two practice tests against suppliers</a:t>
+            </a:r>
+          </a:p>
+        </p:txBody>
+      </p:sp>
+      <p:sp>
+        <p:nvSpPr>
+          <p:cNvPr id="21" name="Rounded Rectangle 20"/>
+          <p:cNvSpPr/>
+          <p:nvPr/>
+        </p:nvSpPr>
+        <p:spPr>
+          <a:xfrm>
+            <a:off x="6080760" y="3977639"/>
+            <a:ext cx="5321808" cy="1170432"/>
+          </a:xfrm>
+          <a:prstGeom prst="roundRect">
+            <a:avLst/>
+          </a:prstGeom>
+          <a:solidFill>
+            <a:srgbClr val="202F3B"/>
+          </a:solidFill>
+          <a:ln>
+            <a:noFill/>
+          </a:ln>
+        </p:spPr>
+        <p:style>
+          <a:lnRef idx="1">
+            <a:schemeClr val="accent1"/>
+          </a:lnRef>
+          <a:fillRef idx="3">
+            <a:schemeClr val="accent1"/>
+          </a:fillRef>
+          <a:effectRef idx="2">
+            <a:schemeClr val="accent1"/>
+          </a:effectRef>
+          <a:fontRef idx="minor">
+            <a:schemeClr val="lt1"/>
+          </a:fontRef>
+        </p:style>
+        <p:txBody>
+          <a:bodyPr rtlCol="0" anchor="ctr"/>
+          <a:lstStyle/>
+          <a:p>
+            <a:pPr algn="ctr"/>
+          </a:p>
+        </p:txBody>
+      </p:sp>
+      <p:sp>
+        <p:nvSpPr>
+          <p:cNvPr id="22" name="TextBox 21"/>
+          <p:cNvSpPr txBox="1"/>
+          <p:nvPr/>
+        </p:nvSpPr>
+        <p:spPr>
+          <a:xfrm>
+            <a:off x="6373368" y="4178808"/>
+            <a:ext cx="4709160" cy="292608"/>
+          </a:xfrm>
+          <a:prstGeom prst="rect">
+            <a:avLst/>
+          </a:prstGeom>
+          <a:noFill/>
+        </p:spPr>
+        <p:txBody>
+          <a:bodyPr wrap="square" lIns="0" rIns="0" tIns="0" bIns="0" anchor="t">
+            <a:spAutoFit/>
+          </a:bodyPr>
+          <a:lstStyle/>
+          <a:p>
+            <a:pPr algn="l">
+              <a:spcBef>
+                <a:spcPts val="0"/>
+              </a:spcBef>
               <a:spcAft>
-                <a:spcPts val="800"/>
+                <a:spcPts val="0"/>
               </a:spcAft>
-              <a:defRPr sz="1800" b="0">
+            </a:pPr>
+            <a:r>
+              <a:rPr sz="1600" b="1" i="0">
                 <a:solidFill>
-                  <a:srgbClr val="14243B"/>
+                  <a:srgbClr val="A9EEC2"/>
                 </a:solidFill>
-              </a:defRPr>
+                <a:latin typeface="Aptos"/>
+              </a:rPr>
+              <a:t>10 / 10 deals   ·   0 errors   ·   0 timeouts</a:t>
+            </a:r>
+          </a:p>
+        </p:txBody>
+      </p:sp>
+      <p:sp>
+        <p:nvSpPr>
+          <p:cNvPr id="23" name="TextBox 22"/>
+          <p:cNvSpPr txBox="1"/>
+          <p:nvPr/>
+        </p:nvSpPr>
+        <p:spPr>
+          <a:xfrm>
+            <a:off x="6382512" y="4590288"/>
+            <a:ext cx="4572000" cy="246888"/>
+          </a:xfrm>
+          <a:prstGeom prst="rect">
+            <a:avLst/>
+          </a:prstGeom>
+          <a:noFill/>
+        </p:spPr>
+        <p:txBody>
+          <a:bodyPr wrap="square" lIns="0" rIns="0" tIns="0" bIns="0" anchor="t">
+            <a:spAutoFit/>
+          </a:bodyPr>
+          <a:lstStyle/>
+          <a:p>
+            <a:pPr algn="l">
+              <a:spcBef>
+                <a:spcPts val="0"/>
+              </a:spcBef>
+              <a:spcAft>
+                <a:spcPts val="0"/>
+              </a:spcAft>
             </a:pPr>
             <a:r>
-              <a:t>• On a real supplier: the reasoning transfers (total-cost menus, checked facts, answered questions); the numeric calibration would need re-learning</a:t>
+              <a:rPr sz="1200" b="0" i="0">
+                <a:solidFill>
+                  <a:srgbClr val="F5F7F9"/>
+                </a:solidFill>
+                <a:latin typeface="Aptos"/>
+              </a:rPr>
+              <a:t>Separate 10-case dress rehearsal</a:t>
+            </a:r>
+          </a:p>
+        </p:txBody>
+      </p:sp>
+      <p:sp>
+        <p:nvSpPr>
+          <p:cNvPr id="24" name="Rounded Rectangle 23"/>
+          <p:cNvSpPr/>
+          <p:nvPr/>
+        </p:nvSpPr>
+        <p:spPr>
+          <a:xfrm>
+            <a:off x="704088" y="5650992"/>
+            <a:ext cx="10698480" cy="420624"/>
+          </a:xfrm>
+          <a:prstGeom prst="roundRect">
+            <a:avLst/>
+          </a:prstGeom>
+          <a:solidFill>
+            <a:srgbClr val="302921"/>
+          </a:solidFill>
+          <a:ln>
+            <a:noFill/>
+          </a:ln>
+        </p:spPr>
+        <p:style>
+          <a:lnRef idx="1">
+            <a:schemeClr val="accent1"/>
+          </a:lnRef>
+          <a:fillRef idx="3">
+            <a:schemeClr val="accent1"/>
+          </a:fillRef>
+          <a:effectRef idx="2">
+            <a:schemeClr val="accent1"/>
+          </a:effectRef>
+          <a:fontRef idx="minor">
+            <a:schemeClr val="lt1"/>
+          </a:fontRef>
+        </p:style>
+        <p:txBody>
+          <a:bodyPr rtlCol="0" anchor="ctr"/>
+          <a:lstStyle/>
+          <a:p>
+            <a:pPr algn="ctr"/>
+          </a:p>
+        </p:txBody>
+      </p:sp>
+      <p:sp>
+        <p:nvSpPr>
+          <p:cNvPr id="25" name="TextBox 24"/>
+          <p:cNvSpPr txBox="1"/>
+          <p:nvPr/>
+        </p:nvSpPr>
+        <p:spPr>
+          <a:xfrm>
+            <a:off x="877824" y="5751576"/>
+            <a:ext cx="10332720" cy="164592"/>
+          </a:xfrm>
+          <a:prstGeom prst="rect">
+            <a:avLst/>
+          </a:prstGeom>
+          <a:noFill/>
+        </p:spPr>
+        <p:txBody>
+          <a:bodyPr wrap="square" lIns="0" rIns="0" tIns="0" bIns="0" anchor="t">
+            <a:spAutoFit/>
+          </a:bodyPr>
+          <a:lstStyle/>
+          <a:p>
+            <a:pPr algn="ctr">
+              <a:spcBef>
+                <a:spcPts val="0"/>
+              </a:spcBef>
+              <a:spcAft>
+                <a:spcPts val="0"/>
+              </a:spcAft>
+            </a:pPr>
+            <a:r>
+              <a:rPr sz="1000" b="1" i="0">
+                <a:solidFill>
+                  <a:srgbClr val="FFBE70"/>
+                </a:solidFill>
+                <a:latin typeface="Aptos"/>
+              </a:rPr>
+              <a:t>PRACTICE RESULTS, NOT THE COMPETITION FINAL.</a:t>
+            </a:r>
+          </a:p>
+        </p:txBody>
+      </p:sp>
+      <p:sp>
+        <p:nvSpPr>
+          <p:cNvPr id="26" name="TextBox 25"/>
+          <p:cNvSpPr txBox="1"/>
+          <p:nvPr/>
+        </p:nvSpPr>
+        <p:spPr>
+          <a:xfrm>
+            <a:off x="713232" y="2221992"/>
+            <a:ext cx="4389120" cy="201168"/>
+          </a:xfrm>
+          <a:prstGeom prst="rect">
+            <a:avLst/>
+          </a:prstGeom>
+          <a:noFill/>
+        </p:spPr>
+        <p:txBody>
+          <a:bodyPr wrap="none" lIns="0" rIns="0" tIns="0" bIns="0">
+            <a:spAutoFit/>
+          </a:bodyPr>
+          <a:lstStyle/>
+          <a:p>
+            <a:r>
+              <a:rPr sz="1100">
+                <a:solidFill>
+                  <a:srgbClr val="AEBCC6"/>
+                </a:solidFill>
+                <a:latin typeface="Aptos"/>
+              </a:rPr>
+              <a:t>Across 9 single-supplier practice cases</a:t>
             </a:r>
           </a:p>
         </p:txBody>
@@ -5448,4 +8793,324 @@
   </a:objectDefaults>
   <a:extraClrSchemeLst/>
 </a:theme>
+</file>
+
+<file path=ppt/theme/theme2.xml><?xml version="1.0" encoding="utf-8"?>
+<a:theme xmlns:a="http://schemas.openxmlformats.org/drawingml/2006/main" name="Office Theme">
+  <a:themeElements>
+    <a:clrScheme name="Office">
+      <a:dk1>
+        <a:sysClr val="windowText" lastClr="000000"/>
+      </a:dk1>
+      <a:lt1>
+        <a:sysClr val="window" lastClr="FFFFFF"/>
+      </a:lt1>
+      <a:dk2>
+        <a:srgbClr val="1F497D"/>
+      </a:dk2>
+      <a:lt2>
+        <a:srgbClr val="EEECE1"/>
+      </a:lt2>
+      <a:accent1>
+        <a:srgbClr val="4F81BD"/>
+      </a:accent1>
+      <a:accent2>
+        <a:srgbClr val="C0504D"/>
+      </a:accent2>
+      <a:accent3>
+        <a:srgbClr val="9BBB59"/>
+      </a:accent3>
+      <a:accent4>
+        <a:srgbClr val="8064A2"/>
+      </a:accent4>
+      <a:accent5>
+        <a:srgbClr val="4BACC6"/>
+      </a:accent5>
+      <a:accent6>
+        <a:srgbClr val="F79646"/>
+      </a:accent6>
+      <a:hlink>
+        <a:srgbClr val="0000FF"/>
+      </a:hlink>
+      <a:folHlink>
+        <a:srgbClr val="800080"/>
+      </a:folHlink>
+    </a:clrScheme>
+    <a:fontScheme name="Office">
+      <a:majorFont>
+        <a:latin typeface="Calibri"/>
+        <a:ea typeface=""/>
+        <a:cs typeface=""/>
+        <a:font script="Jpan" typeface="ＭＳ Ｐゴシック"/>
+        <a:font script="Hang" typeface="맑은 고딕"/>
+        <a:font script="Hans" typeface="宋体"/>
+        <a:font script="Hant" typeface="新細明體"/>
+        <a:font script="Arab" typeface="Times New Roman"/>
+        <a:font script="Hebr" typeface="Times New Roman"/>
+        <a:font script="Thai" typeface="Angsana New"/>
+        <a:font script="Ethi" typeface="Nyala"/>
+        <a:font script="Beng" typeface="Vrinda"/>
+        <a:font script="Gujr" typeface="Shruti"/>
+        <a:font script="Khmr" typeface="MoolBoran"/>
+        <a:font script="Knda" typeface="Tunga"/>
+        <a:font script="Guru" typeface="Raavi"/>
+        <a:font script="Cans" typeface="Euphemia"/>
+        <a:font script="Cher" typeface="Plantagenet Cherokee"/>
+        <a:font script="Yiii" typeface="Microsoft Yi Baiti"/>
+        <a:font script="Tibt" typeface="Microsoft Himalaya"/>
+        <a:font script="Thaa" typeface="MV Boli"/>
+        <a:font script="Deva" typeface="Mangal"/>
+        <a:font script="Telu" typeface="Gautami"/>
+        <a:font script="Taml" typeface="Latha"/>
+        <a:font script="Syrc" typeface="Estrangelo Edessa"/>
+        <a:font script="Orya" typeface="Kalinga"/>
+        <a:font script="Mlym" typeface="Kartika"/>
+        <a:font script="Laoo" typeface="DokChampa"/>
+        <a:font script="Sinh" typeface="Iskoola Pota"/>
+        <a:font script="Mong" typeface="Mongolian Baiti"/>
+        <a:font script="Viet" typeface="Times New Roman"/>
+        <a:font script="Uigh" typeface="Microsoft Uighur"/>
+        <a:font script="Geor" typeface="Sylfaen"/>
+      </a:majorFont>
+      <a:minorFont>
+        <a:latin typeface="Calibri"/>
+        <a:ea typeface=""/>
+        <a:cs typeface=""/>
+        <a:font script="Jpan" typeface="ＭＳ Ｐゴシック"/>
+        <a:font script="Hang" typeface="맑은 고딕"/>
+        <a:font script="Hans" typeface="宋体"/>
+        <a:font script="Hant" typeface="新細明體"/>
+        <a:font script="Arab" typeface="Arial"/>
+        <a:font script="Hebr" typeface="Arial"/>
+        <a:font script="Thai" typeface="Cordia New"/>
+        <a:font script="Ethi" typeface="Nyala"/>
+        <a:font script="Beng" typeface="Vrinda"/>
+        <a:font script="Gujr" typeface="Shruti"/>
+        <a:font script="Khmr" typeface="DaunPenh"/>
+        <a:font script="Knda" typeface="Tunga"/>
+        <a:font script="Guru" typeface="Raavi"/>
+        <a:font script="Cans" typeface="Euphemia"/>
+        <a:font script="Cher" typeface="Plantagenet Cherokee"/>
+        <a:font script="Yiii" typeface="Microsoft Yi Baiti"/>
+        <a:font script="Tibt" typeface="Microsoft Himalaya"/>
+        <a:font script="Thaa" typeface="MV Boli"/>
+        <a:font script="Deva" typeface="Mangal"/>
+        <a:font script="Telu" typeface="Gautami"/>
+        <a:font script="Taml" typeface="Latha"/>
+        <a:font script="Syrc" typeface="Estrangelo Edessa"/>
+        <a:font script="Orya" typeface="Kalinga"/>
+        <a:font script="Mlym" typeface="Kartika"/>
+        <a:font script="Laoo" typeface="DokChampa"/>
+        <a:font script="Sinh" typeface="Iskoola Pota"/>
+        <a:font script="Mong" typeface="Mongolian Baiti"/>
+        <a:font script="Viet" typeface="Arial"/>
+        <a:font script="Uigh" typeface="Microsoft Uighur"/>
+        <a:font script="Geor" typeface="Sylfaen"/>
+      </a:minorFont>
+    </a:fontScheme>
+    <a:fmtScheme name="Office">
+      <a:fillStyleLst>
+        <a:solidFill>
+          <a:schemeClr val="phClr"/>
+        </a:solidFill>
+        <a:gradFill rotWithShape="1">
+          <a:gsLst>
+            <a:gs pos="0">
+              <a:schemeClr val="phClr">
+                <a:tint val="50000"/>
+                <a:satMod val="300000"/>
+              </a:schemeClr>
+            </a:gs>
+            <a:gs pos="35000">
+              <a:schemeClr val="phClr">
+                <a:tint val="37000"/>
+                <a:satMod val="300000"/>
+              </a:schemeClr>
+            </a:gs>
+            <a:gs pos="100000">
+              <a:schemeClr val="phClr">
+                <a:tint val="15000"/>
+                <a:satMod val="350000"/>
+              </a:schemeClr>
+            </a:gs>
+          </a:gsLst>
+          <a:lin ang="16200000" scaled="1"/>
+        </a:gradFill>
+        <a:gradFill rotWithShape="1">
+          <a:gsLst>
+            <a:gs pos="0">
+              <a:schemeClr val="phClr">
+                <a:tint val="100000"/>
+                <a:shade val="100000"/>
+                <a:satMod val="130000"/>
+              </a:schemeClr>
+            </a:gs>
+            <a:gs pos="100000">
+              <a:schemeClr val="phClr">
+                <a:tint val="50000"/>
+                <a:shade val="100000"/>
+                <a:satMod val="350000"/>
+              </a:schemeClr>
+            </a:gs>
+          </a:gsLst>
+          <a:lin ang="16200000" scaled="0"/>
+        </a:gradFill>
+      </a:fillStyleLst>
+      <a:lnStyleLst>
+        <a:ln w="9525" cap="flat" cmpd="sng" algn="ctr">
+          <a:solidFill>
+            <a:schemeClr val="phClr">
+              <a:shade val="95000"/>
+              <a:satMod val="105000"/>
+            </a:schemeClr>
+          </a:solidFill>
+          <a:prstDash val="solid"/>
+        </a:ln>
+        <a:ln w="25400" cap="flat" cmpd="sng" algn="ctr">
+          <a:solidFill>
+            <a:schemeClr val="phClr"/>
+          </a:solidFill>
+          <a:prstDash val="solid"/>
+        </a:ln>
+        <a:ln w="38100" cap="flat" cmpd="sng" algn="ctr">
+          <a:solidFill>
+            <a:schemeClr val="phClr"/>
+          </a:solidFill>
+          <a:prstDash val="solid"/>
+        </a:ln>
+      </a:lnStyleLst>
+      <a:effectStyleLst>
+        <a:effectStyle>
+          <a:effectLst>
+            <a:outerShdw blurRad="40000" dist="20000" dir="5400000" rotWithShape="0">
+              <a:srgbClr val="000000">
+                <a:alpha val="38000"/>
+              </a:srgbClr>
+            </a:outerShdw>
+          </a:effectLst>
+        </a:effectStyle>
+        <a:effectStyle>
+          <a:effectLst>
+            <a:outerShdw blurRad="40000" dist="23000" dir="5400000" rotWithShape="0">
+              <a:srgbClr val="000000">
+                <a:alpha val="35000"/>
+              </a:srgbClr>
+            </a:outerShdw>
+          </a:effectLst>
+        </a:effectStyle>
+        <a:effectStyle>
+          <a:effectLst>
+            <a:outerShdw blurRad="40000" dist="23000" dir="5400000" rotWithShape="0">
+              <a:srgbClr val="000000">
+                <a:alpha val="35000"/>
+              </a:srgbClr>
+            </a:outerShdw>
+          </a:effectLst>
+          <a:scene3d>
+            <a:camera prst="orthographicFront">
+              <a:rot lat="0" lon="0" rev="0"/>
+            </a:camera>
+            <a:lightRig rig="threePt" dir="t">
+              <a:rot lat="0" lon="0" rev="1200000"/>
+            </a:lightRig>
+          </a:scene3d>
+          <a:sp3d>
+            <a:bevelT w="63500" h="25400"/>
+          </a:sp3d>
+        </a:effectStyle>
+      </a:effectStyleLst>
+      <a:bgFillStyleLst>
+        <a:solidFill>
+          <a:schemeClr val="phClr"/>
+        </a:solidFill>
+        <a:gradFill rotWithShape="1">
+          <a:gsLst>
+            <a:gs pos="0">
+              <a:schemeClr val="phClr">
+                <a:tint val="40000"/>
+                <a:satMod val="350000"/>
+              </a:schemeClr>
+            </a:gs>
+            <a:gs pos="40000">
+              <a:schemeClr val="phClr">
+                <a:tint val="45000"/>
+                <a:shade val="99000"/>
+                <a:satMod val="350000"/>
+              </a:schemeClr>
+            </a:gs>
+            <a:gs pos="100000">
+              <a:schemeClr val="phClr">
+                <a:shade val="20000"/>
+                <a:satMod val="255000"/>
+              </a:schemeClr>
+            </a:gs>
+          </a:gsLst>
+          <a:path path="circle">
+            <a:fillToRect l="50000" t="-80000" r="50000" b="180000"/>
+          </a:path>
+        </a:gradFill>
+        <a:gradFill rotWithShape="1">
+          <a:gsLst>
+            <a:gs pos="0">
+              <a:schemeClr val="phClr">
+                <a:tint val="80000"/>
+                <a:satMod val="300000"/>
+              </a:schemeClr>
+            </a:gs>
+            <a:gs pos="100000">
+              <a:schemeClr val="phClr">
+                <a:shade val="30000"/>
+                <a:satMod val="200000"/>
+              </a:schemeClr>
+            </a:gs>
+          </a:gsLst>
+          <a:path path="circle">
+            <a:fillToRect l="50000" t="50000" r="50000" b="50000"/>
+          </a:path>
+        </a:gradFill>
+      </a:bgFillStyleLst>
+    </a:fmtScheme>
+  </a:themeElements>
+  <a:objectDefaults>
+    <a:spDef>
+      <a:spPr/>
+      <a:bodyPr/>
+      <a:lstStyle/>
+      <a:style>
+        <a:lnRef idx="1">
+          <a:schemeClr val="accent1"/>
+        </a:lnRef>
+        <a:fillRef idx="3">
+          <a:schemeClr val="accent1"/>
+        </a:fillRef>
+        <a:effectRef idx="2">
+          <a:schemeClr val="accent1"/>
+        </a:effectRef>
+        <a:fontRef idx="minor">
+          <a:schemeClr val="lt1"/>
+        </a:fontRef>
+      </a:style>
+    </a:spDef>
+    <a:lnDef>
+      <a:spPr/>
+      <a:bodyPr/>
+      <a:lstStyle/>
+      <a:style>
+        <a:lnRef idx="2">
+          <a:schemeClr val="accent1"/>
+        </a:lnRef>
+        <a:fillRef idx="0">
+          <a:schemeClr val="accent1"/>
+        </a:fillRef>
+        <a:effectRef idx="1">
+          <a:schemeClr val="accent1"/>
+        </a:effectRef>
+        <a:fontRef idx="minor">
+          <a:schemeClr val="tx1"/>
+        </a:fontRef>
+      </a:style>
+    </a:lnDef>
+  </a:objectDefaults>
+  <a:extraClrSchemeLst/>
+</a:theme>
 </file>